--- a/CarStats-Presentation.pptx
+++ b/CarStats-Presentation.pptx
@@ -4,6 +4,9 @@
   <p:sldMasterIdLst>
     <p:sldMasterId id="2147483648" r:id="rId1"/>
   </p:sldMasterIdLst>
+  <p:notesMasterIdLst>
+    <p:notesMasterId r:id="rId18"/>
+  </p:notesMasterIdLst>
   <p:sldIdLst>
     <p:sldId id="256" r:id="rId2"/>
     <p:sldId id="257" r:id="rId3"/>
@@ -22,9 +25,6 @@
     <p:sldId id="270" r:id="rId16"/>
     <p:sldId id="271" r:id="rId17"/>
   </p:sldIdLst>
-  <p:notesMasterIdLst>
-    <p:notesMasterId r:id="rId18"/>
-  </p:notesMasterIdLst>
   <p:sldSz cx="12192000" cy="6858000"/>
   <p:notesSz cx="6858000" cy="12192000"/>
   <p:defaultTextStyle>
@@ -119,13 +119,20 @@
       </a:defRPr>
     </a:lvl9pPr>
   </p:defaultTextStyle>
+  <p:extLst>
+    <p:ext uri="{EFAFB233-063F-42B5-8137-9DF3F51BA10A}">
+      <p15:sldGuideLst xmlns:p15="http://schemas.microsoft.com/office/powerpoint/2012/main"/>
+    </p:ext>
+  </p:extLst>
 </p:presentation>
 </file>
 
 <file path=ppt/charts/chart1.xml><?xml version="1.0" encoding="utf-8"?>
-<c:chartSpace xmlns:c="http://schemas.openxmlformats.org/drawingml/2006/chart" xmlns:a="http://schemas.openxmlformats.org/drawingml/2006/main" xmlns:r="http://schemas.openxmlformats.org/officeDocument/2006/relationships">
+<c:chartSpace xmlns:c="http://schemas.openxmlformats.org/drawingml/2006/chart" xmlns:a="http://schemas.openxmlformats.org/drawingml/2006/main" xmlns:r="http://schemas.openxmlformats.org/officeDocument/2006/relationships" xmlns:c16r2="http://schemas.microsoft.com/office/drawing/2015/06/chart">
   <c:date1904 val="0"/>
+  <c:lang val="he-IL"/>
   <c:roundedCorners val="1"/>
+  <c:style val="2"/>
   <c:chart>
     <c:title>
       <c:tx>
@@ -142,7 +149,7 @@
               </a:defRPr>
             </a:pPr>
             <a:r>
-              <a:rPr sz="1400" b="0" i="0" u="none" strike="noStrike">
+              <a:rPr lang="he-IL" sz="1400" b="0" i="0" u="none" strike="noStrike">
                 <a:solidFill>
                   <a:srgbClr val="16222E"/>
                 </a:solidFill>
@@ -153,7 +160,6 @@
           </a:p>
         </c:rich>
       </c:tx>
-      <c:layout/>
       <c:overlay val="0"/>
     </c:title>
     <c:autoTitleDeleted val="0"/>
@@ -186,18 +192,26 @@
           <c:invertIfNegative val="0"/>
           <c:dLbls>
             <c:numFmt formatCode="#,##0" sourceLinked="0"/>
+            <c:spPr>
+              <a:noFill/>
+              <a:ln>
+                <a:noFill/>
+              </a:ln>
+              <a:effectLst/>
+            </c:spPr>
             <c:txPr>
               <a:bodyPr/>
               <a:lstStyle/>
               <a:p>
                 <a:pPr>
-                  <a:defRPr b="0" i="0" strike="noStrike" sz="1100" u="none">
+                  <a:defRPr sz="1100" b="0" i="0" u="none" strike="noStrike">
                     <a:solidFill>
                       <a:srgbClr val="16222E"/>
                     </a:solidFill>
                     <a:latin typeface="Arial"/>
                   </a:defRPr>
                 </a:pPr>
+                <a:endParaRPr lang="he-IL"/>
               </a:p>
             </c:txPr>
             <c:showLegendKey val="0"/>
@@ -207,34 +221,37 @@
             <c:showPercent val="0"/>
             <c:showBubbleSize val="0"/>
             <c:showLeaderLines val="0"/>
+            <c:extLst>
+              <c:ext xmlns:c15="http://schemas.microsoft.com/office/drawing/2012/chart" uri="{CE6537A1-D6FC-4f65-9D91-7224C49458BB}">
+                <c15:showLeaderLines val="0"/>
+              </c:ext>
+            </c:extLst>
           </c:dLbls>
           <c:cat>
-            <c:multiLvlStrRef>
+            <c:strRef>
               <c:f>Sheet1!$A$2:$A$7</c:f>
-              <c:multiLvlStrCache>
+              <c:strCache>
                 <c:ptCount val="6"/>
-                <c:lvl>
-                  <c:pt idx="0">
-                    <c:v>routeErrorMessage</c:v>
-                  </c:pt>
-                  <c:pt idx="1">
-                    <c:v>vindecode</c:v>
-                  </c:pt>
-                  <c:pt idx="2">
-                    <c:v>password</c:v>
-                  </c:pt>
-                  <c:pt idx="3">
-                    <c:v>fueleconomy</c:v>
-                  </c:pt>
-                  <c:pt idx="4">
-                    <c:v>severity</c:v>
-                  </c:pt>
-                  <c:pt idx="5">
-                    <c:v>fuel</c:v>
-                  </c:pt>
-                </c:lvl>
-              </c:multiLvlStrCache>
-            </c:multiLvlStrRef>
+                <c:pt idx="0">
+                  <c:v>routeErrorMessage</c:v>
+                </c:pt>
+                <c:pt idx="1">
+                  <c:v>vindecode</c:v>
+                </c:pt>
+                <c:pt idx="2">
+                  <c:v>password</c:v>
+                </c:pt>
+                <c:pt idx="3">
+                  <c:v>fueleconomy</c:v>
+                </c:pt>
+                <c:pt idx="4">
+                  <c:v>severity</c:v>
+                </c:pt>
+                <c:pt idx="5">
+                  <c:v>fuel</c:v>
+                </c:pt>
+              </c:strCache>
+            </c:strRef>
           </c:cat>
           <c:val>
             <c:numRef>
@@ -263,36 +280,23 @@
               </c:numCache>
             </c:numRef>
           </c:val>
+          <c:extLst>
+            <c:ext xmlns:c16="http://schemas.microsoft.com/office/drawing/2014/chart" uri="{C3380CC4-5D6E-409C-BE32-E72D297353CC}">
+              <c16:uniqueId val="{00000000-9486-4EAD-9854-54949AC4B6AA}"/>
+            </c:ext>
+          </c:extLst>
         </c:ser>
         <c:dLbls>
-          <c:numFmt formatCode="#,##0" sourceLinked="0"/>
-          <c:txPr>
-            <a:bodyPr/>
-            <a:lstStyle/>
-            <a:p>
-              <a:pPr>
-                <a:defRPr b="0" i="0" strike="noStrike" sz="1100" u="none">
-                  <a:solidFill>
-                    <a:srgbClr val="16222E"/>
-                  </a:solidFill>
-                  <a:latin typeface="Arial"/>
-                </a:defRPr>
-              </a:pPr>
-            </a:p>
-          </c:txPr>
           <c:showLegendKey val="0"/>
           <c:showVal val="1"/>
           <c:showCatName val="0"/>
           <c:showSerName val="0"/>
           <c:showPercent val="0"/>
           <c:showBubbleSize val="0"/>
-          <c:showLeaderLines val="0"/>
         </c:dLbls>
         <c:gapWidth val="55"/>
-        <c:overlap val="0"/>
         <c:axId val="2094734554"/>
         <c:axId val="2094734552"/>
-        <c:axId val="2094734556"/>
       </c:barChart>
       <c:catAx>
         <c:axId val="2094734554"/>
@@ -333,6 +337,7 @@
         <c:crosses val="autoZero"/>
         <c:auto val="1"/>
         <c:lblAlgn val="ctr"/>
+        <c:lblOffset val="100"/>
         <c:noMultiLvlLbl val="1"/>
       </c:catAx>
       <c:valAx>
@@ -395,6 +400,7 @@
     </c:plotArea>
     <c:plotVisOnly val="1"/>
     <c:dispBlanksAs val="span"/>
+    <c:showDLblsOverMax val="1"/>
   </c:chart>
   <c:spPr>
     <a:noFill/>
@@ -431,240 +437,16 @@
           <a:chExt cx="0" cy="0"/>
         </a:xfrm>
       </p:grpSpPr>
-      <p:sp>
-        <p:nvSpPr>
-          <p:cNvPr id="2" name="Header Placeholder 1"/>
-          <p:cNvSpPr>
-            <a:spLocks noGrp="1"/>
-          </p:cNvSpPr>
-          <p:nvPr>
-            <p:ph type="hdr" sz="quarter"/>
-          </p:nvPr>
-        </p:nvSpPr>
-        <p:spPr>
-          <a:xfrm>
-            <a:off x="0" y="0"/>
-            <a:ext cx="2971800" cy="458788"/>
-          </a:xfrm>
-          <a:prstGeom prst="rect">
-            <a:avLst/>
-          </a:prstGeom>
-        </p:spPr>
-        <p:txBody>
-          <a:bodyPr vert="horz" lIns="91440" tIns="45720" rIns="91440" bIns="45720" rtlCol="0"/>
-          <a:lstStyle>
-            <a:lvl1pPr algn="l">
-              <a:defRPr sz="1200"/>
-            </a:lvl1pPr>
-          </a:lstStyle>
-          <a:p>
-            <a:endParaRPr lang="en-US"/>
-          </a:p>
-        </p:txBody>
-      </p:sp>
-      <p:sp>
-        <p:nvSpPr>
-          <p:cNvPr id="3" name="Date Placeholder 2"/>
-          <p:cNvSpPr>
-            <a:spLocks noGrp="1"/>
-          </p:cNvSpPr>
-          <p:nvPr>
-            <p:ph type="dt" idx="1"/>
-          </p:nvPr>
-        </p:nvSpPr>
-        <p:spPr>
-          <a:xfrm>
-            <a:off x="3884613" y="0"/>
-            <a:ext cx="2971800" cy="458788"/>
-          </a:xfrm>
-          <a:prstGeom prst="rect">
-            <a:avLst/>
-          </a:prstGeom>
-        </p:spPr>
-        <p:txBody>
-          <a:bodyPr vert="horz" lIns="91440" tIns="45720" rIns="91440" bIns="45720" rtlCol="0"/>
-          <a:lstStyle>
-            <a:lvl1pPr algn="r">
-              <a:defRPr sz="1200"/>
-            </a:lvl1pPr>
-          </a:lstStyle>
-          <a:p>
-            <a:fld id="{5282F153-3F37-0F45-9E97-73ACFA13230C}" type="datetimeFigureOut">
-              <a:rPr lang="en-US"/>
-              <a:t>7/23/19</a:t>
-            </a:fld>
-            <a:endParaRPr lang="en-US"/>
-          </a:p>
-        </p:txBody>
-      </p:sp>
-      <p:sp>
-        <p:nvSpPr>
-          <p:cNvPr id="4" name="Slide Image Placeholder 3"/>
-          <p:cNvSpPr>
-            <a:spLocks noGrp="1" noRot="1" noChangeAspect="1"/>
-          </p:cNvSpPr>
-          <p:nvPr>
-            <p:ph type="sldImg" idx="2"/>
-          </p:nvPr>
-        </p:nvSpPr>
-        <p:spPr>
-          <a:xfrm>
-            <a:off x="685800" y="1143000"/>
-            <a:ext cx="5486400" cy="3086100"/>
-          </a:xfrm>
-          <a:prstGeom prst="rect">
-            <a:avLst/>
-          </a:prstGeom>
-          <a:noFill/>
-          <a:ln w="12700">
-            <a:solidFill>
-              <a:prstClr val="black"/>
-            </a:solidFill>
-          </a:ln>
-        </p:spPr>
-        <p:txBody>
-          <a:bodyPr vert="horz" lIns="91440" tIns="45720" rIns="91440" bIns="45720" rtlCol="0" anchor="ctr"/>
-          <a:lstStyle/>
-          <a:p>
-            <a:endParaRPr lang="en-US"/>
-          </a:p>
-        </p:txBody>
-      </p:sp>
-      <p:sp>
-        <p:nvSpPr>
-          <p:cNvPr id="5" name="Notes Placeholder 4"/>
-          <p:cNvSpPr>
-            <a:spLocks noGrp="1"/>
-          </p:cNvSpPr>
-          <p:nvPr>
-            <p:ph type="body" sz="quarter" idx="3"/>
-          </p:nvPr>
-        </p:nvSpPr>
-        <p:spPr>
-          <a:xfrm>
-            <a:off x="685800" y="4400550"/>
-            <a:ext cx="5486400" cy="3600450"/>
-          </a:xfrm>
-          <a:prstGeom prst="rect">
-            <a:avLst/>
-          </a:prstGeom>
-        </p:spPr>
-        <p:txBody>
-          <a:bodyPr vert="horz" lIns="91440" tIns="45720" rIns="91440" bIns="45720" rtlCol="0"/>
-          <a:lstStyle/>
-          <a:p>
-            <a:pPr lvl="0"/>
-            <a:r>
-              <a:rPr lang="en-US"/>
-              <a:t>Click to edit Master text styles</a:t>
-            </a:r>
-          </a:p>
-          <a:p>
-            <a:pPr lvl="1"/>
-            <a:r>
-              <a:rPr lang="en-US"/>
-              <a:t>Second level</a:t>
-            </a:r>
-          </a:p>
-          <a:p>
-            <a:pPr lvl="2"/>
-            <a:r>
-              <a:rPr lang="en-US"/>
-              <a:t>Third level</a:t>
-            </a:r>
-          </a:p>
-          <a:p>
-            <a:pPr lvl="3"/>
-            <a:r>
-              <a:rPr lang="en-US"/>
-              <a:t>Fourth level</a:t>
-            </a:r>
-          </a:p>
-          <a:p>
-            <a:pPr lvl="4"/>
-            <a:r>
-              <a:rPr lang="en-US"/>
-              <a:t>Fifth level</a:t>
-            </a:r>
-          </a:p>
-        </p:txBody>
-      </p:sp>
-      <p:sp>
-        <p:nvSpPr>
-          <p:cNvPr id="6" name="Footer Placeholder 5"/>
-          <p:cNvSpPr>
-            <a:spLocks noGrp="1"/>
-          </p:cNvSpPr>
-          <p:nvPr>
-            <p:ph type="ftr" sz="quarter" idx="4"/>
-          </p:nvPr>
-        </p:nvSpPr>
-        <p:spPr>
-          <a:xfrm>
-            <a:off x="0" y="8685213"/>
-            <a:ext cx="2971800" cy="458787"/>
-          </a:xfrm>
-          <a:prstGeom prst="rect">
-            <a:avLst/>
-          </a:prstGeom>
-        </p:spPr>
-        <p:txBody>
-          <a:bodyPr vert="horz" lIns="91440" tIns="45720" rIns="91440" bIns="45720" rtlCol="0" anchor="b"/>
-          <a:lstStyle>
-            <a:lvl1pPr algn="l">
-              <a:defRPr sz="1200"/>
-            </a:lvl1pPr>
-          </a:lstStyle>
-          <a:p>
-            <a:endParaRPr lang="en-US"/>
-          </a:p>
-        </p:txBody>
-      </p:sp>
-      <p:sp>
-        <p:nvSpPr>
-          <p:cNvPr id="7" name="Slide Number Placeholder 6"/>
-          <p:cNvSpPr>
-            <a:spLocks noGrp="1"/>
-          </p:cNvSpPr>
-          <p:nvPr>
-            <p:ph type="sldNum" sz="quarter" idx="5"/>
-          </p:nvPr>
-        </p:nvSpPr>
-        <p:spPr>
-          <a:xfrm>
-            <a:off x="3884613" y="8685213"/>
-            <a:ext cx="2971800" cy="458787"/>
-          </a:xfrm>
-          <a:prstGeom prst="rect">
-            <a:avLst/>
-          </a:prstGeom>
-        </p:spPr>
-        <p:txBody>
-          <a:bodyPr vert="horz" lIns="91440" tIns="45720" rIns="91440" bIns="45720" rtlCol="0" anchor="b"/>
-          <a:lstStyle>
-            <a:lvl1pPr algn="r">
-              <a:defRPr sz="1200"/>
-            </a:lvl1pPr>
-          </a:lstStyle>
-          <a:p>
-            <a:fld id="{CE5E9CC1-C706-0F49-92D6-E571CC5EEA8F}" type="slidenum">
-              <a:rPr lang="en-US"/>
-              <a:t>‹#›</a:t>
-            </a:fld>
-            <a:endParaRPr lang="en-US"/>
-          </a:p>
-        </p:txBody>
-      </p:sp>
     </p:spTree>
     <p:extLst>
       <p:ext uri="{BB962C8B-B14F-4D97-AF65-F5344CB8AC3E}">
-        <p14:creationId xmlns:p14="http://schemas.microsoft.com/office/powerpoint/2010/main" val="1024086991"/>
+        <p14:creationId xmlns:p14="http://schemas.microsoft.com/office/powerpoint/2010/main" val="1132796542"/>
       </p:ext>
     </p:extLst>
   </p:cSld>
   <p:clrMap bg1="lt1" tx1="dk1" bg2="lt2" tx2="dk2" accent1="accent1" accent2="accent2" accent3="accent3" accent4="accent4" accent5="accent5" accent6="accent6" hlink="hlink" folHlink="folHlink"/>
   <p:notesStyle>
-    <a:lvl1pPr marL="0" algn="l" defTabSz="914400" rtl="0" eaLnBrk="1" latinLnBrk="0" hangingPunct="1">
+    <a:lvl1pPr marL="0" algn="r" defTabSz="914400" rtl="1" eaLnBrk="1" latinLnBrk="0" hangingPunct="1">
       <a:defRPr sz="1200" kern="1200">
         <a:solidFill>
           <a:schemeClr val="tx1"/>
@@ -674,7 +456,7 @@
         <a:cs typeface="+mn-cs"/>
       </a:defRPr>
     </a:lvl1pPr>
-    <a:lvl2pPr marL="457200" algn="l" defTabSz="914400" rtl="0" eaLnBrk="1" latinLnBrk="0" hangingPunct="1">
+    <a:lvl2pPr marL="457200" algn="r" defTabSz="914400" rtl="1" eaLnBrk="1" latinLnBrk="0" hangingPunct="1">
       <a:defRPr sz="1200" kern="1200">
         <a:solidFill>
           <a:schemeClr val="tx1"/>
@@ -684,7 +466,7 @@
         <a:cs typeface="+mn-cs"/>
       </a:defRPr>
     </a:lvl2pPr>
-    <a:lvl3pPr marL="914400" algn="l" defTabSz="914400" rtl="0" eaLnBrk="1" latinLnBrk="0" hangingPunct="1">
+    <a:lvl3pPr marL="914400" algn="r" defTabSz="914400" rtl="1" eaLnBrk="1" latinLnBrk="0" hangingPunct="1">
       <a:defRPr sz="1200" kern="1200">
         <a:solidFill>
           <a:schemeClr val="tx1"/>
@@ -694,7 +476,7 @@
         <a:cs typeface="+mn-cs"/>
       </a:defRPr>
     </a:lvl3pPr>
-    <a:lvl4pPr marL="1371600" algn="l" defTabSz="914400" rtl="0" eaLnBrk="1" latinLnBrk="0" hangingPunct="1">
+    <a:lvl4pPr marL="1371600" algn="r" defTabSz="914400" rtl="1" eaLnBrk="1" latinLnBrk="0" hangingPunct="1">
       <a:defRPr sz="1200" kern="1200">
         <a:solidFill>
           <a:schemeClr val="tx1"/>
@@ -704,7 +486,7 @@
         <a:cs typeface="+mn-cs"/>
       </a:defRPr>
     </a:lvl4pPr>
-    <a:lvl5pPr marL="1828800" algn="l" defTabSz="914400" rtl="0" eaLnBrk="1" latinLnBrk="0" hangingPunct="1">
+    <a:lvl5pPr marL="1828800" algn="r" defTabSz="914400" rtl="1" eaLnBrk="1" latinLnBrk="0" hangingPunct="1">
       <a:defRPr sz="1200" kern="1200">
         <a:solidFill>
           <a:schemeClr val="tx1"/>
@@ -714,7 +496,7 @@
         <a:cs typeface="+mn-cs"/>
       </a:defRPr>
     </a:lvl5pPr>
-    <a:lvl6pPr marL="2286000" algn="l" defTabSz="914400" rtl="0" eaLnBrk="1" latinLnBrk="0" hangingPunct="1">
+    <a:lvl6pPr marL="2286000" algn="r" defTabSz="914400" rtl="1" eaLnBrk="1" latinLnBrk="0" hangingPunct="1">
       <a:defRPr sz="1200" kern="1200">
         <a:solidFill>
           <a:schemeClr val="tx1"/>
@@ -724,7 +506,7 @@
         <a:cs typeface="+mn-cs"/>
       </a:defRPr>
     </a:lvl6pPr>
-    <a:lvl7pPr marL="2743200" algn="l" defTabSz="914400" rtl="0" eaLnBrk="1" latinLnBrk="0" hangingPunct="1">
+    <a:lvl7pPr marL="2743200" algn="r" defTabSz="914400" rtl="1" eaLnBrk="1" latinLnBrk="0" hangingPunct="1">
       <a:defRPr sz="1200" kern="1200">
         <a:solidFill>
           <a:schemeClr val="tx1"/>
@@ -734,7 +516,7 @@
         <a:cs typeface="+mn-cs"/>
       </a:defRPr>
     </a:lvl7pPr>
-    <a:lvl8pPr marL="3200400" algn="l" defTabSz="914400" rtl="0" eaLnBrk="1" latinLnBrk="0" hangingPunct="1">
+    <a:lvl8pPr marL="3200400" algn="r" defTabSz="914400" rtl="1" eaLnBrk="1" latinLnBrk="0" hangingPunct="1">
       <a:defRPr sz="1200" kern="1200">
         <a:solidFill>
           <a:schemeClr val="tx1"/>
@@ -744,7 +526,7 @@
         <a:cs typeface="+mn-cs"/>
       </a:defRPr>
     </a:lvl8pPr>
-    <a:lvl9pPr marL="3657600" algn="l" defTabSz="914400" rtl="0" eaLnBrk="1" latinLnBrk="0" hangingPunct="1">
+    <a:lvl9pPr marL="3657600" algn="r" defTabSz="914400" rtl="1" eaLnBrk="1" latinLnBrk="0" hangingPunct="1">
       <a:defRPr sz="1200" kern="1200">
         <a:solidFill>
           <a:schemeClr val="tx1"/>
@@ -806,7 +588,6 @@
               <a:rPr lang="en-US" dirty="0"/>
               <a:t>שקופית פתיחה: מציגים את שם הפרויקט ואת השרשרת המלאה מהרכב ועד הנהג.</a:t>
             </a:r>
-            <a:endParaRPr lang="en-US" dirty="0"/>
           </a:p>
         </p:txBody>
       </p:sp>
@@ -894,7 +675,6 @@
               <a:rPr lang="en-US" dirty="0"/>
               <a:t>צילומי מסך אמיתיים מהאפליקציה הרצה על אמולטור אנדרואיד.</a:t>
             </a:r>
-            <a:endParaRPr lang="en-US" dirty="0"/>
           </a:p>
         </p:txBody>
       </p:sp>
@@ -982,7 +762,6 @@
               <a:rPr lang="en-US" dirty="0"/>
               <a:t>ארבע החלטות שמדגימות חשיבה הנדסית ולא רק כתיבת קוד.</a:t>
             </a:r>
-            <a:endParaRPr lang="en-US" dirty="0"/>
           </a:p>
         </p:txBody>
       </p:sp>
@@ -1070,7 +849,6 @@
               <a:rPr lang="en-US" dirty="0"/>
               <a:t>פרטיות: הכתובת של המשתמש בכלל לא מגיעה לשרת.</a:t>
             </a:r>
-            <a:endParaRPr lang="en-US" dirty="0"/>
           </a:p>
         </p:txBody>
       </p:sp>
@@ -1158,7 +936,6 @@
               <a:rPr lang="en-US" dirty="0"/>
               <a:t>הרצה: npm test בתיקיית האפליקציה. שש חבילות, 82 בדיקות.</a:t>
             </a:r>
-            <a:endParaRPr lang="en-US" dirty="0"/>
           </a:p>
         </p:txBody>
       </p:sp>
@@ -1246,7 +1023,6 @@
               <a:rPr lang="en-US" dirty="0"/>
               <a:t>החלוקה לפי שכבות, מהאפליקציה שהמשתמש רואה ועד הענן.</a:t>
             </a:r>
-            <a:endParaRPr lang="en-US" dirty="0"/>
           </a:p>
         </p:txBody>
       </p:sp>
@@ -1334,7 +1110,6 @@
               <a:rPr lang="en-US" dirty="0"/>
               <a:t>להציג את המגבלות ביושר — זה מחזק את הפרויקט ולא מחליש אותו.</a:t>
             </a:r>
-            <a:endParaRPr lang="en-US" dirty="0"/>
           </a:p>
         </p:txBody>
       </p:sp>
@@ -1422,7 +1197,6 @@
               <a:rPr lang="en-US" dirty="0"/>
               <a:t>סיכום במספרים, ואז פתיחה לשאלות.</a:t>
             </a:r>
-            <a:endParaRPr lang="en-US" dirty="0"/>
           </a:p>
         </p:txBody>
       </p:sp>
@@ -1510,7 +1284,6 @@
               <a:rPr lang="en-US" dirty="0"/>
               <a:t>הבעיה: הקוד קיים בכל רכב, אבל הוא חסר משמעות לנהג.</a:t>
             </a:r>
-            <a:endParaRPr lang="en-US" dirty="0"/>
           </a:p>
         </p:txBody>
       </p:sp>
@@ -1598,7 +1371,6 @@
               <a:rPr lang="en-US" dirty="0"/>
               <a:t>ארבעת השלבים הם הסיפור המרכזי של המערכת.</a:t>
             </a:r>
-            <a:endParaRPr lang="en-US" dirty="0"/>
           </a:p>
         </p:txBody>
       </p:sp>
@@ -1686,7 +1458,6 @@
               <a:rPr lang="en-US" dirty="0"/>
               <a:t>החץ מתאר את זרימת המידע: מהרכב, דרך המתאם והאפליקציה, אל השרת ובסיס הנתונים.</a:t>
             </a:r>
-            <a:endParaRPr lang="en-US" dirty="0"/>
           </a:p>
         </p:txBody>
       </p:sp>
@@ -1774,7 +1545,6 @@
               <a:rPr lang="en-US" dirty="0"/>
               <a:t>34 הקודים הם המילון הידני; כל השאר נופל ל-AI.</a:t>
             </a:r>
-            <a:endParaRPr lang="en-US" dirty="0"/>
           </a:p>
         </p:txBody>
       </p:sp>
@@ -1862,7 +1632,6 @@
               <a:rPr lang="en-US" dirty="0"/>
               <a:t>צילומי מסך אמיתיים מהאפליקציה הרצה על אמולטור אנדרואיד.</a:t>
             </a:r>
-            <a:endParaRPr lang="en-US" dirty="0"/>
           </a:p>
         </p:txBody>
       </p:sp>
@@ -1950,7 +1719,6 @@
               <a:rPr lang="en-US" dirty="0"/>
               <a:t>שתי העמודות: מה שקורה אחרי הנסיעה, ומה שקורה לפניה.</a:t>
             </a:r>
-            <a:endParaRPr lang="en-US" dirty="0"/>
           </a:p>
         </p:txBody>
       </p:sp>
@@ -2038,7 +1806,6 @@
               <a:rPr lang="en-US" dirty="0"/>
               <a:t>צילומי מסך אמיתיים מהאפליקציה הרצה על אמולטור אנדרואיד.</a:t>
             </a:r>
-            <a:endParaRPr lang="en-US" dirty="0"/>
           </a:p>
         </p:txBody>
       </p:sp>
@@ -2126,7 +1893,6 @@
               <a:rPr lang="en-US" dirty="0"/>
               <a:t>החלק של הגדר הווירטואלית הוא ההחלטה ההנדסית המעניינת כאן.</a:t>
             </a:r>
-            <a:endParaRPr lang="en-US" dirty="0"/>
           </a:p>
         </p:txBody>
       </p:sp>
@@ -2199,6 +1965,11 @@
 <file path=ppt/slideMasters/slideMaster1.xml><?xml version="1.0" encoding="utf-8"?>
 <p:sldMaster xmlns:a="http://schemas.openxmlformats.org/drawingml/2006/main" xmlns:r="http://schemas.openxmlformats.org/officeDocument/2006/relationships" xmlns:p="http://schemas.openxmlformats.org/presentationml/2006/main">
   <p:cSld>
+    <p:bg>
+      <p:bgRef idx="1001">
+        <a:schemeClr val="bg1"/>
+      </p:bgRef>
+    </p:bg>
     <p:spTree>
       <p:nvGrpSpPr>
         <p:cNvPr id="1" name=""/>
@@ -2481,6 +2252,7 @@
         <a:solidFill>
           <a:srgbClr val="16222E"/>
         </a:solidFill>
+        <a:effectLst/>
       </p:bgPr>
     </p:bg>
     <p:spTree>
@@ -2593,7 +2365,7 @@
           <a:bodyPr wrap="square" lIns="0" tIns="0" rIns="0" bIns="0" rtlCol="0" anchor="ctr"/>
           <a:lstStyle/>
           <a:p>
-            <a:pPr algn="ctr" indent="0" marL="0">
+            <a:pPr marL="0" indent="0" algn="ctr">
               <a:buNone/>
             </a:pPr>
             <a:r>
@@ -2632,7 +2404,7 @@
           <a:bodyPr wrap="square" rtlCol="0" anchor="t"/>
           <a:lstStyle/>
           <a:p>
-            <a:pPr rtl="1" algn="r" indent="0" marL="0">
+            <a:pPr marL="0" indent="0" algn="r" rtl="1">
               <a:buNone/>
             </a:pPr>
             <a:r>
@@ -2671,7 +2443,7 @@
           <a:bodyPr wrap="square" rtlCol="0" anchor="t"/>
           <a:lstStyle/>
           <a:p>
-            <a:pPr rtl="1" algn="r" indent="0" marL="0">
+            <a:pPr marL="0" indent="0" algn="r" rtl="1">
               <a:buNone/>
             </a:pPr>
             <a:r>
@@ -2710,7 +2482,7 @@
           <a:bodyPr wrap="square" rtlCol="0" anchor="t"/>
           <a:lstStyle/>
           <a:p>
-            <a:pPr rtl="1" algn="r" indent="0" marL="0">
+            <a:pPr marL="0" indent="0" algn="r" rtl="1">
               <a:lnSpc>
                 <a:spcPts val="2400"/>
               </a:lnSpc>
@@ -2730,7 +2502,7 @@
             <a:endParaRPr lang="en-US" sz="1400" dirty="0"/>
           </a:p>
           <a:p>
-            <a:pPr rtl="1" algn="r" indent="0" marL="0">
+            <a:pPr marL="0" indent="0" algn="r" rtl="1">
               <a:lnSpc>
                 <a:spcPts val="2400"/>
               </a:lnSpc>
@@ -2772,7 +2544,7 @@
           <a:bodyPr wrap="square" rtlCol="0" anchor="t"/>
           <a:lstStyle/>
           <a:p>
-            <a:pPr rtl="1" algn="r" indent="0" marL="0">
+            <a:pPr marL="0" indent="0" algn="r" rtl="1">
               <a:buNone/>
             </a:pPr>
             <a:r>
@@ -2806,6 +2578,7 @@
         <a:solidFill>
           <a:srgbClr val="FFFFFF"/>
         </a:solidFill>
+        <a:effectLst/>
       </p:bgPr>
     </p:bg>
     <p:spTree>
@@ -2843,11 +2616,11 @@
           <a:bodyPr wrap="square" rtlCol="0" anchor="t"/>
           <a:lstStyle/>
           <a:p>
-            <a:pPr rtl="1" algn="r" indent="0" marL="0">
-              <a:buNone/>
-            </a:pPr>
-            <a:r>
-              <a:rPr lang="en-US" sz="1200" b="1" spc="100" kern="0" dirty="0">
+            <a:pPr marL="0" indent="0" algn="r" rtl="1">
+              <a:buNone/>
+            </a:pPr>
+            <a:r>
+              <a:rPr lang="en-US" sz="1200" b="1" kern="0" spc="100" dirty="0">
                 <a:solidFill>
                   <a:srgbClr val="F5A623"/>
                 </a:solidFill>
@@ -2882,7 +2655,7 @@
           <a:bodyPr wrap="square" rtlCol="0" anchor="t"/>
           <a:lstStyle/>
           <a:p>
-            <a:pPr rtl="1" algn="r" indent="0" marL="0">
+            <a:pPr marL="0" indent="0" algn="r" rtl="1">
               <a:buNone/>
             </a:pPr>
             <a:r>
@@ -2926,7 +2699,7 @@
             <a:prstDash val="solid"/>
           </a:ln>
           <a:effectLst>
-            <a:outerShdw sx="100000" sy="100000" kx="0" ky="0" algn="bl" rotWithShape="0" blurRad="127000" dist="38100" dir="5400000">
+            <a:outerShdw blurRad="127000" dist="38100" dir="5400000" algn="bl" rotWithShape="0">
               <a:srgbClr val="8A99A6">
                 <a:alpha val="35000"/>
               </a:srgbClr>
@@ -2936,14 +2709,14 @@
       </p:sp>
       <p:pic>
         <p:nvPicPr>
-          <p:cNvPr id="5" name="Image 0" descr="Z:\Users\12orb\AppData\Local\Temp\claude\Z--Users-12orb-Desktop-Rupin-AiProjectSpamDetection-EndOfYearCarProject\bc12164c-9673-4caf-a51e-0823e450bec0\scratchpad\shots_trimmed\12-mechanics.png">    </p:cNvPr>
+          <p:cNvPr id="5" name="Image 0" descr="Z:\Users\12orb\AppData\Local\Temp\claude\Z--Users-12orb-Desktop-Rupin-AiProjectSpamDetection-EndOfYearCarProject\bc12164c-9673-4caf-a51e-0823e450bec0\scratchpad\shots_trimmed\12-mechanics.png"/>
           <p:cNvPicPr>
             <a:picLocks noChangeAspect="1"/>
           </p:cNvPicPr>
           <p:nvPr/>
         </p:nvPicPr>
         <p:blipFill>
-          <a:blip r:embed="rId1"/>
+          <a:blip r:embed="rId3"/>
           <a:stretch>
             <a:fillRect/>
           </a:stretch>
@@ -2979,7 +2752,7 @@
           <a:bodyPr wrap="square" lIns="0" tIns="0" rIns="0" bIns="0" rtlCol="0" anchor="t"/>
           <a:lstStyle/>
           <a:p>
-            <a:pPr rtl="1" algn="ctr" indent="0" marL="0">
+            <a:pPr marL="0" indent="0" algn="ctr" rtl="1">
               <a:buNone/>
             </a:pPr>
             <a:r>
@@ -3018,7 +2791,7 @@
           <a:bodyPr wrap="square" lIns="0" tIns="0" rIns="0" bIns="0" rtlCol="0" anchor="t"/>
           <a:lstStyle/>
           <a:p>
-            <a:pPr rtl="1" algn="ctr" indent="0" marL="0">
+            <a:pPr marL="0" indent="0" algn="ctr" rtl="1">
               <a:lnSpc>
                 <a:spcPts val="1600"/>
               </a:lnSpc>
@@ -3065,7 +2838,7 @@
             <a:prstDash val="solid"/>
           </a:ln>
           <a:effectLst>
-            <a:outerShdw sx="100000" sy="100000" kx="0" ky="0" algn="bl" rotWithShape="0" blurRad="127000" dist="38100" dir="5400000">
+            <a:outerShdw blurRad="127000" dist="38100" dir="5400000" algn="bl" rotWithShape="0">
               <a:srgbClr val="8A99A6">
                 <a:alpha val="35000"/>
               </a:srgbClr>
@@ -3075,14 +2848,14 @@
       </p:sp>
       <p:pic>
         <p:nvPicPr>
-          <p:cNvPr id="9" name="Image 1" descr="Z:\Users\12orb\AppData\Local\Temp\claude\Z--Users-12orb-Desktop-Rupin-AiProjectSpamDetection-EndOfYearCarProject\bc12164c-9673-4caf-a51e-0823e450bec0\scratchpad\shots_trimmed\10-history.png">    </p:cNvPr>
+          <p:cNvPr id="9" name="Image 1" descr="Z:\Users\12orb\AppData\Local\Temp\claude\Z--Users-12orb-Desktop-Rupin-AiProjectSpamDetection-EndOfYearCarProject\bc12164c-9673-4caf-a51e-0823e450bec0\scratchpad\shots_trimmed\10-history.png"/>
           <p:cNvPicPr>
             <a:picLocks noChangeAspect="1"/>
           </p:cNvPicPr>
           <p:nvPr/>
         </p:nvPicPr>
         <p:blipFill>
-          <a:blip r:embed="rId2"/>
+          <a:blip r:embed="rId4"/>
           <a:stretch>
             <a:fillRect/>
           </a:stretch>
@@ -3118,7 +2891,7 @@
           <a:bodyPr wrap="square" lIns="0" tIns="0" rIns="0" bIns="0" rtlCol="0" anchor="t"/>
           <a:lstStyle/>
           <a:p>
-            <a:pPr rtl="1" algn="ctr" indent="0" marL="0">
+            <a:pPr marL="0" indent="0" algn="ctr" rtl="1">
               <a:buNone/>
             </a:pPr>
             <a:r>
@@ -3157,7 +2930,7 @@
           <a:bodyPr wrap="square" lIns="0" tIns="0" rIns="0" bIns="0" rtlCol="0" anchor="t"/>
           <a:lstStyle/>
           <a:p>
-            <a:pPr rtl="1" algn="ctr" indent="0" marL="0">
+            <a:pPr marL="0" indent="0" algn="ctr" rtl="1">
               <a:lnSpc>
                 <a:spcPts val="1600"/>
               </a:lnSpc>
@@ -3204,7 +2977,7 @@
             <a:prstDash val="solid"/>
           </a:ln>
           <a:effectLst>
-            <a:outerShdw sx="100000" sy="100000" kx="0" ky="0" algn="bl" rotWithShape="0" blurRad="127000" dist="38100" dir="5400000">
+            <a:outerShdw blurRad="127000" dist="38100" dir="5400000" algn="bl" rotWithShape="0">
               <a:srgbClr val="8A99A6">
                 <a:alpha val="35000"/>
               </a:srgbClr>
@@ -3214,14 +2987,14 @@
       </p:sp>
       <p:pic>
         <p:nvPicPr>
-          <p:cNvPr id="13" name="Image 2" descr="Z:\Users\12orb\AppData\Local\Temp\claude\Z--Users-12orb-Desktop-Rupin-AiProjectSpamDetection-EndOfYearCarProject\bc12164c-9673-4caf-a51e-0823e450bec0\scratchpad\shots_trimmed\14-settings.png">    </p:cNvPr>
+          <p:cNvPr id="13" name="Image 2" descr="Z:\Users\12orb\AppData\Local\Temp\claude\Z--Users-12orb-Desktop-Rupin-AiProjectSpamDetection-EndOfYearCarProject\bc12164c-9673-4caf-a51e-0823e450bec0\scratchpad\shots_trimmed\14-settings.png"/>
           <p:cNvPicPr>
             <a:picLocks noChangeAspect="1"/>
           </p:cNvPicPr>
           <p:nvPr/>
         </p:nvPicPr>
         <p:blipFill>
-          <a:blip r:embed="rId3"/>
+          <a:blip r:embed="rId5"/>
           <a:stretch>
             <a:fillRect/>
           </a:stretch>
@@ -3257,7 +3030,7 @@
           <a:bodyPr wrap="square" lIns="0" tIns="0" rIns="0" bIns="0" rtlCol="0" anchor="t"/>
           <a:lstStyle/>
           <a:p>
-            <a:pPr rtl="1" algn="ctr" indent="0" marL="0">
+            <a:pPr marL="0" indent="0" algn="ctr" rtl="1">
               <a:buNone/>
             </a:pPr>
             <a:r>
@@ -3296,7 +3069,7 @@
           <a:bodyPr wrap="square" lIns="0" tIns="0" rIns="0" bIns="0" rtlCol="0" anchor="t"/>
           <a:lstStyle/>
           <a:p>
-            <a:pPr rtl="1" algn="ctr" indent="0" marL="0">
+            <a:pPr marL="0" indent="0" algn="ctr" rtl="1">
               <a:lnSpc>
                 <a:spcPts val="1600"/>
               </a:lnSpc>
@@ -3333,6 +3106,7 @@
         <a:solidFill>
           <a:srgbClr val="FFFFFF"/>
         </a:solidFill>
+        <a:effectLst/>
       </p:bgPr>
     </p:bg>
     <p:spTree>
@@ -3370,11 +3144,11 @@
           <a:bodyPr wrap="square" rtlCol="0" anchor="t"/>
           <a:lstStyle/>
           <a:p>
-            <a:pPr rtl="1" algn="r" indent="0" marL="0">
-              <a:buNone/>
-            </a:pPr>
-            <a:r>
-              <a:rPr lang="en-US" sz="1200" b="1" spc="100" kern="0" dirty="0">
+            <a:pPr marL="0" indent="0" algn="r" rtl="1">
+              <a:buNone/>
+            </a:pPr>
+            <a:r>
+              <a:rPr lang="en-US" sz="1200" b="1" kern="0" spc="100" dirty="0">
                 <a:solidFill>
                   <a:srgbClr val="F5A623"/>
                 </a:solidFill>
@@ -3409,7 +3183,7 @@
           <a:bodyPr wrap="square" rtlCol="0" anchor="t"/>
           <a:lstStyle/>
           <a:p>
-            <a:pPr rtl="1" algn="r" indent="0" marL="0">
+            <a:pPr marL="0" indent="0" algn="r" rtl="1">
               <a:buNone/>
             </a:pPr>
             <a:r>
@@ -3453,7 +3227,7 @@
             <a:prstDash val="solid"/>
           </a:ln>
           <a:effectLst>
-            <a:outerShdw sx="100000" sy="100000" kx="0" ky="0" algn="bl" rotWithShape="0" blurRad="101600" dist="25400" dir="5400000">
+            <a:outerShdw blurRad="101600" dist="25400" dir="5400000" algn="bl" rotWithShape="0">
               <a:srgbClr val="9AA9B5">
                 <a:alpha val="25000"/>
               </a:srgbClr>
@@ -3482,7 +3256,7 @@
           <a:bodyPr wrap="square" lIns="0" tIns="0" rIns="0" bIns="0" rtlCol="0" anchor="t"/>
           <a:lstStyle/>
           <a:p>
-            <a:pPr rtl="1" algn="r" indent="0" marL="0">
+            <a:pPr marL="0" indent="0" algn="r" rtl="1">
               <a:buNone/>
             </a:pPr>
             <a:r>
@@ -3521,7 +3295,7 @@
           <a:bodyPr wrap="square" lIns="0" tIns="0" rIns="0" bIns="0" rtlCol="0" anchor="t"/>
           <a:lstStyle/>
           <a:p>
-            <a:pPr rtl="1" algn="r" indent="0" marL="0">
+            <a:pPr marL="0" indent="0" algn="r" rtl="1">
               <a:lnSpc>
                 <a:spcPts val="2000"/>
               </a:lnSpc>
@@ -3563,7 +3337,7 @@
           <a:bodyPr wrap="square" lIns="0" tIns="0" rIns="0" bIns="0" rtlCol="0" anchor="ctr"/>
           <a:lstStyle/>
           <a:p>
-            <a:pPr algn="l" indent="0" marL="0">
+            <a:pPr marL="0" indent="0" algn="l">
               <a:buNone/>
             </a:pPr>
             <a:r>
@@ -3607,7 +3381,7 @@
             <a:prstDash val="solid"/>
           </a:ln>
           <a:effectLst>
-            <a:outerShdw sx="100000" sy="100000" kx="0" ky="0" algn="bl" rotWithShape="0" blurRad="101600" dist="25400" dir="5400000">
+            <a:outerShdw blurRad="101600" dist="25400" dir="5400000" algn="bl" rotWithShape="0">
               <a:srgbClr val="9AA9B5">
                 <a:alpha val="25000"/>
               </a:srgbClr>
@@ -3636,7 +3410,7 @@
           <a:bodyPr wrap="square" lIns="0" tIns="0" rIns="0" bIns="0" rtlCol="0" anchor="t"/>
           <a:lstStyle/>
           <a:p>
-            <a:pPr rtl="1" algn="r" indent="0" marL="0">
+            <a:pPr marL="0" indent="0" algn="r" rtl="1">
               <a:buNone/>
             </a:pPr>
             <a:r>
@@ -3675,7 +3449,7 @@
           <a:bodyPr wrap="square" lIns="0" tIns="0" rIns="0" bIns="0" rtlCol="0" anchor="t"/>
           <a:lstStyle/>
           <a:p>
-            <a:pPr rtl="1" algn="r" indent="0" marL="0">
+            <a:pPr marL="0" indent="0" algn="r" rtl="1">
               <a:lnSpc>
                 <a:spcPts val="2000"/>
               </a:lnSpc>
@@ -3717,7 +3491,7 @@
           <a:bodyPr wrap="square" lIns="0" tIns="0" rIns="0" bIns="0" rtlCol="0" anchor="ctr"/>
           <a:lstStyle/>
           <a:p>
-            <a:pPr algn="l" indent="0" marL="0">
+            <a:pPr marL="0" indent="0" algn="l">
               <a:buNone/>
             </a:pPr>
             <a:r>
@@ -3761,7 +3535,7 @@
             <a:prstDash val="solid"/>
           </a:ln>
           <a:effectLst>
-            <a:outerShdw sx="100000" sy="100000" kx="0" ky="0" algn="bl" rotWithShape="0" blurRad="101600" dist="25400" dir="5400000">
+            <a:outerShdw blurRad="101600" dist="25400" dir="5400000" algn="bl" rotWithShape="0">
               <a:srgbClr val="9AA9B5">
                 <a:alpha val="25000"/>
               </a:srgbClr>
@@ -3790,7 +3564,7 @@
           <a:bodyPr wrap="square" lIns="0" tIns="0" rIns="0" bIns="0" rtlCol="0" anchor="t"/>
           <a:lstStyle/>
           <a:p>
-            <a:pPr rtl="1" algn="r" indent="0" marL="0">
+            <a:pPr marL="0" indent="0" algn="r" rtl="1">
               <a:buNone/>
             </a:pPr>
             <a:r>
@@ -3829,7 +3603,7 @@
           <a:bodyPr wrap="square" lIns="0" tIns="0" rIns="0" bIns="0" rtlCol="0" anchor="t"/>
           <a:lstStyle/>
           <a:p>
-            <a:pPr rtl="1" algn="r" indent="0" marL="0">
+            <a:pPr marL="0" indent="0" algn="r" rtl="1">
               <a:lnSpc>
                 <a:spcPts val="2000"/>
               </a:lnSpc>
@@ -3871,7 +3645,7 @@
           <a:bodyPr wrap="square" lIns="0" tIns="0" rIns="0" bIns="0" rtlCol="0" anchor="ctr"/>
           <a:lstStyle/>
           <a:p>
-            <a:pPr algn="l" indent="0" marL="0">
+            <a:pPr marL="0" indent="0" algn="l">
               <a:buNone/>
             </a:pPr>
             <a:r>
@@ -3915,7 +3689,7 @@
             <a:prstDash val="solid"/>
           </a:ln>
           <a:effectLst>
-            <a:outerShdw sx="100000" sy="100000" kx="0" ky="0" algn="bl" rotWithShape="0" blurRad="101600" dist="25400" dir="5400000">
+            <a:outerShdw blurRad="101600" dist="25400" dir="5400000" algn="bl" rotWithShape="0">
               <a:srgbClr val="9AA9B5">
                 <a:alpha val="25000"/>
               </a:srgbClr>
@@ -3944,7 +3718,7 @@
           <a:bodyPr wrap="square" lIns="0" tIns="0" rIns="0" bIns="0" rtlCol="0" anchor="t"/>
           <a:lstStyle/>
           <a:p>
-            <a:pPr rtl="1" algn="r" indent="0" marL="0">
+            <a:pPr marL="0" indent="0" algn="r" rtl="1">
               <a:buNone/>
             </a:pPr>
             <a:r>
@@ -3983,7 +3757,7 @@
           <a:bodyPr wrap="square" lIns="0" tIns="0" rIns="0" bIns="0" rtlCol="0" anchor="t"/>
           <a:lstStyle/>
           <a:p>
-            <a:pPr rtl="1" algn="r" indent="0" marL="0">
+            <a:pPr marL="0" indent="0" algn="r" rtl="1">
               <a:lnSpc>
                 <a:spcPts val="2000"/>
               </a:lnSpc>
@@ -4025,7 +3799,7 @@
           <a:bodyPr wrap="square" lIns="0" tIns="0" rIns="0" bIns="0" rtlCol="0" anchor="ctr"/>
           <a:lstStyle/>
           <a:p>
-            <a:pPr algn="l" indent="0" marL="0">
+            <a:pPr marL="0" indent="0" algn="l">
               <a:buNone/>
             </a:pPr>
             <a:r>
@@ -4059,6 +3833,7 @@
         <a:solidFill>
           <a:srgbClr val="FFFFFF"/>
         </a:solidFill>
+        <a:effectLst/>
       </p:bgPr>
     </p:bg>
     <p:spTree>
@@ -4096,11 +3871,11 @@
           <a:bodyPr wrap="square" rtlCol="0" anchor="t"/>
           <a:lstStyle/>
           <a:p>
-            <a:pPr rtl="1" algn="r" indent="0" marL="0">
-              <a:buNone/>
-            </a:pPr>
-            <a:r>
-              <a:rPr lang="en-US" sz="1200" b="1" spc="100" kern="0" dirty="0">
+            <a:pPr marL="0" indent="0" algn="r" rtl="1">
+              <a:buNone/>
+            </a:pPr>
+            <a:r>
+              <a:rPr lang="en-US" sz="1200" b="1" kern="0" spc="100" dirty="0">
                 <a:solidFill>
                   <a:srgbClr val="F5A623"/>
                 </a:solidFill>
@@ -4135,7 +3910,7 @@
           <a:bodyPr wrap="square" rtlCol="0" anchor="t"/>
           <a:lstStyle/>
           <a:p>
-            <a:pPr rtl="1" algn="r" indent="0" marL="0">
+            <a:pPr marL="0" indent="0" algn="r" rtl="1">
               <a:buNone/>
             </a:pPr>
             <a:r>
@@ -4179,7 +3954,7 @@
             <a:prstDash val="solid"/>
           </a:ln>
           <a:effectLst>
-            <a:outerShdw sx="100000" sy="100000" kx="0" ky="0" algn="bl" rotWithShape="0" blurRad="101600" dist="25400" dir="5400000">
+            <a:outerShdw blurRad="101600" dist="25400" dir="5400000" algn="bl" rotWithShape="0">
               <a:srgbClr val="9AA9B5">
                 <a:alpha val="25000"/>
               </a:srgbClr>
@@ -4233,7 +4008,7 @@
           <a:bodyPr wrap="square" lIns="0" tIns="0" rIns="0" bIns="0" rtlCol="0" anchor="ctr"/>
           <a:lstStyle/>
           <a:p>
-            <a:pPr algn="ctr" indent="0" marL="0">
+            <a:pPr marL="0" indent="0" algn="ctr">
               <a:buNone/>
             </a:pPr>
             <a:r>
@@ -4272,7 +4047,7 @@
           <a:bodyPr wrap="square" lIns="0" tIns="0" rIns="0" bIns="0" rtlCol="0" anchor="ctr"/>
           <a:lstStyle/>
           <a:p>
-            <a:pPr rtl="1" algn="r" indent="0" marL="0">
+            <a:pPr marL="0" indent="0" algn="r" rtl="1">
               <a:buNone/>
             </a:pPr>
             <a:r>
@@ -4311,7 +4086,7 @@
           <a:bodyPr wrap="square" lIns="0" tIns="0" rIns="0" bIns="0" rtlCol="0" anchor="ctr"/>
           <a:lstStyle/>
           <a:p>
-            <a:pPr rtl="1" algn="r" indent="0" marL="0">
+            <a:pPr marL="0" indent="0" algn="r" rtl="1">
               <a:buNone/>
             </a:pPr>
             <a:r>
@@ -4355,7 +4130,7 @@
             <a:prstDash val="solid"/>
           </a:ln>
           <a:effectLst>
-            <a:outerShdw sx="100000" sy="100000" kx="0" ky="0" algn="bl" rotWithShape="0" blurRad="101600" dist="25400" dir="5400000">
+            <a:outerShdw blurRad="101600" dist="25400" dir="5400000" algn="bl" rotWithShape="0">
               <a:srgbClr val="9AA9B5">
                 <a:alpha val="25000"/>
               </a:srgbClr>
@@ -4409,19 +4184,18 @@
           <a:bodyPr wrap="square" lIns="0" tIns="0" rIns="0" bIns="0" rtlCol="0" anchor="ctr"/>
           <a:lstStyle/>
           <a:p>
-            <a:pPr algn="ctr" indent="0" marL="0">
-              <a:buNone/>
-            </a:pPr>
-            <a:r>
-              <a:rPr lang="en-US" sz="1400" b="1" dirty="0">
+            <a:pPr marL="0" indent="0" algn="ctr">
+              <a:buNone/>
+            </a:pPr>
+            <a:r>
+              <a:rPr lang="he-IL" sz="1400" b="1" dirty="0">
                 <a:solidFill>
                   <a:srgbClr val="16222E"/>
                 </a:solidFill>
                 <a:latin typeface="Arial" pitchFamily="34" charset="0"/>
-                <a:ea typeface="Arial" pitchFamily="34" charset="-122"/>
-                <a:cs typeface="Arial" pitchFamily="34" charset="-120"/>
-              </a:rPr>
-              <a:t>מ‏</a:t>
+                <a:cs typeface="Arial" pitchFamily="34" charset="-120"/>
+              </a:rPr>
+              <a:t>א</a:t>
             </a:r>
             <a:endParaRPr lang="en-US" sz="1400" dirty="0"/>
           </a:p>
@@ -4448,7 +4222,7 @@
           <a:bodyPr wrap="square" lIns="0" tIns="0" rIns="0" bIns="0" rtlCol="0" anchor="ctr"/>
           <a:lstStyle/>
           <a:p>
-            <a:pPr rtl="1" algn="r" indent="0" marL="0">
+            <a:pPr marL="0" indent="0" algn="r" rtl="1">
               <a:buNone/>
             </a:pPr>
             <a:r>
@@ -4487,7 +4261,7 @@
           <a:bodyPr wrap="square" lIns="0" tIns="0" rIns="0" bIns="0" rtlCol="0" anchor="ctr"/>
           <a:lstStyle/>
           <a:p>
-            <a:pPr rtl="1" algn="r" indent="0" marL="0">
+            <a:pPr marL="0" indent="0" algn="r" rtl="1">
               <a:buNone/>
             </a:pPr>
             <a:r>
@@ -4499,9 +4273,91 @@
                 <a:ea typeface="Arial" pitchFamily="34" charset="-122"/>
                 <a:cs typeface="Arial" pitchFamily="34" charset="-120"/>
               </a:rPr>
-              <a:t>‏JWT bearer‏ בכל נקודת קצה, ו-‏CanActFor‏ מוודא שמשתמש פועל רק על הנתונים שלו, אלא אם הוא מנהל‏</a:t>
-            </a:r>
-            <a:endParaRPr lang="en-US" sz="1250" dirty="0"/>
+              <a:t>‏JWT bearer‏ בכל נקודת קצה, ו-‏CanActFor‏ מוודא שמשתמש פועל רק על הנתונים שלו, אלא אם </a:t>
+            </a:r>
+            <a:r>
+              <a:rPr lang="en-US" sz="1250" dirty="0" err="1">
+                <a:solidFill>
+                  <a:srgbClr val="44566B"/>
+                </a:solidFill>
+                <a:latin typeface="Arial" pitchFamily="34" charset="0"/>
+                <a:ea typeface="Arial" pitchFamily="34" charset="-122"/>
+                <a:cs typeface="Arial" pitchFamily="34" charset="-120"/>
+              </a:rPr>
+              <a:t>הוא</a:t>
+            </a:r>
+            <a:r>
+              <a:rPr lang="en-US" sz="1250" dirty="0">
+                <a:solidFill>
+                  <a:srgbClr val="44566B"/>
+                </a:solidFill>
+                <a:latin typeface="Arial" pitchFamily="34" charset="0"/>
+                <a:ea typeface="Arial" pitchFamily="34" charset="-122"/>
+                <a:cs typeface="Arial" pitchFamily="34" charset="-120"/>
+              </a:rPr>
+              <a:t> </a:t>
+            </a:r>
+            <a:r>
+              <a:rPr lang="en-US" sz="1250" dirty="0" err="1">
+                <a:solidFill>
+                  <a:srgbClr val="44566B"/>
+                </a:solidFill>
+                <a:latin typeface="Arial" pitchFamily="34" charset="0"/>
+                <a:ea typeface="Arial" pitchFamily="34" charset="-122"/>
+                <a:cs typeface="Arial" pitchFamily="34" charset="-120"/>
+              </a:rPr>
+              <a:t>מנהל</a:t>
+            </a:r>
+            <a:r>
+              <a:rPr lang="en-US" sz="1250" dirty="0">
+                <a:solidFill>
+                  <a:srgbClr val="44566B"/>
+                </a:solidFill>
+                <a:latin typeface="Arial" pitchFamily="34" charset="0"/>
+                <a:ea typeface="Arial" pitchFamily="34" charset="-122"/>
+                <a:cs typeface="Arial" pitchFamily="34" charset="-120"/>
+              </a:rPr>
+              <a:t>.‏</a:t>
+            </a:r>
+          </a:p>
+          <a:p>
+            <a:pPr marL="0" indent="0" algn="r" rtl="1">
+              <a:buNone/>
+            </a:pPr>
+            <a:r>
+              <a:rPr lang="he-IL" sz="1250" b="1" dirty="0">
+                <a:solidFill>
+                  <a:srgbClr val="44566B"/>
+                </a:solidFill>
+                <a:latin typeface="Arial" pitchFamily="34" charset="0"/>
+                <a:ea typeface="Arial" pitchFamily="34" charset="-122"/>
+                <a:cs typeface="Arial" pitchFamily="34" charset="-120"/>
+              </a:rPr>
+              <a:t>*בדיקת טוקן מאובטח, שמוודאת שכל נהג ניגש רק למידע שלו ומנהל רשאי לגשת </a:t>
+            </a:r>
+            <a:r>
+              <a:rPr lang="he-IL" sz="1250" b="1" dirty="0" err="1">
+                <a:solidFill>
+                  <a:srgbClr val="44566B"/>
+                </a:solidFill>
+                <a:latin typeface="Arial" pitchFamily="34" charset="0"/>
+                <a:ea typeface="Arial" pitchFamily="34" charset="-122"/>
+                <a:cs typeface="Arial" pitchFamily="34" charset="-120"/>
+              </a:rPr>
+              <a:t>להכל</a:t>
+            </a:r>
+            <a:r>
+              <a:rPr lang="en-US" sz="1250" b="1" dirty="0">
+                <a:solidFill>
+                  <a:srgbClr val="44566B"/>
+                </a:solidFill>
+                <a:latin typeface="Arial" pitchFamily="34" charset="0"/>
+                <a:ea typeface="Arial" pitchFamily="34" charset="-122"/>
+                <a:cs typeface="Arial" pitchFamily="34" charset="-120"/>
+              </a:rPr>
+              <a:t> * </a:t>
+            </a:r>
+            <a:endParaRPr lang="en-US" sz="1250" b="1" dirty="0"/>
           </a:p>
         </p:txBody>
       </p:sp>
@@ -4531,7 +4387,7 @@
             <a:prstDash val="solid"/>
           </a:ln>
           <a:effectLst>
-            <a:outerShdw sx="100000" sy="100000" kx="0" ky="0" algn="bl" rotWithShape="0" blurRad="101600" dist="25400" dir="5400000">
+            <a:outerShdw blurRad="101600" dist="25400" dir="5400000" algn="bl" rotWithShape="0">
               <a:srgbClr val="9AA9B5">
                 <a:alpha val="25000"/>
               </a:srgbClr>
@@ -4585,7 +4441,7 @@
           <a:bodyPr wrap="square" lIns="0" tIns="0" rIns="0" bIns="0" rtlCol="0" anchor="ctr"/>
           <a:lstStyle/>
           <a:p>
-            <a:pPr algn="ctr" indent="0" marL="0">
+            <a:pPr marL="0" indent="0" algn="ctr">
               <a:buNone/>
             </a:pPr>
             <a:r>
@@ -4624,7 +4480,7 @@
           <a:bodyPr wrap="square" lIns="0" tIns="0" rIns="0" bIns="0" rtlCol="0" anchor="ctr"/>
           <a:lstStyle/>
           <a:p>
-            <a:pPr rtl="1" algn="r" indent="0" marL="0">
+            <a:pPr marL="0" indent="0" algn="r" rtl="1">
               <a:buNone/>
             </a:pPr>
             <a:r>
@@ -4663,7 +4519,7 @@
           <a:bodyPr wrap="square" lIns="0" tIns="0" rIns="0" bIns="0" rtlCol="0" anchor="ctr"/>
           <a:lstStyle/>
           <a:p>
-            <a:pPr rtl="1" algn="r" indent="0" marL="0">
+            <a:pPr marL="0" indent="0" algn="r" rtl="1">
               <a:buNone/>
             </a:pPr>
             <a:r>
@@ -4707,7 +4563,7 @@
             <a:prstDash val="solid"/>
           </a:ln>
           <a:effectLst>
-            <a:outerShdw sx="100000" sy="100000" kx="0" ky="0" algn="bl" rotWithShape="0" blurRad="101600" dist="25400" dir="5400000">
+            <a:outerShdw blurRad="101600" dist="25400" dir="5400000" algn="bl" rotWithShape="0">
               <a:srgbClr val="9AA9B5">
                 <a:alpha val="25000"/>
               </a:srgbClr>
@@ -4761,7 +4617,7 @@
           <a:bodyPr wrap="square" lIns="0" tIns="0" rIns="0" bIns="0" rtlCol="0" anchor="ctr"/>
           <a:lstStyle/>
           <a:p>
-            <a:pPr algn="ctr" indent="0" marL="0">
+            <a:pPr marL="0" indent="0" algn="ctr">
               <a:buNone/>
             </a:pPr>
             <a:r>
@@ -4800,7 +4656,7 @@
           <a:bodyPr wrap="square" lIns="0" tIns="0" rIns="0" bIns="0" rtlCol="0" anchor="ctr"/>
           <a:lstStyle/>
           <a:p>
-            <a:pPr rtl="1" algn="r" indent="0" marL="0">
+            <a:pPr marL="0" indent="0" algn="r" rtl="1">
               <a:buNone/>
             </a:pPr>
             <a:r>
@@ -4839,7 +4695,7 @@
           <a:bodyPr wrap="square" lIns="0" tIns="0" rIns="0" bIns="0" rtlCol="0" anchor="ctr"/>
           <a:lstStyle/>
           <a:p>
-            <a:pPr rtl="1" algn="r" indent="0" marL="0">
+            <a:pPr marL="0" indent="0" algn="r" rtl="1">
               <a:buNone/>
             </a:pPr>
             <a:r>
@@ -4883,7 +4739,7 @@
             <a:prstDash val="solid"/>
           </a:ln>
           <a:effectLst>
-            <a:outerShdw sx="100000" sy="100000" kx="0" ky="0" algn="bl" rotWithShape="0" blurRad="101600" dist="25400" dir="5400000">
+            <a:outerShdw blurRad="101600" dist="25400" dir="5400000" algn="bl" rotWithShape="0">
               <a:srgbClr val="9AA9B5">
                 <a:alpha val="25000"/>
               </a:srgbClr>
@@ -4937,7 +4793,7 @@
           <a:bodyPr wrap="square" lIns="0" tIns="0" rIns="0" bIns="0" rtlCol="0" anchor="ctr"/>
           <a:lstStyle/>
           <a:p>
-            <a:pPr algn="ctr" indent="0" marL="0">
+            <a:pPr marL="0" indent="0" algn="ctr">
               <a:buNone/>
             </a:pPr>
             <a:r>
@@ -4976,7 +4832,7 @@
           <a:bodyPr wrap="square" lIns="0" tIns="0" rIns="0" bIns="0" rtlCol="0" anchor="ctr"/>
           <a:lstStyle/>
           <a:p>
-            <a:pPr rtl="1" algn="r" indent="0" marL="0">
+            <a:pPr marL="0" indent="0" algn="r" rtl="1">
               <a:buNone/>
             </a:pPr>
             <a:r>
@@ -5015,7 +4871,7 @@
           <a:bodyPr wrap="square" lIns="0" tIns="0" rIns="0" bIns="0" rtlCol="0" anchor="ctr"/>
           <a:lstStyle/>
           <a:p>
-            <a:pPr rtl="1" algn="r" indent="0" marL="0">
+            <a:pPr marL="0" indent="0" algn="r" rtl="1">
               <a:buNone/>
             </a:pPr>
             <a:r>
@@ -5049,6 +4905,7 @@
         <a:solidFill>
           <a:srgbClr val="FFFFFF"/>
         </a:solidFill>
+        <a:effectLst/>
       </p:bgPr>
     </p:bg>
     <p:spTree>
@@ -5086,11 +4943,11 @@
           <a:bodyPr wrap="square" rtlCol="0" anchor="t"/>
           <a:lstStyle/>
           <a:p>
-            <a:pPr rtl="1" algn="r" indent="0" marL="0">
-              <a:buNone/>
-            </a:pPr>
-            <a:r>
-              <a:rPr lang="en-US" sz="1200" b="1" spc="100" kern="0" dirty="0">
+            <a:pPr marL="0" indent="0" algn="r" rtl="1">
+              <a:buNone/>
+            </a:pPr>
+            <a:r>
+              <a:rPr lang="en-US" sz="1200" b="1" kern="0" spc="100" dirty="0">
                 <a:solidFill>
                   <a:srgbClr val="F5A623"/>
                 </a:solidFill>
@@ -5125,7 +4982,7 @@
           <a:bodyPr wrap="square" rtlCol="0" anchor="t"/>
           <a:lstStyle/>
           <a:p>
-            <a:pPr rtl="1" algn="r" indent="0" marL="0">
+            <a:pPr marL="0" indent="0" algn="r" rtl="1">
               <a:buNone/>
             </a:pPr>
             <a:r>
@@ -5169,7 +5026,7 @@
             <a:prstDash val="solid"/>
           </a:ln>
           <a:effectLst>
-            <a:outerShdw sx="100000" sy="100000" kx="0" ky="0" algn="bl" rotWithShape="0" blurRad="101600" dist="25400" dir="5400000">
+            <a:outerShdw blurRad="101600" dist="25400" dir="5400000" algn="bl" rotWithShape="0">
               <a:srgbClr val="9AA9B5">
                 <a:alpha val="25000"/>
               </a:srgbClr>
@@ -5198,7 +5055,7 @@
           <a:bodyPr wrap="square" lIns="0" tIns="0" rIns="0" bIns="0" rtlCol="0" anchor="ctr"/>
           <a:lstStyle/>
           <a:p>
-            <a:pPr algn="ctr" indent="0" marL="0">
+            <a:pPr marL="0" indent="0" algn="ctr">
               <a:buNone/>
             </a:pPr>
             <a:r>
@@ -5237,7 +5094,7 @@
           <a:bodyPr wrap="square" lIns="0" tIns="0" rIns="0" bIns="0" rtlCol="0" anchor="ctr"/>
           <a:lstStyle/>
           <a:p>
-            <a:pPr rtl="1" algn="ctr" indent="0" marL="0">
+            <a:pPr marL="0" indent="0" algn="ctr" rtl="1">
               <a:buNone/>
             </a:pPr>
             <a:r>
@@ -5281,7 +5138,7 @@
             <a:prstDash val="solid"/>
           </a:ln>
           <a:effectLst>
-            <a:outerShdw sx="100000" sy="100000" kx="0" ky="0" algn="bl" rotWithShape="0" blurRad="101600" dist="25400" dir="5400000">
+            <a:outerShdw blurRad="101600" dist="25400" dir="5400000" algn="bl" rotWithShape="0">
               <a:srgbClr val="9AA9B5">
                 <a:alpha val="25000"/>
               </a:srgbClr>
@@ -5310,7 +5167,7 @@
           <a:bodyPr wrap="square" lIns="0" tIns="0" rIns="0" bIns="0" rtlCol="0" anchor="t"/>
           <a:lstStyle/>
           <a:p>
-            <a:pPr rtl="1" algn="r" indent="0" marL="0">
+            <a:pPr marL="0" indent="0" algn="r" rtl="1">
               <a:lnSpc>
                 <a:spcPts val="1900"/>
               </a:lnSpc>
@@ -5333,7 +5190,7 @@
       </p:sp>
       <p:graphicFrame>
         <p:nvGraphicFramePr>
-          <p:cNvPr id="9" name="Chart 0" descr=""/>
+          <p:cNvPr id="9" name="Chart 0"/>
           <p:cNvGraphicFramePr/>
           <p:nvPr/>
         </p:nvGraphicFramePr>
@@ -5341,9 +5198,9 @@
           <a:off x="548640" y="1691640"/>
           <a:ext cx="7726680" cy="3977640"/>
         </p:xfrm>
-        <a:graphic xmlns:a="http://schemas.openxmlformats.org/drawingml/2006/main">
+        <a:graphic>
           <a:graphicData uri="http://schemas.openxmlformats.org/drawingml/2006/chart">
-            <c:chart xmlns:c="http://schemas.openxmlformats.org/drawingml/2006/chart" r:id="rId1"/>
+            <c:chart xmlns:c="http://schemas.openxmlformats.org/drawingml/2006/chart" xmlns:r="http://schemas.openxmlformats.org/officeDocument/2006/relationships" r:id="rId3"/>
           </a:graphicData>
         </a:graphic>
       </p:graphicFrame>
@@ -5363,6 +5220,7 @@
         <a:solidFill>
           <a:srgbClr val="FFFFFF"/>
         </a:solidFill>
+        <a:effectLst/>
       </p:bgPr>
     </p:bg>
     <p:spTree>
@@ -5400,11 +5258,11 @@
           <a:bodyPr wrap="square" rtlCol="0" anchor="t"/>
           <a:lstStyle/>
           <a:p>
-            <a:pPr rtl="1" algn="r" indent="0" marL="0">
-              <a:buNone/>
-            </a:pPr>
-            <a:r>
-              <a:rPr lang="en-US" sz="1200" b="1" spc="100" kern="0" dirty="0">
+            <a:pPr marL="0" indent="0" algn="r" rtl="1">
+              <a:buNone/>
+            </a:pPr>
+            <a:r>
+              <a:rPr lang="en-US" sz="1200" b="1" kern="0" spc="100" dirty="0">
                 <a:solidFill>
                   <a:srgbClr val="F5A623"/>
                 </a:solidFill>
@@ -5439,7 +5297,7 @@
           <a:bodyPr wrap="square" rtlCol="0" anchor="t"/>
           <a:lstStyle/>
           <a:p>
-            <a:pPr rtl="1" algn="r" indent="0" marL="0">
+            <a:pPr marL="0" indent="0" algn="r" rtl="1">
               <a:buNone/>
             </a:pPr>
             <a:r>
@@ -5483,7 +5341,7 @@
             <a:prstDash val="solid"/>
           </a:ln>
           <a:effectLst>
-            <a:outerShdw sx="100000" sy="100000" kx="0" ky="0" algn="bl" rotWithShape="0" blurRad="101600" dist="25400" dir="5400000">
+            <a:outerShdw blurRad="101600" dist="25400" dir="5400000" algn="bl" rotWithShape="0">
               <a:srgbClr val="9AA9B5">
                 <a:alpha val="25000"/>
               </a:srgbClr>
@@ -5512,7 +5370,7 @@
           <a:bodyPr wrap="square" lIns="0" tIns="0" rIns="0" bIns="0" rtlCol="0" anchor="ctr"/>
           <a:lstStyle/>
           <a:p>
-            <a:pPr rtl="1" algn="r" indent="0" marL="0">
+            <a:pPr marL="0" indent="0" algn="r" rtl="1">
               <a:buNone/>
             </a:pPr>
             <a:r>
@@ -5551,7 +5409,7 @@
           <a:bodyPr wrap="square" lIns="0" tIns="0" rIns="0" bIns="0" rtlCol="0" anchor="ctr"/>
           <a:lstStyle/>
           <a:p>
-            <a:pPr rtl="1" algn="r" indent="0" marL="0">
+            <a:pPr marL="0" indent="0" algn="r" rtl="1">
               <a:lnSpc>
                 <a:spcPts val="2000"/>
               </a:lnSpc>
@@ -5598,7 +5456,7 @@
             <a:prstDash val="solid"/>
           </a:ln>
           <a:effectLst>
-            <a:outerShdw sx="100000" sy="100000" kx="0" ky="0" algn="bl" rotWithShape="0" blurRad="101600" dist="25400" dir="5400000">
+            <a:outerShdw blurRad="101600" dist="25400" dir="5400000" algn="bl" rotWithShape="0">
               <a:srgbClr val="9AA9B5">
                 <a:alpha val="25000"/>
               </a:srgbClr>
@@ -5627,7 +5485,7 @@
           <a:bodyPr wrap="square" lIns="0" tIns="0" rIns="0" bIns="0" rtlCol="0" anchor="ctr"/>
           <a:lstStyle/>
           <a:p>
-            <a:pPr rtl="1" algn="r" indent="0" marL="0">
+            <a:pPr marL="0" indent="0" algn="r" rtl="1">
               <a:buNone/>
             </a:pPr>
             <a:r>
@@ -5666,7 +5524,7 @@
           <a:bodyPr wrap="square" lIns="0" tIns="0" rIns="0" bIns="0" rtlCol="0" anchor="ctr"/>
           <a:lstStyle/>
           <a:p>
-            <a:pPr rtl="1" algn="r" indent="0" marL="0">
+            <a:pPr marL="0" indent="0" algn="r" rtl="1">
               <a:lnSpc>
                 <a:spcPts val="2000"/>
               </a:lnSpc>
@@ -5713,7 +5571,7 @@
             <a:prstDash val="solid"/>
           </a:ln>
           <a:effectLst>
-            <a:outerShdw sx="100000" sy="100000" kx="0" ky="0" algn="bl" rotWithShape="0" blurRad="101600" dist="25400" dir="5400000">
+            <a:outerShdw blurRad="101600" dist="25400" dir="5400000" algn="bl" rotWithShape="0">
               <a:srgbClr val="9AA9B5">
                 <a:alpha val="25000"/>
               </a:srgbClr>
@@ -5742,7 +5600,7 @@
           <a:bodyPr wrap="square" lIns="0" tIns="0" rIns="0" bIns="0" rtlCol="0" anchor="ctr"/>
           <a:lstStyle/>
           <a:p>
-            <a:pPr rtl="1" algn="r" indent="0" marL="0">
+            <a:pPr marL="0" indent="0" algn="r" rtl="1">
               <a:buNone/>
             </a:pPr>
             <a:r>
@@ -5781,7 +5639,7 @@
           <a:bodyPr wrap="square" lIns="0" tIns="0" rIns="0" bIns="0" rtlCol="0" anchor="ctr"/>
           <a:lstStyle/>
           <a:p>
-            <a:pPr rtl="1" algn="r" indent="0" marL="0">
+            <a:pPr marL="0" indent="0" algn="r" rtl="1">
               <a:lnSpc>
                 <a:spcPts val="2000"/>
               </a:lnSpc>
@@ -5828,7 +5686,7 @@
             <a:prstDash val="solid"/>
           </a:ln>
           <a:effectLst>
-            <a:outerShdw sx="100000" sy="100000" kx="0" ky="0" algn="bl" rotWithShape="0" blurRad="101600" dist="25400" dir="5400000">
+            <a:outerShdw blurRad="101600" dist="25400" dir="5400000" algn="bl" rotWithShape="0">
               <a:srgbClr val="9AA9B5">
                 <a:alpha val="25000"/>
               </a:srgbClr>
@@ -5857,7 +5715,7 @@
           <a:bodyPr wrap="square" lIns="0" tIns="0" rIns="0" bIns="0" rtlCol="0" anchor="ctr"/>
           <a:lstStyle/>
           <a:p>
-            <a:pPr rtl="1" algn="r" indent="0" marL="0">
+            <a:pPr marL="0" indent="0" algn="r" rtl="1">
               <a:buNone/>
             </a:pPr>
             <a:r>
@@ -5896,7 +5754,7 @@
           <a:bodyPr wrap="square" lIns="0" tIns="0" rIns="0" bIns="0" rtlCol="0" anchor="ctr"/>
           <a:lstStyle/>
           <a:p>
-            <a:pPr rtl="1" algn="r" indent="0" marL="0">
+            <a:pPr marL="0" indent="0" algn="r" rtl="1">
               <a:lnSpc>
                 <a:spcPts val="2000"/>
               </a:lnSpc>
@@ -5943,7 +5801,7 @@
             <a:prstDash val="solid"/>
           </a:ln>
           <a:effectLst>
-            <a:outerShdw sx="100000" sy="100000" kx="0" ky="0" algn="bl" rotWithShape="0" blurRad="101600" dist="25400" dir="5400000">
+            <a:outerShdw blurRad="101600" dist="25400" dir="5400000" algn="bl" rotWithShape="0">
               <a:srgbClr val="9AA9B5">
                 <a:alpha val="25000"/>
               </a:srgbClr>
@@ -5972,7 +5830,7 @@
           <a:bodyPr wrap="square" lIns="0" tIns="0" rIns="0" bIns="0" rtlCol="0" anchor="ctr"/>
           <a:lstStyle/>
           <a:p>
-            <a:pPr rtl="1" algn="r" indent="0" marL="0">
+            <a:pPr marL="0" indent="0" algn="r" rtl="1">
               <a:buNone/>
             </a:pPr>
             <a:r>
@@ -6011,7 +5869,7 @@
           <a:bodyPr wrap="square" lIns="0" tIns="0" rIns="0" bIns="0" rtlCol="0" anchor="ctr"/>
           <a:lstStyle/>
           <a:p>
-            <a:pPr rtl="1" algn="r" indent="0" marL="0">
+            <a:pPr marL="0" indent="0" algn="r" rtl="1">
               <a:lnSpc>
                 <a:spcPts val="2000"/>
               </a:lnSpc>
@@ -6048,6 +5906,7 @@
         <a:solidFill>
           <a:srgbClr val="FFFFFF"/>
         </a:solidFill>
+        <a:effectLst/>
       </p:bgPr>
     </p:bg>
     <p:spTree>
@@ -6085,11 +5944,11 @@
           <a:bodyPr wrap="square" rtlCol="0" anchor="t"/>
           <a:lstStyle/>
           <a:p>
-            <a:pPr rtl="1" algn="r" indent="0" marL="0">
-              <a:buNone/>
-            </a:pPr>
-            <a:r>
-              <a:rPr lang="en-US" sz="1200" b="1" spc="100" kern="0" dirty="0">
+            <a:pPr marL="0" indent="0" algn="r" rtl="1">
+              <a:buNone/>
+            </a:pPr>
+            <a:r>
+              <a:rPr lang="en-US" sz="1200" b="1" kern="0" spc="100" dirty="0">
                 <a:solidFill>
                   <a:srgbClr val="F5A623"/>
                 </a:solidFill>
@@ -6124,7 +5983,7 @@
           <a:bodyPr wrap="square" rtlCol="0" anchor="t"/>
           <a:lstStyle/>
           <a:p>
-            <a:pPr rtl="1" algn="r" indent="0" marL="0">
+            <a:pPr marL="0" indent="0" algn="r" rtl="1">
               <a:buNone/>
             </a:pPr>
             <a:r>
@@ -6168,7 +6027,7 @@
             <a:prstDash val="solid"/>
           </a:ln>
           <a:effectLst>
-            <a:outerShdw sx="100000" sy="100000" kx="0" ky="0" algn="bl" rotWithShape="0" blurRad="101600" dist="25400" dir="5400000">
+            <a:outerShdw blurRad="101600" dist="25400" dir="5400000" algn="bl" rotWithShape="0">
               <a:srgbClr val="9AA9B5">
                 <a:alpha val="25000"/>
               </a:srgbClr>
@@ -6197,7 +6056,7 @@
           <a:bodyPr wrap="square" lIns="0" tIns="0" rIns="0" bIns="0" rtlCol="0" anchor="t"/>
           <a:lstStyle/>
           <a:p>
-            <a:pPr rtl="1" algn="r" indent="0" marL="0">
+            <a:pPr marL="0" indent="0" algn="r" rtl="1">
               <a:buNone/>
             </a:pPr>
             <a:r>
@@ -6236,7 +6095,7 @@
           <a:bodyPr wrap="square" lIns="0" tIns="0" rIns="0" bIns="0" rtlCol="0" anchor="t"/>
           <a:lstStyle/>
           <a:p>
-            <a:pPr rtl="1" algn="r" indent="0" marL="0">
+            <a:pPr marL="0" indent="0" algn="r" rtl="1">
               <a:lnSpc>
                 <a:spcPts val="1900"/>
               </a:lnSpc>
@@ -6283,7 +6142,7 @@
             <a:prstDash val="solid"/>
           </a:ln>
           <a:effectLst>
-            <a:outerShdw sx="100000" sy="100000" kx="0" ky="0" algn="bl" rotWithShape="0" blurRad="101600" dist="25400" dir="5400000">
+            <a:outerShdw blurRad="101600" dist="25400" dir="5400000" algn="bl" rotWithShape="0">
               <a:srgbClr val="9AA9B5">
                 <a:alpha val="25000"/>
               </a:srgbClr>
@@ -6312,7 +6171,7 @@
           <a:bodyPr wrap="square" lIns="0" tIns="0" rIns="0" bIns="0" rtlCol="0" anchor="t"/>
           <a:lstStyle/>
           <a:p>
-            <a:pPr rtl="1" algn="r" indent="0" marL="0">
+            <a:pPr marL="0" indent="0" algn="r" rtl="1">
               <a:buNone/>
             </a:pPr>
             <a:r>
@@ -6351,7 +6210,7 @@
           <a:bodyPr wrap="square" lIns="0" tIns="0" rIns="0" bIns="0" rtlCol="0" anchor="t"/>
           <a:lstStyle/>
           <a:p>
-            <a:pPr rtl="1" algn="r" indent="0" marL="0">
+            <a:pPr marL="0" indent="0" algn="r" rtl="1">
               <a:lnSpc>
                 <a:spcPts val="1900"/>
               </a:lnSpc>
@@ -6398,7 +6257,7 @@
             <a:prstDash val="solid"/>
           </a:ln>
           <a:effectLst>
-            <a:outerShdw sx="100000" sy="100000" kx="0" ky="0" algn="bl" rotWithShape="0" blurRad="101600" dist="25400" dir="5400000">
+            <a:outerShdw blurRad="101600" dist="25400" dir="5400000" algn="bl" rotWithShape="0">
               <a:srgbClr val="9AA9B5">
                 <a:alpha val="25000"/>
               </a:srgbClr>
@@ -6427,7 +6286,7 @@
           <a:bodyPr wrap="square" lIns="0" tIns="0" rIns="0" bIns="0" rtlCol="0" anchor="t"/>
           <a:lstStyle/>
           <a:p>
-            <a:pPr rtl="1" algn="r" indent="0" marL="0">
+            <a:pPr marL="0" indent="0" algn="r" rtl="1">
               <a:buNone/>
             </a:pPr>
             <a:r>
@@ -6466,7 +6325,7 @@
           <a:bodyPr wrap="square" lIns="0" tIns="0" rIns="0" bIns="0" rtlCol="0" anchor="t"/>
           <a:lstStyle/>
           <a:p>
-            <a:pPr rtl="1" algn="r" indent="0" marL="0">
+            <a:pPr marL="0" indent="0" algn="r" rtl="1">
               <a:lnSpc>
                 <a:spcPts val="1900"/>
               </a:lnSpc>
@@ -6513,7 +6372,7 @@
             <a:prstDash val="solid"/>
           </a:ln>
           <a:effectLst>
-            <a:outerShdw sx="100000" sy="100000" kx="0" ky="0" algn="bl" rotWithShape="0" blurRad="101600" dist="25400" dir="5400000">
+            <a:outerShdw blurRad="101600" dist="25400" dir="5400000" algn="bl" rotWithShape="0">
               <a:srgbClr val="9AA9B5">
                 <a:alpha val="25000"/>
               </a:srgbClr>
@@ -6542,7 +6401,7 @@
           <a:bodyPr wrap="square" lIns="0" tIns="0" rIns="0" bIns="0" rtlCol="0" anchor="t"/>
           <a:lstStyle/>
           <a:p>
-            <a:pPr rtl="1" algn="r" indent="0" marL="0">
+            <a:pPr marL="0" indent="0" algn="r" rtl="1">
               <a:buNone/>
             </a:pPr>
             <a:r>
@@ -6581,7 +6440,7 @@
           <a:bodyPr wrap="square" lIns="0" tIns="0" rIns="0" bIns="0" rtlCol="0" anchor="t"/>
           <a:lstStyle/>
           <a:p>
-            <a:pPr rtl="1" algn="r" indent="0" marL="0">
+            <a:pPr marL="0" indent="0" algn="r" rtl="1">
               <a:lnSpc>
                 <a:spcPts val="1900"/>
               </a:lnSpc>
@@ -6628,7 +6487,7 @@
             <a:prstDash val="solid"/>
           </a:ln>
           <a:effectLst>
-            <a:outerShdw sx="100000" sy="100000" kx="0" ky="0" algn="bl" rotWithShape="0" blurRad="101600" dist="25400" dir="5400000">
+            <a:outerShdw blurRad="101600" dist="25400" dir="5400000" algn="bl" rotWithShape="0">
               <a:srgbClr val="9AA9B5">
                 <a:alpha val="25000"/>
               </a:srgbClr>
@@ -6657,7 +6516,7 @@
           <a:bodyPr wrap="square" lIns="0" tIns="0" rIns="0" bIns="0" rtlCol="0" anchor="t"/>
           <a:lstStyle/>
           <a:p>
-            <a:pPr rtl="1" algn="r" indent="0" marL="0">
+            <a:pPr marL="0" indent="0" algn="r" rtl="1">
               <a:buNone/>
             </a:pPr>
             <a:r>
@@ -6696,7 +6555,7 @@
           <a:bodyPr wrap="square" lIns="0" tIns="0" rIns="0" bIns="0" rtlCol="0" anchor="t"/>
           <a:lstStyle/>
           <a:p>
-            <a:pPr rtl="1" algn="r" indent="0" marL="0">
+            <a:pPr marL="0" indent="0" algn="r" rtl="1">
               <a:lnSpc>
                 <a:spcPts val="1900"/>
               </a:lnSpc>
@@ -6743,7 +6602,7 @@
             <a:prstDash val="solid"/>
           </a:ln>
           <a:effectLst>
-            <a:outerShdw sx="100000" sy="100000" kx="0" ky="0" algn="bl" rotWithShape="0" blurRad="101600" dist="25400" dir="5400000">
+            <a:outerShdw blurRad="101600" dist="25400" dir="5400000" algn="bl" rotWithShape="0">
               <a:srgbClr val="9AA9B5">
                 <a:alpha val="25000"/>
               </a:srgbClr>
@@ -6772,7 +6631,7 @@
           <a:bodyPr wrap="square" lIns="0" tIns="0" rIns="0" bIns="0" rtlCol="0" anchor="t"/>
           <a:lstStyle/>
           <a:p>
-            <a:pPr rtl="1" algn="r" indent="0" marL="0">
+            <a:pPr marL="0" indent="0" algn="r" rtl="1">
               <a:buNone/>
             </a:pPr>
             <a:r>
@@ -6811,7 +6670,7 @@
           <a:bodyPr wrap="square" lIns="0" tIns="0" rIns="0" bIns="0" rtlCol="0" anchor="t"/>
           <a:lstStyle/>
           <a:p>
-            <a:pPr rtl="1" algn="r" indent="0" marL="0">
+            <a:pPr marL="0" indent="0" algn="r" rtl="1">
               <a:lnSpc>
                 <a:spcPts val="1900"/>
               </a:lnSpc>
@@ -6853,7 +6712,7 @@
           <a:bodyPr wrap="square" rtlCol="0" anchor="t"/>
           <a:lstStyle/>
           <a:p>
-            <a:pPr rtl="1" algn="r" indent="0" marL="0">
+            <a:pPr marL="0" indent="0" algn="r" rtl="1">
               <a:buNone/>
             </a:pPr>
             <a:r>
@@ -6887,6 +6746,7 @@
         <a:solidFill>
           <a:srgbClr val="16222E"/>
         </a:solidFill>
+        <a:effectLst/>
       </p:bgPr>
     </p:bg>
     <p:spTree>
@@ -6924,11 +6784,11 @@
           <a:bodyPr wrap="square" rtlCol="0" anchor="t"/>
           <a:lstStyle/>
           <a:p>
-            <a:pPr rtl="1" algn="r" indent="0" marL="0">
-              <a:buNone/>
-            </a:pPr>
-            <a:r>
-              <a:rPr lang="en-US" sz="1200" b="1" spc="100" kern="0" dirty="0">
+            <a:pPr marL="0" indent="0" algn="r" rtl="1">
+              <a:buNone/>
+            </a:pPr>
+            <a:r>
+              <a:rPr lang="en-US" sz="1200" b="1" kern="0" spc="100" dirty="0">
                 <a:solidFill>
                   <a:srgbClr val="F5A623"/>
                 </a:solidFill>
@@ -6963,7 +6823,7 @@
           <a:bodyPr wrap="square" rtlCol="0" anchor="t"/>
           <a:lstStyle/>
           <a:p>
-            <a:pPr rtl="1" algn="r" indent="0" marL="0">
+            <a:pPr marL="0" indent="0" algn="r" rtl="1">
               <a:buNone/>
             </a:pPr>
             <a:r>
@@ -7029,7 +6889,7 @@
           <a:bodyPr wrap="square" lIns="0" tIns="0" rIns="0" bIns="0" rtlCol="0" anchor="ctr"/>
           <a:lstStyle/>
           <a:p>
-            <a:pPr algn="ctr" indent="0" marL="0">
+            <a:pPr marL="0" indent="0" algn="ctr">
               <a:buNone/>
             </a:pPr>
             <a:r>
@@ -7068,7 +6928,7 @@
           <a:bodyPr wrap="square" lIns="0" tIns="0" rIns="0" bIns="0" rtlCol="0" anchor="ctr"/>
           <a:lstStyle/>
           <a:p>
-            <a:pPr rtl="1" algn="ctr" indent="0" marL="0">
+            <a:pPr marL="0" indent="0" algn="ctr" rtl="1">
               <a:buNone/>
             </a:pPr>
             <a:r>
@@ -7134,7 +6994,7 @@
           <a:bodyPr wrap="square" lIns="0" tIns="0" rIns="0" bIns="0" rtlCol="0" anchor="ctr"/>
           <a:lstStyle/>
           <a:p>
-            <a:pPr algn="ctr" indent="0" marL="0">
+            <a:pPr marL="0" indent="0" algn="ctr">
               <a:buNone/>
             </a:pPr>
             <a:r>
@@ -7173,7 +7033,7 @@
           <a:bodyPr wrap="square" lIns="0" tIns="0" rIns="0" bIns="0" rtlCol="0" anchor="ctr"/>
           <a:lstStyle/>
           <a:p>
-            <a:pPr rtl="1" algn="ctr" indent="0" marL="0">
+            <a:pPr marL="0" indent="0" algn="ctr" rtl="1">
               <a:buNone/>
             </a:pPr>
             <a:r>
@@ -7239,7 +7099,7 @@
           <a:bodyPr wrap="square" lIns="0" tIns="0" rIns="0" bIns="0" rtlCol="0" anchor="ctr"/>
           <a:lstStyle/>
           <a:p>
-            <a:pPr algn="ctr" indent="0" marL="0">
+            <a:pPr marL="0" indent="0" algn="ctr">
               <a:buNone/>
             </a:pPr>
             <a:r>
@@ -7278,7 +7138,7 @@
           <a:bodyPr wrap="square" lIns="0" tIns="0" rIns="0" bIns="0" rtlCol="0" anchor="ctr"/>
           <a:lstStyle/>
           <a:p>
-            <a:pPr rtl="1" algn="ctr" indent="0" marL="0">
+            <a:pPr marL="0" indent="0" algn="ctr" rtl="1">
               <a:buNone/>
             </a:pPr>
             <a:r>
@@ -7344,7 +7204,7 @@
           <a:bodyPr wrap="square" lIns="0" tIns="0" rIns="0" bIns="0" rtlCol="0" anchor="ctr"/>
           <a:lstStyle/>
           <a:p>
-            <a:pPr algn="ctr" indent="0" marL="0">
+            <a:pPr marL="0" indent="0" algn="ctr">
               <a:buNone/>
             </a:pPr>
             <a:r>
@@ -7383,7 +7243,7 @@
           <a:bodyPr wrap="square" lIns="0" tIns="0" rIns="0" bIns="0" rtlCol="0" anchor="ctr"/>
           <a:lstStyle/>
           <a:p>
-            <a:pPr rtl="1" algn="ctr" indent="0" marL="0">
+            <a:pPr marL="0" indent="0" algn="ctr" rtl="1">
               <a:buNone/>
             </a:pPr>
             <a:r>
@@ -7422,7 +7282,7 @@
           <a:bodyPr wrap="square" rtlCol="0" anchor="t"/>
           <a:lstStyle/>
           <a:p>
-            <a:pPr rtl="1" algn="r" indent="0" marL="0">
+            <a:pPr marL="0" indent="0" algn="r" rtl="1">
               <a:lnSpc>
                 <a:spcPts val="2600"/>
               </a:lnSpc>
@@ -7464,7 +7324,7 @@
           <a:bodyPr wrap="square" rtlCol="0" anchor="t"/>
           <a:lstStyle/>
           <a:p>
-            <a:pPr rtl="1" algn="r" indent="0" marL="0">
+            <a:pPr marL="0" indent="0" algn="r" rtl="1">
               <a:buNone/>
             </a:pPr>
             <a:r>
@@ -7498,6 +7358,7 @@
         <a:solidFill>
           <a:srgbClr val="FFFFFF"/>
         </a:solidFill>
+        <a:effectLst/>
       </p:bgPr>
     </p:bg>
     <p:spTree>
@@ -7535,11 +7396,11 @@
           <a:bodyPr wrap="square" rtlCol="0" anchor="t"/>
           <a:lstStyle/>
           <a:p>
-            <a:pPr rtl="1" algn="r" indent="0" marL="0">
-              <a:buNone/>
-            </a:pPr>
-            <a:r>
-              <a:rPr lang="en-US" sz="1200" b="1" spc="100" kern="0" dirty="0">
+            <a:pPr marL="0" indent="0" algn="r" rtl="1">
+              <a:buNone/>
+            </a:pPr>
+            <a:r>
+              <a:rPr lang="en-US" sz="1200" b="1" kern="0" spc="100" dirty="0">
                 <a:solidFill>
                   <a:srgbClr val="F5A623"/>
                 </a:solidFill>
@@ -7574,7 +7435,7 @@
           <a:bodyPr wrap="square" rtlCol="0" anchor="t"/>
           <a:lstStyle/>
           <a:p>
-            <a:pPr rtl="1" algn="r" indent="0" marL="0">
+            <a:pPr marL="0" indent="0" algn="r" rtl="1">
               <a:buNone/>
             </a:pPr>
             <a:r>
@@ -7618,7 +7479,7 @@
             <a:prstDash val="solid"/>
           </a:ln>
           <a:effectLst>
-            <a:outerShdw sx="100000" sy="100000" kx="0" ky="0" algn="bl" rotWithShape="0" blurRad="101600" dist="25400" dir="5400000">
+            <a:outerShdw blurRad="101600" dist="25400" dir="5400000" algn="bl" rotWithShape="0">
               <a:srgbClr val="9AA9B5">
                 <a:alpha val="25000"/>
               </a:srgbClr>
@@ -7647,7 +7508,7 @@
           <a:bodyPr wrap="square" lIns="0" tIns="0" rIns="0" bIns="0" rtlCol="0" anchor="ctr"/>
           <a:lstStyle/>
           <a:p>
-            <a:pPr algn="ctr" indent="0" marL="0">
+            <a:pPr marL="0" indent="0" algn="ctr">
               <a:buNone/>
             </a:pPr>
             <a:r>
@@ -7686,7 +7547,7 @@
           <a:bodyPr wrap="square" rtlCol="0" anchor="ctr"/>
           <a:lstStyle/>
           <a:p>
-            <a:pPr rtl="1" algn="ctr" indent="0" marL="0">
+            <a:pPr marL="0" indent="0" algn="ctr" rtl="1">
               <a:lnSpc>
                 <a:spcPts val="2200"/>
               </a:lnSpc>
@@ -7706,7 +7567,7 @@
             <a:endParaRPr lang="en-US" sz="1400" dirty="0"/>
           </a:p>
           <a:p>
-            <a:pPr rtl="1" algn="ctr" indent="0" marL="0">
+            <a:pPr marL="0" indent="0" algn="ctr" rtl="1">
               <a:lnSpc>
                 <a:spcPts val="2200"/>
               </a:lnSpc>
@@ -7753,7 +7614,7 @@
             <a:prstDash val="solid"/>
           </a:ln>
           <a:effectLst>
-            <a:outerShdw sx="100000" sy="100000" kx="0" ky="0" algn="bl" rotWithShape="0" blurRad="101600" dist="25400" dir="5400000">
+            <a:outerShdw blurRad="101600" dist="25400" dir="5400000" algn="bl" rotWithShape="0">
               <a:srgbClr val="9AA9B5">
                 <a:alpha val="25000"/>
               </a:srgbClr>
@@ -7807,7 +7668,7 @@
           <a:bodyPr wrap="square" lIns="0" tIns="0" rIns="0" bIns="0" rtlCol="0" anchor="ctr"/>
           <a:lstStyle/>
           <a:p>
-            <a:pPr algn="ctr" indent="0" marL="0">
+            <a:pPr marL="0" indent="0" algn="ctr">
               <a:buNone/>
             </a:pPr>
             <a:r>
@@ -7846,7 +7707,7 @@
           <a:bodyPr wrap="square" lIns="0" tIns="0" rIns="0" bIns="0" rtlCol="0" anchor="ctr"/>
           <a:lstStyle/>
           <a:p>
-            <a:pPr rtl="1" algn="r" indent="0" marL="0">
+            <a:pPr marL="0" indent="0" algn="r" rtl="1">
               <a:buNone/>
             </a:pPr>
             <a:r>
@@ -7890,7 +7751,7 @@
             <a:prstDash val="solid"/>
           </a:ln>
           <a:effectLst>
-            <a:outerShdw sx="100000" sy="100000" kx="0" ky="0" algn="bl" rotWithShape="0" blurRad="101600" dist="25400" dir="5400000">
+            <a:outerShdw blurRad="101600" dist="25400" dir="5400000" algn="bl" rotWithShape="0">
               <a:srgbClr val="9AA9B5">
                 <a:alpha val="25000"/>
               </a:srgbClr>
@@ -7944,7 +7805,7 @@
           <a:bodyPr wrap="square" lIns="0" tIns="0" rIns="0" bIns="0" rtlCol="0" anchor="ctr"/>
           <a:lstStyle/>
           <a:p>
-            <a:pPr algn="ctr" indent="0" marL="0">
+            <a:pPr marL="0" indent="0" algn="ctr">
               <a:buNone/>
             </a:pPr>
             <a:r>
@@ -7983,7 +7844,7 @@
           <a:bodyPr wrap="square" lIns="0" tIns="0" rIns="0" bIns="0" rtlCol="0" anchor="ctr"/>
           <a:lstStyle/>
           <a:p>
-            <a:pPr rtl="1" algn="r" indent="0" marL="0">
+            <a:pPr marL="0" indent="0" algn="r" rtl="1">
               <a:buNone/>
             </a:pPr>
             <a:r>
@@ -8027,7 +7888,7 @@
             <a:prstDash val="solid"/>
           </a:ln>
           <a:effectLst>
-            <a:outerShdw sx="100000" sy="100000" kx="0" ky="0" algn="bl" rotWithShape="0" blurRad="101600" dist="25400" dir="5400000">
+            <a:outerShdw blurRad="101600" dist="25400" dir="5400000" algn="bl" rotWithShape="0">
               <a:srgbClr val="9AA9B5">
                 <a:alpha val="25000"/>
               </a:srgbClr>
@@ -8081,7 +7942,7 @@
           <a:bodyPr wrap="square" lIns="0" tIns="0" rIns="0" bIns="0" rtlCol="0" anchor="ctr"/>
           <a:lstStyle/>
           <a:p>
-            <a:pPr algn="ctr" indent="0" marL="0">
+            <a:pPr marL="0" indent="0" algn="ctr">
               <a:buNone/>
             </a:pPr>
             <a:r>
@@ -8120,7 +7981,7 @@
           <a:bodyPr wrap="square" lIns="0" tIns="0" rIns="0" bIns="0" rtlCol="0" anchor="ctr"/>
           <a:lstStyle/>
           <a:p>
-            <a:pPr rtl="1" algn="r" indent="0" marL="0">
+            <a:pPr marL="0" indent="0" algn="r" rtl="1">
               <a:buNone/>
             </a:pPr>
             <a:r>
@@ -8159,7 +8020,7 @@
           <a:bodyPr wrap="square" rtlCol="0" anchor="t"/>
           <a:lstStyle/>
           <a:p>
-            <a:pPr rtl="1" algn="r" indent="0" marL="0">
+            <a:pPr marL="0" indent="0" algn="r" rtl="1">
               <a:lnSpc>
                 <a:spcPts val="2200"/>
               </a:lnSpc>
@@ -8196,6 +8057,7 @@
         <a:solidFill>
           <a:srgbClr val="FFFFFF"/>
         </a:solidFill>
+        <a:effectLst/>
       </p:bgPr>
     </p:bg>
     <p:spTree>
@@ -8233,11 +8095,11 @@
           <a:bodyPr wrap="square" rtlCol="0" anchor="t"/>
           <a:lstStyle/>
           <a:p>
-            <a:pPr rtl="1" algn="r" indent="0" marL="0">
-              <a:buNone/>
-            </a:pPr>
-            <a:r>
-              <a:rPr lang="en-US" sz="1200" b="1" spc="100" kern="0" dirty="0">
+            <a:pPr marL="0" indent="0" algn="r" rtl="1">
+              <a:buNone/>
+            </a:pPr>
+            <a:r>
+              <a:rPr lang="en-US" sz="1200" b="1" kern="0" spc="100" dirty="0">
                 <a:solidFill>
                   <a:srgbClr val="F5A623"/>
                 </a:solidFill>
@@ -8272,7 +8134,7 @@
           <a:bodyPr wrap="square" rtlCol="0" anchor="t"/>
           <a:lstStyle/>
           <a:p>
-            <a:pPr rtl="1" algn="r" indent="0" marL="0">
+            <a:pPr marL="0" indent="0" algn="r" rtl="1">
               <a:buNone/>
             </a:pPr>
             <a:r>
@@ -8316,7 +8178,7 @@
             <a:prstDash val="solid"/>
           </a:ln>
           <a:effectLst>
-            <a:outerShdw sx="100000" sy="100000" kx="0" ky="0" algn="bl" rotWithShape="0" blurRad="101600" dist="25400" dir="5400000">
+            <a:outerShdw blurRad="101600" dist="25400" dir="5400000" algn="bl" rotWithShape="0">
               <a:srgbClr val="9AA9B5">
                 <a:alpha val="25000"/>
               </a:srgbClr>
@@ -8370,7 +8232,7 @@
           <a:bodyPr wrap="square" lIns="0" tIns="0" rIns="0" bIns="0" rtlCol="0" anchor="ctr"/>
           <a:lstStyle/>
           <a:p>
-            <a:pPr algn="ctr" indent="0" marL="0">
+            <a:pPr marL="0" indent="0" algn="ctr">
               <a:buNone/>
             </a:pPr>
             <a:r>
@@ -8409,7 +8271,7 @@
           <a:bodyPr wrap="square" lIns="0" tIns="0" rIns="0" bIns="0" rtlCol="0" anchor="t"/>
           <a:lstStyle/>
           <a:p>
-            <a:pPr rtl="1" algn="r" indent="0" marL="0">
+            <a:pPr marL="0" indent="0" algn="r" rtl="1">
               <a:buNone/>
             </a:pPr>
             <a:r>
@@ -8448,7 +8310,7 @@
           <a:bodyPr wrap="square" lIns="0" tIns="0" rIns="0" bIns="0" rtlCol="0" anchor="t"/>
           <a:lstStyle/>
           <a:p>
-            <a:pPr rtl="1" algn="r" indent="0" marL="0">
+            <a:pPr marL="0" indent="0" algn="r" rtl="1">
               <a:lnSpc>
                 <a:spcPts val="2100"/>
               </a:lnSpc>
@@ -8495,7 +8357,7 @@
             <a:prstDash val="solid"/>
           </a:ln>
           <a:effectLst>
-            <a:outerShdw sx="100000" sy="100000" kx="0" ky="0" algn="bl" rotWithShape="0" blurRad="101600" dist="25400" dir="5400000">
+            <a:outerShdw blurRad="101600" dist="25400" dir="5400000" algn="bl" rotWithShape="0">
               <a:srgbClr val="9AA9B5">
                 <a:alpha val="25000"/>
               </a:srgbClr>
@@ -8549,7 +8411,7 @@
           <a:bodyPr wrap="square" lIns="0" tIns="0" rIns="0" bIns="0" rtlCol="0" anchor="ctr"/>
           <a:lstStyle/>
           <a:p>
-            <a:pPr algn="ctr" indent="0" marL="0">
+            <a:pPr marL="0" indent="0" algn="ctr">
               <a:buNone/>
             </a:pPr>
             <a:r>
@@ -8588,7 +8450,7 @@
           <a:bodyPr wrap="square" lIns="0" tIns="0" rIns="0" bIns="0" rtlCol="0" anchor="t"/>
           <a:lstStyle/>
           <a:p>
-            <a:pPr rtl="1" algn="r" indent="0" marL="0">
+            <a:pPr marL="0" indent="0" algn="r" rtl="1">
               <a:buNone/>
             </a:pPr>
             <a:r>
@@ -8627,7 +8489,7 @@
           <a:bodyPr wrap="square" lIns="0" tIns="0" rIns="0" bIns="0" rtlCol="0" anchor="t"/>
           <a:lstStyle/>
           <a:p>
-            <a:pPr rtl="1" algn="r" indent="0" marL="0">
+            <a:pPr marL="0" indent="0" algn="r" rtl="1">
               <a:lnSpc>
                 <a:spcPts val="2100"/>
               </a:lnSpc>
@@ -8674,7 +8536,7 @@
             <a:prstDash val="solid"/>
           </a:ln>
           <a:effectLst>
-            <a:outerShdw sx="100000" sy="100000" kx="0" ky="0" algn="bl" rotWithShape="0" blurRad="101600" dist="25400" dir="5400000">
+            <a:outerShdw blurRad="101600" dist="25400" dir="5400000" algn="bl" rotWithShape="0">
               <a:srgbClr val="9AA9B5">
                 <a:alpha val="25000"/>
               </a:srgbClr>
@@ -8728,7 +8590,7 @@
           <a:bodyPr wrap="square" lIns="0" tIns="0" rIns="0" bIns="0" rtlCol="0" anchor="ctr"/>
           <a:lstStyle/>
           <a:p>
-            <a:pPr algn="ctr" indent="0" marL="0">
+            <a:pPr marL="0" indent="0" algn="ctr">
               <a:buNone/>
             </a:pPr>
             <a:r>
@@ -8767,7 +8629,7 @@
           <a:bodyPr wrap="square" lIns="0" tIns="0" rIns="0" bIns="0" rtlCol="0" anchor="t"/>
           <a:lstStyle/>
           <a:p>
-            <a:pPr rtl="1" algn="r" indent="0" marL="0">
+            <a:pPr marL="0" indent="0" algn="r" rtl="1">
               <a:buNone/>
             </a:pPr>
             <a:r>
@@ -8806,7 +8668,7 @@
           <a:bodyPr wrap="square" lIns="0" tIns="0" rIns="0" bIns="0" rtlCol="0" anchor="t"/>
           <a:lstStyle/>
           <a:p>
-            <a:pPr rtl="1" algn="r" indent="0" marL="0">
+            <a:pPr marL="0" indent="0" algn="r" rtl="1">
               <a:lnSpc>
                 <a:spcPts val="2100"/>
               </a:lnSpc>
@@ -8853,7 +8715,7 @@
             <a:prstDash val="solid"/>
           </a:ln>
           <a:effectLst>
-            <a:outerShdw sx="100000" sy="100000" kx="0" ky="0" algn="bl" rotWithShape="0" blurRad="101600" dist="25400" dir="5400000">
+            <a:outerShdw blurRad="101600" dist="25400" dir="5400000" algn="bl" rotWithShape="0">
               <a:srgbClr val="9AA9B5">
                 <a:alpha val="25000"/>
               </a:srgbClr>
@@ -8907,7 +8769,7 @@
           <a:bodyPr wrap="square" lIns="0" tIns="0" rIns="0" bIns="0" rtlCol="0" anchor="ctr"/>
           <a:lstStyle/>
           <a:p>
-            <a:pPr algn="ctr" indent="0" marL="0">
+            <a:pPr marL="0" indent="0" algn="ctr">
               <a:buNone/>
             </a:pPr>
             <a:r>
@@ -8946,7 +8808,7 @@
           <a:bodyPr wrap="square" lIns="0" tIns="0" rIns="0" bIns="0" rtlCol="0" anchor="t"/>
           <a:lstStyle/>
           <a:p>
-            <a:pPr rtl="1" algn="r" indent="0" marL="0">
+            <a:pPr marL="0" indent="0" algn="r" rtl="1">
               <a:buNone/>
             </a:pPr>
             <a:r>
@@ -8985,7 +8847,7 @@
           <a:bodyPr wrap="square" lIns="0" tIns="0" rIns="0" bIns="0" rtlCol="0" anchor="t"/>
           <a:lstStyle/>
           <a:p>
-            <a:pPr rtl="1" algn="r" indent="0" marL="0">
+            <a:pPr marL="0" indent="0" algn="r" rtl="1">
               <a:lnSpc>
                 <a:spcPts val="2100"/>
               </a:lnSpc>
@@ -9032,7 +8894,7 @@
             <a:prstDash val="solid"/>
           </a:ln>
           <a:effectLst>
-            <a:outerShdw sx="100000" sy="100000" kx="0" ky="0" algn="bl" rotWithShape="0" blurRad="101600" dist="25400" dir="5400000">
+            <a:outerShdw blurRad="101600" dist="25400" dir="5400000" algn="bl" rotWithShape="0">
               <a:srgbClr val="9AA9B5">
                 <a:alpha val="25000"/>
               </a:srgbClr>
@@ -9061,7 +8923,7 @@
           <a:bodyPr wrap="square" lIns="0" tIns="0" rIns="0" bIns="0" rtlCol="0" anchor="ctr"/>
           <a:lstStyle/>
           <a:p>
-            <a:pPr rtl="1" algn="r" indent="0" marL="0">
+            <a:pPr marL="0" indent="0" algn="r" rtl="1">
               <a:buNone/>
             </a:pPr>
             <a:r>
@@ -9095,6 +8957,7 @@
         <a:solidFill>
           <a:srgbClr val="FFFFFF"/>
         </a:solidFill>
+        <a:effectLst/>
       </p:bgPr>
     </p:bg>
     <p:spTree>
@@ -9132,11 +8995,11 @@
           <a:bodyPr wrap="square" rtlCol="0" anchor="t"/>
           <a:lstStyle/>
           <a:p>
-            <a:pPr rtl="1" algn="r" indent="0" marL="0">
-              <a:buNone/>
-            </a:pPr>
-            <a:r>
-              <a:rPr lang="en-US" sz="1200" b="1" spc="100" kern="0" dirty="0">
+            <a:pPr marL="0" indent="0" algn="r" rtl="1">
+              <a:buNone/>
+            </a:pPr>
+            <a:r>
+              <a:rPr lang="en-US" sz="1200" b="1" kern="0" spc="100" dirty="0">
                 <a:solidFill>
                   <a:srgbClr val="F5A623"/>
                 </a:solidFill>
@@ -9171,7 +9034,7 @@
           <a:bodyPr wrap="square" rtlCol="0" anchor="t"/>
           <a:lstStyle/>
           <a:p>
-            <a:pPr rtl="1" algn="r" indent="0" marL="0">
+            <a:pPr marL="0" indent="0" algn="r" rtl="1">
               <a:buNone/>
             </a:pPr>
             <a:r>
@@ -9215,7 +9078,7 @@
             <a:prstDash val="solid"/>
           </a:ln>
           <a:effectLst>
-            <a:outerShdw sx="100000" sy="100000" kx="0" ky="0" algn="bl" rotWithShape="0" blurRad="101600" dist="25400" dir="5400000">
+            <a:outerShdw blurRad="101600" dist="25400" dir="5400000" algn="bl" rotWithShape="0">
               <a:srgbClr val="9AA9B5">
                 <a:alpha val="25000"/>
               </a:srgbClr>
@@ -9244,7 +9107,7 @@
           <a:bodyPr wrap="square" lIns="0" tIns="0" rIns="0" bIns="0" rtlCol="0" anchor="t"/>
           <a:lstStyle/>
           <a:p>
-            <a:pPr rtl="1" algn="ctr" indent="0" marL="0">
+            <a:pPr marL="0" indent="0" algn="ctr" rtl="1">
               <a:buNone/>
             </a:pPr>
             <a:r>
@@ -9283,7 +9146,7 @@
           <a:bodyPr wrap="square" lIns="0" tIns="0" rIns="0" bIns="0" rtlCol="0" anchor="t"/>
           <a:lstStyle/>
           <a:p>
-            <a:pPr rtl="1" algn="ctr" indent="0" marL="0">
+            <a:pPr marL="0" indent="0" algn="ctr" rtl="1">
               <a:buNone/>
             </a:pPr>
             <a:r>
@@ -9322,7 +9185,7 @@
           <a:bodyPr wrap="square" lIns="0" tIns="0" rIns="0" bIns="0" rtlCol="0" anchor="ctr"/>
           <a:lstStyle/>
           <a:p>
-            <a:pPr algn="ctr" indent="0" marL="0">
+            <a:pPr marL="0" indent="0" algn="ctr">
               <a:buNone/>
             </a:pPr>
             <a:r>
@@ -9347,9 +9210,9 @@
           <p:nvPr/>
         </p:nvSpPr>
         <p:spPr>
-          <a:xfrm>
-            <a:off x="9372600" y="2944368"/>
-            <a:ext cx="182880" cy="0"/>
+          <a:xfrm flipH="1">
+            <a:off x="9386316" y="2944368"/>
+            <a:ext cx="192024" cy="0"/>
           </a:xfrm>
           <a:prstGeom prst="line">
             <a:avLst/>
@@ -9390,7 +9253,7 @@
             <a:prstDash val="solid"/>
           </a:ln>
           <a:effectLst>
-            <a:outerShdw sx="100000" sy="100000" kx="0" ky="0" algn="bl" rotWithShape="0" blurRad="101600" dist="25400" dir="5400000">
+            <a:outerShdw blurRad="101600" dist="25400" dir="5400000" algn="bl" rotWithShape="0">
               <a:srgbClr val="9AA9B5">
                 <a:alpha val="25000"/>
               </a:srgbClr>
@@ -9419,7 +9282,7 @@
           <a:bodyPr wrap="square" lIns="0" tIns="0" rIns="0" bIns="0" rtlCol="0" anchor="t"/>
           <a:lstStyle/>
           <a:p>
-            <a:pPr rtl="1" algn="ctr" indent="0" marL="0">
+            <a:pPr marL="0" indent="0" algn="ctr" rtl="1">
               <a:buNone/>
             </a:pPr>
             <a:r>
@@ -9458,21 +9321,19 @@
           <a:bodyPr wrap="square" lIns="0" tIns="0" rIns="0" bIns="0" rtlCol="0" anchor="t"/>
           <a:lstStyle/>
           <a:p>
-            <a:pPr rtl="1" algn="ctr" indent="0" marL="0">
-              <a:buNone/>
-            </a:pPr>
-            <a:r>
-              <a:rPr lang="en-US" sz="1200" dirty="0">
+            <a:pPr marL="0" indent="0" algn="ctr" rtl="1">
+              <a:buNone/>
+            </a:pPr>
+            <a:r>
+              <a:rPr lang="he-IL" sz="1200" dirty="0">
                 <a:solidFill>
                   <a:srgbClr val="44566B"/>
                 </a:solidFill>
                 <a:latin typeface="Arial" pitchFamily="34" charset="0"/>
-                <a:ea typeface="Arial" pitchFamily="34" charset="-122"/>
-                <a:cs typeface="Arial" pitchFamily="34" charset="-120"/>
-              </a:rPr>
-              <a:t>קושחה בעצמנו‏</a:t>
-            </a:r>
-            <a:endParaRPr lang="en-US" sz="1200" dirty="0"/>
+                <a:cs typeface="Arial" pitchFamily="34" charset="-120"/>
+              </a:rPr>
+              <a:t>צ'יפ מתוכנת לקריאת נתונים</a:t>
+            </a:r>
           </a:p>
         </p:txBody>
       </p:sp>
@@ -9497,7 +9358,7 @@
           <a:bodyPr wrap="square" lIns="0" tIns="0" rIns="0" bIns="0" rtlCol="0" anchor="ctr"/>
           <a:lstStyle/>
           <a:p>
-            <a:pPr algn="ctr" indent="0" marL="0">
+            <a:pPr marL="0" indent="0" algn="ctr">
               <a:buNone/>
             </a:pPr>
             <a:r>
@@ -9514,30 +9375,6 @@
             <a:endParaRPr lang="en-US" sz="1100" dirty="0"/>
           </a:p>
         </p:txBody>
-      </p:sp>
-      <p:sp>
-        <p:nvSpPr>
-          <p:cNvPr id="13" name="Shape 11"/>
-          <p:cNvSpPr/>
-          <p:nvPr/>
-        </p:nvSpPr>
-        <p:spPr>
-          <a:xfrm>
-            <a:off x="7123176" y="2944368"/>
-            <a:ext cx="182880" cy="0"/>
-          </a:xfrm>
-          <a:prstGeom prst="line">
-            <a:avLst/>
-          </a:prstGeom>
-          <a:noFill/>
-          <a:ln w="25400">
-            <a:solidFill>
-              <a:srgbClr val="F5A623"/>
-            </a:solidFill>
-            <a:prstDash val="solid"/>
-            <a:tailEnd type="triangle"/>
-          </a:ln>
-        </p:spPr>
       </p:sp>
       <p:sp>
         <p:nvSpPr>
@@ -9565,7 +9402,7 @@
             <a:prstDash val="solid"/>
           </a:ln>
           <a:effectLst>
-            <a:outerShdw sx="100000" sy="100000" kx="0" ky="0" algn="bl" rotWithShape="0" blurRad="101600" dist="25400" dir="5400000">
+            <a:outerShdw blurRad="101600" dist="25400" dir="5400000" algn="bl" rotWithShape="0">
               <a:srgbClr val="9AA9B5">
                 <a:alpha val="25000"/>
               </a:srgbClr>
@@ -9594,7 +9431,7 @@
           <a:bodyPr wrap="square" lIns="0" tIns="0" rIns="0" bIns="0" rtlCol="0" anchor="t"/>
           <a:lstStyle/>
           <a:p>
-            <a:pPr rtl="1" algn="ctr" indent="0" marL="0">
+            <a:pPr marL="0" indent="0" algn="ctr" rtl="1">
               <a:buNone/>
             </a:pPr>
             <a:r>
@@ -9633,7 +9470,7 @@
           <a:bodyPr wrap="square" lIns="0" tIns="0" rIns="0" bIns="0" rtlCol="0" anchor="t"/>
           <a:lstStyle/>
           <a:p>
-            <a:pPr rtl="1" algn="ctr" indent="0" marL="0">
+            <a:pPr marL="0" indent="0" algn="ctr" rtl="1">
               <a:buNone/>
             </a:pPr>
             <a:r>
@@ -9672,7 +9509,7 @@
           <a:bodyPr wrap="square" lIns="0" tIns="0" rIns="0" bIns="0" rtlCol="0" anchor="ctr"/>
           <a:lstStyle/>
           <a:p>
-            <a:pPr algn="ctr" indent="0" marL="0">
+            <a:pPr marL="0" indent="0" algn="ctr">
               <a:buNone/>
             </a:pPr>
             <a:r>
@@ -9689,30 +9526,6 @@
             <a:endParaRPr lang="en-US" sz="1100" dirty="0"/>
           </a:p>
         </p:txBody>
-      </p:sp>
-      <p:sp>
-        <p:nvSpPr>
-          <p:cNvPr id="18" name="Shape 16"/>
-          <p:cNvSpPr/>
-          <p:nvPr/>
-        </p:nvSpPr>
-        <p:spPr>
-          <a:xfrm>
-            <a:off x="4873752" y="2944368"/>
-            <a:ext cx="182880" cy="0"/>
-          </a:xfrm>
-          <a:prstGeom prst="line">
-            <a:avLst/>
-          </a:prstGeom>
-          <a:noFill/>
-          <a:ln w="25400">
-            <a:solidFill>
-              <a:srgbClr val="F5A623"/>
-            </a:solidFill>
-            <a:prstDash val="solid"/>
-            <a:tailEnd type="triangle"/>
-          </a:ln>
-        </p:spPr>
       </p:sp>
       <p:sp>
         <p:nvSpPr>
@@ -9740,7 +9553,7 @@
             <a:prstDash val="solid"/>
           </a:ln>
           <a:effectLst>
-            <a:outerShdw sx="100000" sy="100000" kx="0" ky="0" algn="bl" rotWithShape="0" blurRad="101600" dist="25400" dir="5400000">
+            <a:outerShdw blurRad="101600" dist="25400" dir="5400000" algn="bl" rotWithShape="0">
               <a:srgbClr val="9AA9B5">
                 <a:alpha val="25000"/>
               </a:srgbClr>
@@ -9769,7 +9582,7 @@
           <a:bodyPr wrap="square" lIns="0" tIns="0" rIns="0" bIns="0" rtlCol="0" anchor="t"/>
           <a:lstStyle/>
           <a:p>
-            <a:pPr rtl="1" algn="ctr" indent="0" marL="0">
+            <a:pPr marL="0" indent="0" algn="ctr" rtl="1">
               <a:buNone/>
             </a:pPr>
             <a:r>
@@ -9808,7 +9621,7 @@
           <a:bodyPr wrap="square" lIns="0" tIns="0" rIns="0" bIns="0" rtlCol="0" anchor="t"/>
           <a:lstStyle/>
           <a:p>
-            <a:pPr rtl="1" algn="ctr" indent="0" marL="0">
+            <a:pPr marL="0" indent="0" algn="ctr" rtl="1">
               <a:buNone/>
             </a:pPr>
             <a:r>
@@ -9847,7 +9660,7 @@
           <a:bodyPr wrap="square" lIns="0" tIns="0" rIns="0" bIns="0" rtlCol="0" anchor="ctr"/>
           <a:lstStyle/>
           <a:p>
-            <a:pPr algn="ctr" indent="0" marL="0">
+            <a:pPr marL="0" indent="0" algn="ctr">
               <a:buNone/>
             </a:pPr>
             <a:r>
@@ -9864,30 +9677,6 @@
             <a:endParaRPr lang="en-US" sz="1100" dirty="0"/>
           </a:p>
         </p:txBody>
-      </p:sp>
-      <p:sp>
-        <p:nvSpPr>
-          <p:cNvPr id="23" name="Shape 21"/>
-          <p:cNvSpPr/>
-          <p:nvPr/>
-        </p:nvSpPr>
-        <p:spPr>
-          <a:xfrm>
-            <a:off x="2624328" y="2944368"/>
-            <a:ext cx="182880" cy="0"/>
-          </a:xfrm>
-          <a:prstGeom prst="line">
-            <a:avLst/>
-          </a:prstGeom>
-          <a:noFill/>
-          <a:ln w="25400">
-            <a:solidFill>
-              <a:srgbClr val="F5A623"/>
-            </a:solidFill>
-            <a:prstDash val="solid"/>
-            <a:tailEnd type="triangle"/>
-          </a:ln>
-        </p:spPr>
       </p:sp>
       <p:sp>
         <p:nvSpPr>
@@ -9915,7 +9704,7 @@
             <a:prstDash val="solid"/>
           </a:ln>
           <a:effectLst>
-            <a:outerShdw sx="100000" sy="100000" kx="0" ky="0" algn="bl" rotWithShape="0" blurRad="101600" dist="25400" dir="5400000">
+            <a:outerShdw blurRad="101600" dist="25400" dir="5400000" algn="bl" rotWithShape="0">
               <a:srgbClr val="9AA9B5">
                 <a:alpha val="25000"/>
               </a:srgbClr>
@@ -9944,7 +9733,7 @@
           <a:bodyPr wrap="square" lIns="0" tIns="0" rIns="0" bIns="0" rtlCol="0" anchor="t"/>
           <a:lstStyle/>
           <a:p>
-            <a:pPr rtl="1" algn="ctr" indent="0" marL="0">
+            <a:pPr marL="0" indent="0" algn="ctr" rtl="1">
               <a:buNone/>
             </a:pPr>
             <a:r>
@@ -9983,7 +9772,7 @@
           <a:bodyPr wrap="square" lIns="0" tIns="0" rIns="0" bIns="0" rtlCol="0" anchor="t"/>
           <a:lstStyle/>
           <a:p>
-            <a:pPr rtl="1" algn="ctr" indent="0" marL="0">
+            <a:pPr marL="0" indent="0" algn="ctr" rtl="1">
               <a:buNone/>
             </a:pPr>
             <a:r>
@@ -10022,7 +9811,7 @@
           <a:bodyPr wrap="square" lIns="0" tIns="0" rIns="0" bIns="0" rtlCol="0" anchor="ctr"/>
           <a:lstStyle/>
           <a:p>
-            <a:pPr algn="ctr" indent="0" marL="0">
+            <a:pPr marL="0" indent="0" algn="ctr">
               <a:buNone/>
             </a:pPr>
             <a:r>
@@ -10066,7 +9855,7 @@
             <a:prstDash val="solid"/>
           </a:ln>
           <a:effectLst>
-            <a:outerShdw sx="100000" sy="100000" kx="0" ky="0" algn="bl" rotWithShape="0" blurRad="101600" dist="25400" dir="5400000">
+            <a:outerShdw blurRad="101600" dist="25400" dir="5400000" algn="bl" rotWithShape="0">
               <a:srgbClr val="9AA9B5">
                 <a:alpha val="25000"/>
               </a:srgbClr>
@@ -10095,7 +9884,7 @@
           <a:bodyPr wrap="square" lIns="0" tIns="0" rIns="0" bIns="0" rtlCol="0" anchor="t"/>
           <a:lstStyle/>
           <a:p>
-            <a:pPr rtl="1" algn="r" indent="0" marL="0">
+            <a:pPr marL="0" indent="0" algn="r" rtl="1">
               <a:buNone/>
             </a:pPr>
             <a:r>
@@ -10134,7 +9923,7 @@
           <a:bodyPr wrap="square" lIns="0" tIns="0" rIns="0" bIns="0" rtlCol="0" anchor="t"/>
           <a:lstStyle/>
           <a:p>
-            <a:pPr rtl="1" algn="r" indent="0" marL="0">
+            <a:pPr marL="0" indent="0" algn="r" rtl="1">
               <a:lnSpc>
                 <a:spcPts val="2000"/>
               </a:lnSpc>
@@ -10181,7 +9970,7 @@
             <a:prstDash val="solid"/>
           </a:ln>
           <a:effectLst>
-            <a:outerShdw sx="100000" sy="100000" kx="0" ky="0" algn="bl" rotWithShape="0" blurRad="101600" dist="25400" dir="5400000">
+            <a:outerShdw blurRad="101600" dist="25400" dir="5400000" algn="bl" rotWithShape="0">
               <a:srgbClr val="9AA9B5">
                 <a:alpha val="25000"/>
               </a:srgbClr>
@@ -10210,7 +9999,7 @@
           <a:bodyPr wrap="square" lIns="0" tIns="0" rIns="0" bIns="0" rtlCol="0" anchor="t"/>
           <a:lstStyle/>
           <a:p>
-            <a:pPr rtl="1" algn="r" indent="0" marL="0">
+            <a:pPr marL="0" indent="0" algn="r" rtl="1">
               <a:buNone/>
             </a:pPr>
             <a:r>
@@ -10249,7 +10038,7 @@
           <a:bodyPr wrap="square" lIns="0" tIns="0" rIns="0" bIns="0" rtlCol="0" anchor="t"/>
           <a:lstStyle/>
           <a:p>
-            <a:pPr rtl="1" algn="r" indent="0" marL="0">
+            <a:pPr marL="0" indent="0" algn="r" rtl="1">
               <a:lnSpc>
                 <a:spcPts val="2000"/>
               </a:lnSpc>
@@ -10269,6 +10058,96 @@
             <a:endParaRPr lang="en-US" sz="1250" dirty="0"/>
           </a:p>
         </p:txBody>
+      </p:sp>
+      <p:sp>
+        <p:nvSpPr>
+          <p:cNvPr id="37" name="Shape 6">
+            <a:extLst>
+              <a:ext uri="{FF2B5EF4-FFF2-40B4-BE49-F238E27FC236}">
+                <a16:creationId xmlns:a16="http://schemas.microsoft.com/office/drawing/2014/main" id="{BF83C9F5-C58B-2495-08CE-D36A80128DAD}"/>
+              </a:ext>
+            </a:extLst>
+          </p:cNvPr>
+          <p:cNvSpPr/>
+          <p:nvPr/>
+        </p:nvSpPr>
+        <p:spPr>
+          <a:xfrm flipH="1">
+            <a:off x="7128595" y="2944368"/>
+            <a:ext cx="192024" cy="0"/>
+          </a:xfrm>
+          <a:prstGeom prst="line">
+            <a:avLst/>
+          </a:prstGeom>
+          <a:noFill/>
+          <a:ln w="25400">
+            <a:solidFill>
+              <a:srgbClr val="F5A623"/>
+            </a:solidFill>
+            <a:prstDash val="solid"/>
+            <a:tailEnd type="triangle"/>
+          </a:ln>
+        </p:spPr>
+      </p:sp>
+      <p:sp>
+        <p:nvSpPr>
+          <p:cNvPr id="39" name="Shape 6">
+            <a:extLst>
+              <a:ext uri="{FF2B5EF4-FFF2-40B4-BE49-F238E27FC236}">
+                <a16:creationId xmlns:a16="http://schemas.microsoft.com/office/drawing/2014/main" id="{53F1EFDF-3AF3-A7AC-B35F-D409152F7EB4}"/>
+              </a:ext>
+            </a:extLst>
+          </p:cNvPr>
+          <p:cNvSpPr/>
+          <p:nvPr/>
+        </p:nvSpPr>
+        <p:spPr>
+          <a:xfrm flipH="1">
+            <a:off x="4892040" y="2942336"/>
+            <a:ext cx="192024" cy="0"/>
+          </a:xfrm>
+          <a:prstGeom prst="line">
+            <a:avLst/>
+          </a:prstGeom>
+          <a:noFill/>
+          <a:ln w="25400">
+            <a:solidFill>
+              <a:srgbClr val="F5A623"/>
+            </a:solidFill>
+            <a:prstDash val="solid"/>
+            <a:tailEnd type="triangle"/>
+          </a:ln>
+        </p:spPr>
+      </p:sp>
+      <p:sp>
+        <p:nvSpPr>
+          <p:cNvPr id="41" name="Shape 6">
+            <a:extLst>
+              <a:ext uri="{FF2B5EF4-FFF2-40B4-BE49-F238E27FC236}">
+                <a16:creationId xmlns:a16="http://schemas.microsoft.com/office/drawing/2014/main" id="{AA243FA8-B610-F841-0A33-DBFD56EF7E9F}"/>
+              </a:ext>
+            </a:extLst>
+          </p:cNvPr>
+          <p:cNvSpPr/>
+          <p:nvPr/>
+        </p:nvSpPr>
+        <p:spPr>
+          <a:xfrm flipH="1">
+            <a:off x="2596896" y="2944368"/>
+            <a:ext cx="192024" cy="0"/>
+          </a:xfrm>
+          <a:prstGeom prst="line">
+            <a:avLst/>
+          </a:prstGeom>
+          <a:noFill/>
+          <a:ln w="25400">
+            <a:solidFill>
+              <a:srgbClr val="F5A623"/>
+            </a:solidFill>
+            <a:prstDash val="solid"/>
+            <a:tailEnd type="triangle"/>
+          </a:ln>
+        </p:spPr>
       </p:sp>
     </p:spTree>
   </p:cSld>
@@ -10286,6 +10165,7 @@
         <a:solidFill>
           <a:srgbClr val="FFFFFF"/>
         </a:solidFill>
+        <a:effectLst/>
       </p:bgPr>
     </p:bg>
     <p:spTree>
@@ -10323,11 +10203,11 @@
           <a:bodyPr wrap="square" rtlCol="0" anchor="t"/>
           <a:lstStyle/>
           <a:p>
-            <a:pPr rtl="1" algn="r" indent="0" marL="0">
-              <a:buNone/>
-            </a:pPr>
-            <a:r>
-              <a:rPr lang="en-US" sz="1200" b="1" spc="100" kern="0" dirty="0">
+            <a:pPr marL="0" indent="0" algn="r" rtl="1">
+              <a:buNone/>
+            </a:pPr>
+            <a:r>
+              <a:rPr lang="en-US" sz="1200" b="1" kern="0" spc="100" dirty="0">
                 <a:solidFill>
                   <a:srgbClr val="F5A623"/>
                 </a:solidFill>
@@ -10362,7 +10242,7 @@
           <a:bodyPr wrap="square" rtlCol="0" anchor="t"/>
           <a:lstStyle/>
           <a:p>
-            <a:pPr rtl="1" algn="r" indent="0" marL="0">
+            <a:pPr marL="0" indent="0" algn="r" rtl="1">
               <a:buNone/>
             </a:pPr>
             <a:r>
@@ -10406,7 +10286,7 @@
             <a:prstDash val="solid"/>
           </a:ln>
           <a:effectLst>
-            <a:outerShdw sx="100000" sy="100000" kx="0" ky="0" algn="bl" rotWithShape="0" blurRad="101600" dist="25400" dir="5400000">
+            <a:outerShdw blurRad="101600" dist="25400" dir="5400000" algn="bl" rotWithShape="0">
               <a:srgbClr val="9AA9B5">
                 <a:alpha val="25000"/>
               </a:srgbClr>
@@ -10460,7 +10340,7 @@
           <a:bodyPr wrap="square" lIns="0" tIns="0" rIns="0" bIns="0" rtlCol="0" anchor="ctr"/>
           <a:lstStyle/>
           <a:p>
-            <a:pPr algn="ctr" indent="0" marL="0">
+            <a:pPr marL="0" indent="0" algn="ctr">
               <a:buNone/>
             </a:pPr>
             <a:r>
@@ -10499,7 +10379,7 @@
           <a:bodyPr wrap="square" lIns="0" tIns="0" rIns="0" bIns="0" rtlCol="0" anchor="t"/>
           <a:lstStyle/>
           <a:p>
-            <a:pPr rtl="1" algn="r" indent="0" marL="0">
+            <a:pPr marL="0" indent="0" algn="r" rtl="1">
               <a:buNone/>
             </a:pPr>
             <a:r>
@@ -10538,7 +10418,7 @@
           <a:bodyPr wrap="square" lIns="0" tIns="0" rIns="0" bIns="0" rtlCol="0" anchor="t"/>
           <a:lstStyle/>
           <a:p>
-            <a:pPr rtl="1" algn="r" indent="0" marL="0">
+            <a:pPr marL="0" indent="0" algn="r" rtl="1">
               <a:lnSpc>
                 <a:spcPts val="2000"/>
               </a:lnSpc>
@@ -10585,7 +10465,7 @@
             <a:prstDash val="solid"/>
           </a:ln>
           <a:effectLst>
-            <a:outerShdw sx="100000" sy="100000" kx="0" ky="0" algn="bl" rotWithShape="0" blurRad="101600" dist="25400" dir="5400000">
+            <a:outerShdw blurRad="101600" dist="25400" dir="5400000" algn="bl" rotWithShape="0">
               <a:srgbClr val="9AA9B5">
                 <a:alpha val="25000"/>
               </a:srgbClr>
@@ -10639,7 +10519,7 @@
           <a:bodyPr wrap="square" lIns="0" tIns="0" rIns="0" bIns="0" rtlCol="0" anchor="ctr"/>
           <a:lstStyle/>
           <a:p>
-            <a:pPr algn="ctr" indent="0" marL="0">
+            <a:pPr marL="0" indent="0" algn="ctr">
               <a:buNone/>
             </a:pPr>
             <a:r>
@@ -10678,7 +10558,7 @@
           <a:bodyPr wrap="square" lIns="0" tIns="0" rIns="0" bIns="0" rtlCol="0" anchor="t"/>
           <a:lstStyle/>
           <a:p>
-            <a:pPr rtl="1" algn="r" indent="0" marL="0">
+            <a:pPr marL="0" indent="0" algn="r" rtl="1">
               <a:buNone/>
             </a:pPr>
             <a:r>
@@ -10717,7 +10597,7 @@
           <a:bodyPr wrap="square" lIns="0" tIns="0" rIns="0" bIns="0" rtlCol="0" anchor="t"/>
           <a:lstStyle/>
           <a:p>
-            <a:pPr rtl="1" algn="r" indent="0" marL="0">
+            <a:pPr marL="0" indent="0" algn="r" rtl="1">
               <a:lnSpc>
                 <a:spcPts val="2000"/>
               </a:lnSpc>
@@ -10764,7 +10644,7 @@
             <a:prstDash val="solid"/>
           </a:ln>
           <a:effectLst>
-            <a:outerShdw sx="100000" sy="100000" kx="0" ky="0" algn="bl" rotWithShape="0" blurRad="101600" dist="25400" dir="5400000">
+            <a:outerShdw blurRad="101600" dist="25400" dir="5400000" algn="bl" rotWithShape="0">
               <a:srgbClr val="9AA9B5">
                 <a:alpha val="25000"/>
               </a:srgbClr>
@@ -10818,7 +10698,7 @@
           <a:bodyPr wrap="square" lIns="0" tIns="0" rIns="0" bIns="0" rtlCol="0" anchor="ctr"/>
           <a:lstStyle/>
           <a:p>
-            <a:pPr algn="ctr" indent="0" marL="0">
+            <a:pPr marL="0" indent="0" algn="ctr">
               <a:buNone/>
             </a:pPr>
             <a:r>
@@ -10857,7 +10737,7 @@
           <a:bodyPr wrap="square" lIns="0" tIns="0" rIns="0" bIns="0" rtlCol="0" anchor="t"/>
           <a:lstStyle/>
           <a:p>
-            <a:pPr rtl="1" algn="r" indent="0" marL="0">
+            <a:pPr marL="0" indent="0" algn="r" rtl="1">
               <a:buNone/>
             </a:pPr>
             <a:r>
@@ -10896,7 +10776,7 @@
           <a:bodyPr wrap="square" lIns="0" tIns="0" rIns="0" bIns="0" rtlCol="0" anchor="t"/>
           <a:lstStyle/>
           <a:p>
-            <a:pPr rtl="1" algn="r" indent="0" marL="0">
+            <a:pPr marL="0" indent="0" algn="r" rtl="1">
               <a:lnSpc>
                 <a:spcPts val="2000"/>
               </a:lnSpc>
@@ -10943,7 +10823,7 @@
             <a:prstDash val="solid"/>
           </a:ln>
           <a:effectLst>
-            <a:outerShdw sx="100000" sy="100000" kx="0" ky="0" algn="bl" rotWithShape="0" blurRad="101600" dist="25400" dir="5400000">
+            <a:outerShdw blurRad="101600" dist="25400" dir="5400000" algn="bl" rotWithShape="0">
               <a:srgbClr val="9AA9B5">
                 <a:alpha val="25000"/>
               </a:srgbClr>
@@ -10997,7 +10877,7 @@
           <a:bodyPr wrap="square" lIns="0" tIns="0" rIns="0" bIns="0" rtlCol="0" anchor="ctr"/>
           <a:lstStyle/>
           <a:p>
-            <a:pPr algn="ctr" indent="0" marL="0">
+            <a:pPr marL="0" indent="0" algn="ctr">
               <a:buNone/>
             </a:pPr>
             <a:r>
@@ -11036,7 +10916,7 @@
           <a:bodyPr wrap="square" lIns="0" tIns="0" rIns="0" bIns="0" rtlCol="0" anchor="t"/>
           <a:lstStyle/>
           <a:p>
-            <a:pPr rtl="1" algn="r" indent="0" marL="0">
+            <a:pPr marL="0" indent="0" algn="r" rtl="1">
               <a:buNone/>
             </a:pPr>
             <a:r>
@@ -11075,7 +10955,7 @@
           <a:bodyPr wrap="square" lIns="0" tIns="0" rIns="0" bIns="0" rtlCol="0" anchor="t"/>
           <a:lstStyle/>
           <a:p>
-            <a:pPr rtl="1" algn="r" indent="0" marL="0">
+            <a:pPr marL="0" indent="0" algn="r" rtl="1">
               <a:lnSpc>
                 <a:spcPts val="2000"/>
               </a:lnSpc>
@@ -11144,7 +11024,7 @@
           <a:bodyPr wrap="square" lIns="0" tIns="0" rIns="0" bIns="0" rtlCol="0" anchor="ctr"/>
           <a:lstStyle/>
           <a:p>
-            <a:pPr algn="ctr" indent="0" marL="0">
+            <a:pPr marL="0" indent="0" algn="ctr">
               <a:buNone/>
             </a:pPr>
             <a:r>
@@ -11183,7 +11063,7 @@
           <a:bodyPr wrap="square" lIns="0" tIns="0" rIns="0" bIns="0" rtlCol="0" anchor="ctr"/>
           <a:lstStyle/>
           <a:p>
-            <a:pPr rtl="1" algn="r" indent="0" marL="0">
+            <a:pPr marL="0" indent="0" algn="r" rtl="1">
               <a:buNone/>
             </a:pPr>
             <a:r>
@@ -11249,7 +11129,7 @@
           <a:bodyPr wrap="square" lIns="0" tIns="0" rIns="0" bIns="0" rtlCol="0" anchor="ctr"/>
           <a:lstStyle/>
           <a:p>
-            <a:pPr algn="ctr" indent="0" marL="0">
+            <a:pPr marL="0" indent="0" algn="ctr">
               <a:buNone/>
             </a:pPr>
             <a:r>
@@ -11288,7 +11168,7 @@
           <a:bodyPr wrap="square" lIns="0" tIns="0" rIns="0" bIns="0" rtlCol="0" anchor="ctr"/>
           <a:lstStyle/>
           <a:p>
-            <a:pPr rtl="1" algn="r" indent="0" marL="0">
+            <a:pPr marL="0" indent="0" algn="r" rtl="1">
               <a:buNone/>
             </a:pPr>
             <a:r>
@@ -11354,7 +11234,7 @@
           <a:bodyPr wrap="square" lIns="0" tIns="0" rIns="0" bIns="0" rtlCol="0" anchor="ctr"/>
           <a:lstStyle/>
           <a:p>
-            <a:pPr algn="ctr" indent="0" marL="0">
+            <a:pPr marL="0" indent="0" algn="ctr">
               <a:buNone/>
             </a:pPr>
             <a:r>
@@ -11393,7 +11273,7 @@
           <a:bodyPr wrap="square" lIns="0" tIns="0" rIns="0" bIns="0" rtlCol="0" anchor="ctr"/>
           <a:lstStyle/>
           <a:p>
-            <a:pPr rtl="1" algn="r" indent="0" marL="0">
+            <a:pPr marL="0" indent="0" algn="r" rtl="1">
               <a:buNone/>
             </a:pPr>
             <a:r>
@@ -11427,6 +11307,7 @@
         <a:solidFill>
           <a:srgbClr val="FFFFFF"/>
         </a:solidFill>
+        <a:effectLst/>
       </p:bgPr>
     </p:bg>
     <p:spTree>
@@ -11464,11 +11345,11 @@
           <a:bodyPr wrap="square" rtlCol="0" anchor="t"/>
           <a:lstStyle/>
           <a:p>
-            <a:pPr rtl="1" algn="r" indent="0" marL="0">
-              <a:buNone/>
-            </a:pPr>
-            <a:r>
-              <a:rPr lang="en-US" sz="1200" b="1" spc="100" kern="0" dirty="0">
+            <a:pPr marL="0" indent="0" algn="r" rtl="1">
+              <a:buNone/>
+            </a:pPr>
+            <a:r>
+              <a:rPr lang="en-US" sz="1200" b="1" kern="0" spc="100" dirty="0">
                 <a:solidFill>
                   <a:srgbClr val="F5A623"/>
                 </a:solidFill>
@@ -11503,7 +11384,7 @@
           <a:bodyPr wrap="square" rtlCol="0" anchor="t"/>
           <a:lstStyle/>
           <a:p>
-            <a:pPr rtl="1" algn="r" indent="0" marL="0">
+            <a:pPr marL="0" indent="0" algn="r" rtl="1">
               <a:buNone/>
             </a:pPr>
             <a:r>
@@ -11547,7 +11428,7 @@
             <a:prstDash val="solid"/>
           </a:ln>
           <a:effectLst>
-            <a:outerShdw sx="100000" sy="100000" kx="0" ky="0" algn="bl" rotWithShape="0" blurRad="127000" dist="38100" dir="5400000">
+            <a:outerShdw blurRad="127000" dist="38100" dir="5400000" algn="bl" rotWithShape="0">
               <a:srgbClr val="8A99A6">
                 <a:alpha val="35000"/>
               </a:srgbClr>
@@ -11557,14 +11438,14 @@
       </p:sp>
       <p:pic>
         <p:nvPicPr>
-          <p:cNvPr id="5" name="Image 0" descr="Z:\Users\12orb\AppData\Local\Temp\claude\Z--Users-12orb-Desktop-Rupin-AiProjectSpamDetection-EndOfYearCarProject\bc12164c-9673-4caf-a51e-0823e450bec0\scratchpad\shots_trimmed\03-live.png">    </p:cNvPr>
+          <p:cNvPr id="5" name="Image 0" descr="Z:\Users\12orb\AppData\Local\Temp\claude\Z--Users-12orb-Desktop-Rupin-AiProjectSpamDetection-EndOfYearCarProject\bc12164c-9673-4caf-a51e-0823e450bec0\scratchpad\shots_trimmed\03-live.png"/>
           <p:cNvPicPr>
             <a:picLocks noChangeAspect="1"/>
           </p:cNvPicPr>
           <p:nvPr/>
         </p:nvPicPr>
         <p:blipFill>
-          <a:blip r:embed="rId1"/>
+          <a:blip r:embed="rId3"/>
           <a:stretch>
             <a:fillRect/>
           </a:stretch>
@@ -11600,7 +11481,7 @@
           <a:bodyPr wrap="square" lIns="0" tIns="0" rIns="0" bIns="0" rtlCol="0" anchor="t"/>
           <a:lstStyle/>
           <a:p>
-            <a:pPr rtl="1" algn="ctr" indent="0" marL="0">
+            <a:pPr marL="0" indent="0" algn="ctr" rtl="1">
               <a:buNone/>
             </a:pPr>
             <a:r>
@@ -11639,7 +11520,7 @@
           <a:bodyPr wrap="square" lIns="0" tIns="0" rIns="0" bIns="0" rtlCol="0" anchor="t"/>
           <a:lstStyle/>
           <a:p>
-            <a:pPr rtl="1" algn="ctr" indent="0" marL="0">
+            <a:pPr marL="0" indent="0" algn="ctr" rtl="1">
               <a:lnSpc>
                 <a:spcPts val="1600"/>
               </a:lnSpc>
@@ -11686,7 +11567,7 @@
             <a:prstDash val="solid"/>
           </a:ln>
           <a:effectLst>
-            <a:outerShdw sx="100000" sy="100000" kx="0" ky="0" algn="bl" rotWithShape="0" blurRad="127000" dist="38100" dir="5400000">
+            <a:outerShdw blurRad="127000" dist="38100" dir="5400000" algn="bl" rotWithShape="0">
               <a:srgbClr val="8A99A6">
                 <a:alpha val="35000"/>
               </a:srgbClr>
@@ -11696,14 +11577,14 @@
       </p:sp>
       <p:pic>
         <p:nvPicPr>
-          <p:cNvPr id="9" name="Image 1" descr="Z:\Users\12orb\AppData\Local\Temp\claude\Z--Users-12orb-Desktop-Rupin-AiProjectSpamDetection-EndOfYearCarProject\bc12164c-9673-4caf-a51e-0823e450bec0\scratchpad\shots_trimmed\06-scan-faults.png">    </p:cNvPr>
+          <p:cNvPr id="9" name="Image 1" descr="Z:\Users\12orb\AppData\Local\Temp\claude\Z--Users-12orb-Desktop-Rupin-AiProjectSpamDetection-EndOfYearCarProject\bc12164c-9673-4caf-a51e-0823e450bec0\scratchpad\shots_trimmed\06-scan-faults.png"/>
           <p:cNvPicPr>
             <a:picLocks noChangeAspect="1"/>
           </p:cNvPicPr>
           <p:nvPr/>
         </p:nvPicPr>
         <p:blipFill>
-          <a:blip r:embed="rId2"/>
+          <a:blip r:embed="rId4"/>
           <a:stretch>
             <a:fillRect/>
           </a:stretch>
@@ -11739,7 +11620,7 @@
           <a:bodyPr wrap="square" lIns="0" tIns="0" rIns="0" bIns="0" rtlCol="0" anchor="t"/>
           <a:lstStyle/>
           <a:p>
-            <a:pPr rtl="1" algn="ctr" indent="0" marL="0">
+            <a:pPr marL="0" indent="0" algn="ctr" rtl="1">
               <a:buNone/>
             </a:pPr>
             <a:r>
@@ -11778,7 +11659,7 @@
           <a:bodyPr wrap="square" lIns="0" tIns="0" rIns="0" bIns="0" rtlCol="0" anchor="t"/>
           <a:lstStyle/>
           <a:p>
-            <a:pPr rtl="1" algn="ctr" indent="0" marL="0">
+            <a:pPr marL="0" indent="0" algn="ctr" rtl="1">
               <a:lnSpc>
                 <a:spcPts val="1600"/>
               </a:lnSpc>
@@ -11825,7 +11706,7 @@
             <a:prstDash val="solid"/>
           </a:ln>
           <a:effectLst>
-            <a:outerShdw sx="100000" sy="100000" kx="0" ky="0" algn="bl" rotWithShape="0" blurRad="127000" dist="38100" dir="5400000">
+            <a:outerShdw blurRad="127000" dist="38100" dir="5400000" algn="bl" rotWithShape="0">
               <a:srgbClr val="8A99A6">
                 <a:alpha val="35000"/>
               </a:srgbClr>
@@ -11835,14 +11716,14 @@
       </p:sp>
       <p:pic>
         <p:nvPicPr>
-          <p:cNvPr id="13" name="Image 2" descr="Z:\Users\12orb\AppData\Local\Temp\claude\Z--Users-12orb-Desktop-Rupin-AiProjectSpamDetection-EndOfYearCarProject\bc12164c-9673-4caf-a51e-0823e450bec0\scratchpad\shots_trimmed\08-fault-detail.png">    </p:cNvPr>
+          <p:cNvPr id="13" name="Image 2" descr="Z:\Users\12orb\AppData\Local\Temp\claude\Z--Users-12orb-Desktop-Rupin-AiProjectSpamDetection-EndOfYearCarProject\bc12164c-9673-4caf-a51e-0823e450bec0\scratchpad\shots_trimmed\08-fault-detail.png"/>
           <p:cNvPicPr>
             <a:picLocks noChangeAspect="1"/>
           </p:cNvPicPr>
           <p:nvPr/>
         </p:nvPicPr>
         <p:blipFill>
-          <a:blip r:embed="rId3"/>
+          <a:blip r:embed="rId5"/>
           <a:stretch>
             <a:fillRect/>
           </a:stretch>
@@ -11878,7 +11759,7 @@
           <a:bodyPr wrap="square" lIns="0" tIns="0" rIns="0" bIns="0" rtlCol="0" anchor="t"/>
           <a:lstStyle/>
           <a:p>
-            <a:pPr rtl="1" algn="ctr" indent="0" marL="0">
+            <a:pPr marL="0" indent="0" algn="ctr" rtl="1">
               <a:buNone/>
             </a:pPr>
             <a:r>
@@ -11917,7 +11798,7 @@
           <a:bodyPr wrap="square" lIns="0" tIns="0" rIns="0" bIns="0" rtlCol="0" anchor="t"/>
           <a:lstStyle/>
           <a:p>
-            <a:pPr rtl="1" algn="ctr" indent="0" marL="0">
+            <a:pPr marL="0" indent="0" algn="ctr" rtl="1">
               <a:lnSpc>
                 <a:spcPts val="1600"/>
               </a:lnSpc>
@@ -11959,7 +11840,7 @@
           <a:bodyPr wrap="square" rtlCol="0" anchor="t"/>
           <a:lstStyle/>
           <a:p>
-            <a:pPr rtl="1" algn="r" indent="0" marL="0">
+            <a:pPr marL="0" indent="0" algn="r" rtl="1">
               <a:buNone/>
             </a:pPr>
             <a:r>
@@ -11993,6 +11874,7 @@
         <a:solidFill>
           <a:srgbClr val="FFFFFF"/>
         </a:solidFill>
+        <a:effectLst/>
       </p:bgPr>
     </p:bg>
     <p:spTree>
@@ -12030,11 +11912,11 @@
           <a:bodyPr wrap="square" rtlCol="0" anchor="t"/>
           <a:lstStyle/>
           <a:p>
-            <a:pPr rtl="1" algn="r" indent="0" marL="0">
-              <a:buNone/>
-            </a:pPr>
-            <a:r>
-              <a:rPr lang="en-US" sz="1200" b="1" spc="100" kern="0" dirty="0">
+            <a:pPr marL="0" indent="0" algn="r" rtl="1">
+              <a:buNone/>
+            </a:pPr>
+            <a:r>
+              <a:rPr lang="en-US" sz="1200" b="1" kern="0" spc="100" dirty="0">
                 <a:solidFill>
                   <a:srgbClr val="F5A623"/>
                 </a:solidFill>
@@ -12069,7 +11951,7 @@
           <a:bodyPr wrap="square" rtlCol="0" anchor="t"/>
           <a:lstStyle/>
           <a:p>
-            <a:pPr rtl="1" algn="r" indent="0" marL="0">
+            <a:pPr marL="0" indent="0" algn="r" rtl="1">
               <a:buNone/>
             </a:pPr>
             <a:r>
@@ -12108,7 +11990,7 @@
           <a:bodyPr wrap="square" lIns="0" tIns="0" rIns="0" bIns="0" rtlCol="0" anchor="t"/>
           <a:lstStyle/>
           <a:p>
-            <a:pPr rtl="1" algn="r" indent="0" marL="0">
+            <a:pPr marL="0" indent="0" algn="r" rtl="1">
               <a:buNone/>
             </a:pPr>
             <a:r>
@@ -12152,7 +12034,7 @@
             <a:prstDash val="solid"/>
           </a:ln>
           <a:effectLst>
-            <a:outerShdw sx="100000" sy="100000" kx="0" ky="0" algn="bl" rotWithShape="0" blurRad="101600" dist="25400" dir="5400000">
+            <a:outerShdw blurRad="101600" dist="25400" dir="5400000" algn="bl" rotWithShape="0">
               <a:srgbClr val="9AA9B5">
                 <a:alpha val="25000"/>
               </a:srgbClr>
@@ -12181,7 +12063,7 @@
           <a:bodyPr wrap="square" lIns="0" tIns="0" rIns="0" bIns="0" rtlCol="0" anchor="t"/>
           <a:lstStyle/>
           <a:p>
-            <a:pPr rtl="1" algn="r" indent="0" marL="0">
+            <a:pPr marL="0" indent="0" algn="r" rtl="1">
               <a:buNone/>
             </a:pPr>
             <a:r>
@@ -12220,7 +12102,7 @@
           <a:bodyPr wrap="square" lIns="0" tIns="0" rIns="0" bIns="0" rtlCol="0" anchor="t"/>
           <a:lstStyle/>
           <a:p>
-            <a:pPr rtl="1" algn="r" indent="0" marL="0">
+            <a:pPr marL="0" indent="0" algn="r" rtl="1">
               <a:lnSpc>
                 <a:spcPts val="2000"/>
               </a:lnSpc>
@@ -12267,7 +12149,7 @@
             <a:prstDash val="solid"/>
           </a:ln>
           <a:effectLst>
-            <a:outerShdw sx="100000" sy="100000" kx="0" ky="0" algn="bl" rotWithShape="0" blurRad="101600" dist="25400" dir="5400000">
+            <a:outerShdw blurRad="101600" dist="25400" dir="5400000" algn="bl" rotWithShape="0">
               <a:srgbClr val="9AA9B5">
                 <a:alpha val="25000"/>
               </a:srgbClr>
@@ -12296,7 +12178,7 @@
           <a:bodyPr wrap="square" lIns="0" tIns="0" rIns="0" bIns="0" rtlCol="0" anchor="t"/>
           <a:lstStyle/>
           <a:p>
-            <a:pPr rtl="1" algn="r" indent="0" marL="0">
+            <a:pPr marL="0" indent="0" algn="r" rtl="1">
               <a:buNone/>
             </a:pPr>
             <a:r>
@@ -12335,7 +12217,7 @@
           <a:bodyPr wrap="square" lIns="0" tIns="0" rIns="0" bIns="0" rtlCol="0" anchor="t"/>
           <a:lstStyle/>
           <a:p>
-            <a:pPr rtl="1" algn="r" indent="0" marL="0">
+            <a:pPr marL="0" indent="0" algn="r" rtl="1">
               <a:lnSpc>
                 <a:spcPts val="2000"/>
               </a:lnSpc>
@@ -12382,7 +12264,7 @@
             <a:prstDash val="solid"/>
           </a:ln>
           <a:effectLst>
-            <a:outerShdw sx="100000" sy="100000" kx="0" ky="0" algn="bl" rotWithShape="0" blurRad="101600" dist="25400" dir="5400000">
+            <a:outerShdw blurRad="101600" dist="25400" dir="5400000" algn="bl" rotWithShape="0">
               <a:srgbClr val="9AA9B5">
                 <a:alpha val="25000"/>
               </a:srgbClr>
@@ -12411,7 +12293,7 @@
           <a:bodyPr wrap="square" lIns="0" tIns="0" rIns="0" bIns="0" rtlCol="0" anchor="t"/>
           <a:lstStyle/>
           <a:p>
-            <a:pPr rtl="1" algn="r" indent="0" marL="0">
+            <a:pPr marL="0" indent="0" algn="r" rtl="1">
               <a:buNone/>
             </a:pPr>
             <a:r>
@@ -12450,7 +12332,7 @@
           <a:bodyPr wrap="square" lIns="0" tIns="0" rIns="0" bIns="0" rtlCol="0" anchor="t"/>
           <a:lstStyle/>
           <a:p>
-            <a:pPr rtl="1" algn="r" indent="0" marL="0">
+            <a:pPr marL="0" indent="0" algn="r" rtl="1">
               <a:lnSpc>
                 <a:spcPts val="2000"/>
               </a:lnSpc>
@@ -12492,7 +12374,7 @@
           <a:bodyPr wrap="square" lIns="0" tIns="0" rIns="0" bIns="0" rtlCol="0" anchor="t"/>
           <a:lstStyle/>
           <a:p>
-            <a:pPr rtl="1" algn="r" indent="0" marL="0">
+            <a:pPr marL="0" indent="0" algn="r" rtl="1">
               <a:buNone/>
             </a:pPr>
             <a:r>
@@ -12536,7 +12418,7 @@
             <a:prstDash val="solid"/>
           </a:ln>
           <a:effectLst>
-            <a:outerShdw sx="100000" sy="100000" kx="0" ky="0" algn="bl" rotWithShape="0" blurRad="101600" dist="25400" dir="5400000">
+            <a:outerShdw blurRad="101600" dist="25400" dir="5400000" algn="bl" rotWithShape="0">
               <a:srgbClr val="9AA9B5">
                 <a:alpha val="25000"/>
               </a:srgbClr>
@@ -12565,7 +12447,7 @@
           <a:bodyPr wrap="square" lIns="0" tIns="0" rIns="0" bIns="0" rtlCol="0" anchor="t"/>
           <a:lstStyle/>
           <a:p>
-            <a:pPr rtl="1" algn="r" indent="0" marL="0">
+            <a:pPr marL="0" indent="0" algn="r" rtl="1">
               <a:buNone/>
             </a:pPr>
             <a:r>
@@ -12604,7 +12486,7 @@
           <a:bodyPr wrap="square" lIns="0" tIns="0" rIns="0" bIns="0" rtlCol="0" anchor="t"/>
           <a:lstStyle/>
           <a:p>
-            <a:pPr rtl="1" algn="r" indent="0" marL="0">
+            <a:pPr marL="0" indent="0" algn="r" rtl="1">
               <a:lnSpc>
                 <a:spcPts val="2000"/>
               </a:lnSpc>
@@ -12651,7 +12533,7 @@
             <a:prstDash val="solid"/>
           </a:ln>
           <a:effectLst>
-            <a:outerShdw sx="100000" sy="100000" kx="0" ky="0" algn="bl" rotWithShape="0" blurRad="101600" dist="25400" dir="5400000">
+            <a:outerShdw blurRad="101600" dist="25400" dir="5400000" algn="bl" rotWithShape="0">
               <a:srgbClr val="9AA9B5">
                 <a:alpha val="25000"/>
               </a:srgbClr>
@@ -12680,7 +12562,7 @@
           <a:bodyPr wrap="square" lIns="0" tIns="0" rIns="0" bIns="0" rtlCol="0" anchor="t"/>
           <a:lstStyle/>
           <a:p>
-            <a:pPr rtl="1" algn="r" indent="0" marL="0">
+            <a:pPr marL="0" indent="0" algn="r" rtl="1">
               <a:buNone/>
             </a:pPr>
             <a:r>
@@ -12719,7 +12601,7 @@
           <a:bodyPr wrap="square" lIns="0" tIns="0" rIns="0" bIns="0" rtlCol="0" anchor="t"/>
           <a:lstStyle/>
           <a:p>
-            <a:pPr rtl="1" algn="r" indent="0" marL="0">
+            <a:pPr marL="0" indent="0" algn="r" rtl="1">
               <a:lnSpc>
                 <a:spcPts val="2000"/>
               </a:lnSpc>
@@ -12766,7 +12648,7 @@
             <a:prstDash val="solid"/>
           </a:ln>
           <a:effectLst>
-            <a:outerShdw sx="100000" sy="100000" kx="0" ky="0" algn="bl" rotWithShape="0" blurRad="101600" dist="25400" dir="5400000">
+            <a:outerShdw blurRad="101600" dist="25400" dir="5400000" algn="bl" rotWithShape="0">
               <a:srgbClr val="9AA9B5">
                 <a:alpha val="25000"/>
               </a:srgbClr>
@@ -12795,7 +12677,7 @@
           <a:bodyPr wrap="square" lIns="0" tIns="0" rIns="0" bIns="0" rtlCol="0" anchor="t"/>
           <a:lstStyle/>
           <a:p>
-            <a:pPr rtl="1" algn="r" indent="0" marL="0">
+            <a:pPr marL="0" indent="0" algn="r" rtl="1">
               <a:buNone/>
             </a:pPr>
             <a:r>
@@ -12834,7 +12716,7 @@
           <a:bodyPr wrap="square" lIns="0" tIns="0" rIns="0" bIns="0" rtlCol="0" anchor="t"/>
           <a:lstStyle/>
           <a:p>
-            <a:pPr rtl="1" algn="r" indent="0" marL="0">
+            <a:pPr marL="0" indent="0" algn="r" rtl="1">
               <a:lnSpc>
                 <a:spcPts val="2000"/>
               </a:lnSpc>
@@ -12876,7 +12758,7 @@
           <a:bodyPr wrap="square" rtlCol="0" anchor="t"/>
           <a:lstStyle/>
           <a:p>
-            <a:pPr rtl="1" algn="r" indent="0" marL="0">
+            <a:pPr marL="0" indent="0" algn="r" rtl="1">
               <a:buNone/>
             </a:pPr>
             <a:r>
@@ -12910,6 +12792,7 @@
         <a:solidFill>
           <a:srgbClr val="FFFFFF"/>
         </a:solidFill>
+        <a:effectLst/>
       </p:bgPr>
     </p:bg>
     <p:spTree>
@@ -12947,11 +12830,11 @@
           <a:bodyPr wrap="square" rtlCol="0" anchor="t"/>
           <a:lstStyle/>
           <a:p>
-            <a:pPr rtl="1" algn="r" indent="0" marL="0">
-              <a:buNone/>
-            </a:pPr>
-            <a:r>
-              <a:rPr lang="en-US" sz="1200" b="1" spc="100" kern="0" dirty="0">
+            <a:pPr marL="0" indent="0" algn="r" rtl="1">
+              <a:buNone/>
+            </a:pPr>
+            <a:r>
+              <a:rPr lang="en-US" sz="1200" b="1" kern="0" spc="100" dirty="0">
                 <a:solidFill>
                   <a:srgbClr val="F5A623"/>
                 </a:solidFill>
@@ -12986,7 +12869,7 @@
           <a:bodyPr wrap="square" rtlCol="0" anchor="t"/>
           <a:lstStyle/>
           <a:p>
-            <a:pPr rtl="1" algn="r" indent="0" marL="0">
+            <a:pPr marL="0" indent="0" algn="r" rtl="1">
               <a:buNone/>
             </a:pPr>
             <a:r>
@@ -13030,7 +12913,7 @@
             <a:prstDash val="solid"/>
           </a:ln>
           <a:effectLst>
-            <a:outerShdw sx="100000" sy="100000" kx="0" ky="0" algn="bl" rotWithShape="0" blurRad="127000" dist="38100" dir="5400000">
+            <a:outerShdw blurRad="127000" dist="38100" dir="5400000" algn="bl" rotWithShape="0">
               <a:srgbClr val="8A99A6">
                 <a:alpha val="35000"/>
               </a:srgbClr>
@@ -13040,14 +12923,14 @@
       </p:sp>
       <p:pic>
         <p:nvPicPr>
-          <p:cNvPr id="5" name="Image 0" descr="Z:\Users\12orb\AppData\Local\Temp\claude\Z--Users-12orb-Desktop-Rupin-AiProjectSpamDetection-EndOfYearCarProject\bc12164c-9673-4caf-a51e-0823e450bec0\scratchpad\shots_trimmed\01-garage.png">    </p:cNvPr>
+          <p:cNvPr id="5" name="Image 0" descr="Z:\Users\12orb\AppData\Local\Temp\claude\Z--Users-12orb-Desktop-Rupin-AiProjectSpamDetection-EndOfYearCarProject\bc12164c-9673-4caf-a51e-0823e450bec0\scratchpad\shots_trimmed\01-garage.png"/>
           <p:cNvPicPr>
             <a:picLocks noChangeAspect="1"/>
           </p:cNvPicPr>
           <p:nvPr/>
         </p:nvPicPr>
         <p:blipFill>
-          <a:blip r:embed="rId1"/>
+          <a:blip r:embed="rId3"/>
           <a:stretch>
             <a:fillRect/>
           </a:stretch>
@@ -13083,7 +12966,7 @@
           <a:bodyPr wrap="square" lIns="0" tIns="0" rIns="0" bIns="0" rtlCol="0" anchor="t"/>
           <a:lstStyle/>
           <a:p>
-            <a:pPr rtl="1" algn="ctr" indent="0" marL="0">
+            <a:pPr marL="0" indent="0" algn="ctr" rtl="1">
               <a:buNone/>
             </a:pPr>
             <a:r>
@@ -13122,7 +13005,7 @@
           <a:bodyPr wrap="square" lIns="0" tIns="0" rIns="0" bIns="0" rtlCol="0" anchor="t"/>
           <a:lstStyle/>
           <a:p>
-            <a:pPr rtl="1" algn="ctr" indent="0" marL="0">
+            <a:pPr marL="0" indent="0" algn="ctr" rtl="1">
               <a:lnSpc>
                 <a:spcPts val="1600"/>
               </a:lnSpc>
@@ -13169,7 +13052,7 @@
             <a:prstDash val="solid"/>
           </a:ln>
           <a:effectLst>
-            <a:outerShdw sx="100000" sy="100000" kx="0" ky="0" algn="bl" rotWithShape="0" blurRad="127000" dist="38100" dir="5400000">
+            <a:outerShdw blurRad="127000" dist="38100" dir="5400000" algn="bl" rotWithShape="0">
               <a:srgbClr val="8A99A6">
                 <a:alpha val="35000"/>
               </a:srgbClr>
@@ -13179,14 +13062,14 @@
       </p:sp>
       <p:pic>
         <p:nvPicPr>
-          <p:cNvPr id="9" name="Image 1" descr="Z:\Users\12orb\AppData\Local\Temp\claude\Z--Users-12orb-Desktop-Rupin-AiProjectSpamDetection-EndOfYearCarProject\bc12164c-9673-4caf-a51e-0823e450bec0\scratchpad\shots_trimmed\09-fuel.png">    </p:cNvPr>
+          <p:cNvPr id="9" name="Image 1" descr="Z:\Users\12orb\AppData\Local\Temp\claude\Z--Users-12orb-Desktop-Rupin-AiProjectSpamDetection-EndOfYearCarProject\bc12164c-9673-4caf-a51e-0823e450bec0\scratchpad\shots_trimmed\09-fuel.png"/>
           <p:cNvPicPr>
             <a:picLocks noChangeAspect="1"/>
           </p:cNvPicPr>
           <p:nvPr/>
         </p:nvPicPr>
         <p:blipFill>
-          <a:blip r:embed="rId2"/>
+          <a:blip r:embed="rId4"/>
           <a:stretch>
             <a:fillRect/>
           </a:stretch>
@@ -13222,7 +13105,7 @@
           <a:bodyPr wrap="square" lIns="0" tIns="0" rIns="0" bIns="0" rtlCol="0" anchor="t"/>
           <a:lstStyle/>
           <a:p>
-            <a:pPr rtl="1" algn="ctr" indent="0" marL="0">
+            <a:pPr marL="0" indent="0" algn="ctr" rtl="1">
               <a:buNone/>
             </a:pPr>
             <a:r>
@@ -13261,7 +13144,7 @@
           <a:bodyPr wrap="square" lIns="0" tIns="0" rIns="0" bIns="0" rtlCol="0" anchor="t"/>
           <a:lstStyle/>
           <a:p>
-            <a:pPr rtl="1" algn="ctr" indent="0" marL="0">
+            <a:pPr marL="0" indent="0" algn="ctr" rtl="1">
               <a:lnSpc>
                 <a:spcPts val="1600"/>
               </a:lnSpc>
@@ -13308,7 +13191,7 @@
             <a:prstDash val="solid"/>
           </a:ln>
           <a:effectLst>
-            <a:outerShdw sx="100000" sy="100000" kx="0" ky="0" algn="bl" rotWithShape="0" blurRad="127000" dist="38100" dir="5400000">
+            <a:outerShdw blurRad="127000" dist="38100" dir="5400000" algn="bl" rotWithShape="0">
               <a:srgbClr val="8A99A6">
                 <a:alpha val="35000"/>
               </a:srgbClr>
@@ -13318,14 +13201,14 @@
       </p:sp>
       <p:pic>
         <p:nvPicPr>
-          <p:cNvPr id="13" name="Image 2" descr="Z:\Users\12orb\AppData\Local\Temp\claude\Z--Users-12orb-Desktop-Rupin-AiProjectSpamDetection-EndOfYearCarProject\bc12164c-9673-4caf-a51e-0823e450bec0\scratchpad\shots_trimmed\13-trip.png">    </p:cNvPr>
+          <p:cNvPr id="13" name="Image 2" descr="Z:\Users\12orb\AppData\Local\Temp\claude\Z--Users-12orb-Desktop-Rupin-AiProjectSpamDetection-EndOfYearCarProject\bc12164c-9673-4caf-a51e-0823e450bec0\scratchpad\shots_trimmed\13-trip.png"/>
           <p:cNvPicPr>
             <a:picLocks noChangeAspect="1"/>
           </p:cNvPicPr>
           <p:nvPr/>
         </p:nvPicPr>
         <p:blipFill>
-          <a:blip r:embed="rId3"/>
+          <a:blip r:embed="rId5"/>
           <a:stretch>
             <a:fillRect/>
           </a:stretch>
@@ -13361,7 +13244,7 @@
           <a:bodyPr wrap="square" lIns="0" tIns="0" rIns="0" bIns="0" rtlCol="0" anchor="t"/>
           <a:lstStyle/>
           <a:p>
-            <a:pPr rtl="1" algn="ctr" indent="0" marL="0">
+            <a:pPr marL="0" indent="0" algn="ctr" rtl="1">
               <a:buNone/>
             </a:pPr>
             <a:r>
@@ -13400,7 +13283,7 @@
           <a:bodyPr wrap="square" lIns="0" tIns="0" rIns="0" bIns="0" rtlCol="0" anchor="t"/>
           <a:lstStyle/>
           <a:p>
-            <a:pPr rtl="1" algn="ctr" indent="0" marL="0">
+            <a:pPr marL="0" indent="0" algn="ctr" rtl="1">
               <a:lnSpc>
                 <a:spcPts val="1600"/>
               </a:lnSpc>
@@ -13437,6 +13320,7 @@
         <a:solidFill>
           <a:srgbClr val="FFFFFF"/>
         </a:solidFill>
+        <a:effectLst/>
       </p:bgPr>
     </p:bg>
     <p:spTree>
@@ -13474,11 +13358,11 @@
           <a:bodyPr wrap="square" rtlCol="0" anchor="t"/>
           <a:lstStyle/>
           <a:p>
-            <a:pPr rtl="1" algn="r" indent="0" marL="0">
-              <a:buNone/>
-            </a:pPr>
-            <a:r>
-              <a:rPr lang="en-US" sz="1200" b="1" spc="100" kern="0" dirty="0">
+            <a:pPr marL="0" indent="0" algn="r" rtl="1">
+              <a:buNone/>
+            </a:pPr>
+            <a:r>
+              <a:rPr lang="en-US" sz="1200" b="1" kern="0" spc="100" dirty="0">
                 <a:solidFill>
                   <a:srgbClr val="F5A623"/>
                 </a:solidFill>
@@ -13513,7 +13397,7 @@
           <a:bodyPr wrap="square" rtlCol="0" anchor="t"/>
           <a:lstStyle/>
           <a:p>
-            <a:pPr rtl="1" algn="r" indent="0" marL="0">
+            <a:pPr marL="0" indent="0" algn="r" rtl="1">
               <a:buNone/>
             </a:pPr>
             <a:r>
@@ -13557,7 +13441,7 @@
             <a:prstDash val="solid"/>
           </a:ln>
           <a:effectLst>
-            <a:outerShdw sx="100000" sy="100000" kx="0" ky="0" algn="bl" rotWithShape="0" blurRad="101600" dist="25400" dir="5400000">
+            <a:outerShdw blurRad="101600" dist="25400" dir="5400000" algn="bl" rotWithShape="0">
               <a:srgbClr val="9AA9B5">
                 <a:alpha val="25000"/>
               </a:srgbClr>
@@ -13611,7 +13495,7 @@
           <a:bodyPr wrap="square" lIns="0" tIns="0" rIns="0" bIns="0" rtlCol="0" anchor="ctr"/>
           <a:lstStyle/>
           <a:p>
-            <a:pPr algn="ctr" indent="0" marL="0">
+            <a:pPr marL="0" indent="0" algn="ctr">
               <a:buNone/>
             </a:pPr>
             <a:r>
@@ -13650,7 +13534,7 @@
           <a:bodyPr wrap="square" lIns="0" tIns="0" rIns="0" bIns="0" rtlCol="0" anchor="t"/>
           <a:lstStyle/>
           <a:p>
-            <a:pPr rtl="1" algn="r" indent="0" marL="0">
+            <a:pPr marL="0" indent="0" algn="r" rtl="1">
               <a:buNone/>
             </a:pPr>
             <a:r>
@@ -13689,7 +13573,7 @@
           <a:bodyPr wrap="square" lIns="0" tIns="0" rIns="0" bIns="0" rtlCol="0" anchor="t"/>
           <a:lstStyle/>
           <a:p>
-            <a:pPr rtl="1" algn="r" indent="0" marL="0">
+            <a:pPr marL="0" indent="0" algn="r" rtl="1">
               <a:lnSpc>
                 <a:spcPts val="2600"/>
               </a:lnSpc>
@@ -13709,7 +13593,7 @@
             <a:endParaRPr lang="en-US" sz="1350" dirty="0"/>
           </a:p>
           <a:p>
-            <a:pPr rtl="1" algn="r" indent="0" marL="0">
+            <a:pPr marL="0" indent="0" algn="r" rtl="1">
               <a:lnSpc>
                 <a:spcPts val="2600"/>
               </a:lnSpc>
@@ -13729,7 +13613,7 @@
             <a:endParaRPr lang="en-US" sz="1350" dirty="0"/>
           </a:p>
           <a:p>
-            <a:pPr rtl="1" algn="r" indent="0" marL="0">
+            <a:pPr marL="0" indent="0" algn="r" rtl="1">
               <a:lnSpc>
                 <a:spcPts val="2600"/>
               </a:lnSpc>
@@ -13749,7 +13633,7 @@
             <a:endParaRPr lang="en-US" sz="1350" dirty="0"/>
           </a:p>
           <a:p>
-            <a:pPr rtl="1" algn="r" indent="0" marL="0">
+            <a:pPr marL="0" indent="0" algn="r" rtl="1">
               <a:lnSpc>
                 <a:spcPts val="2600"/>
               </a:lnSpc>
@@ -13796,7 +13680,7 @@
             <a:prstDash val="solid"/>
           </a:ln>
           <a:effectLst>
-            <a:outerShdw sx="100000" sy="100000" kx="0" ky="0" algn="bl" rotWithShape="0" blurRad="101600" dist="25400" dir="5400000">
+            <a:outerShdw blurRad="101600" dist="25400" dir="5400000" algn="bl" rotWithShape="0">
               <a:srgbClr val="9AA9B5">
                 <a:alpha val="25000"/>
               </a:srgbClr>
@@ -13850,7 +13734,7 @@
           <a:bodyPr wrap="square" lIns="0" tIns="0" rIns="0" bIns="0" rtlCol="0" anchor="ctr"/>
           <a:lstStyle/>
           <a:p>
-            <a:pPr algn="ctr" indent="0" marL="0">
+            <a:pPr marL="0" indent="0" algn="ctr">
               <a:buNone/>
             </a:pPr>
             <a:r>
@@ -13889,7 +13773,7 @@
           <a:bodyPr wrap="square" lIns="0" tIns="0" rIns="0" bIns="0" rtlCol="0" anchor="t"/>
           <a:lstStyle/>
           <a:p>
-            <a:pPr rtl="1" algn="r" indent="0" marL="0">
+            <a:pPr marL="0" indent="0" algn="r" rtl="1">
               <a:buNone/>
             </a:pPr>
             <a:r>
@@ -13928,7 +13812,7 @@
           <a:bodyPr wrap="square" lIns="0" tIns="0" rIns="0" bIns="0" rtlCol="0" anchor="t"/>
           <a:lstStyle/>
           <a:p>
-            <a:pPr rtl="1" algn="r" indent="0" marL="0">
+            <a:pPr marL="0" indent="0" algn="r" rtl="1">
               <a:lnSpc>
                 <a:spcPts val="2600"/>
               </a:lnSpc>
@@ -13948,7 +13832,7 @@
             <a:endParaRPr lang="en-US" sz="1350" dirty="0"/>
           </a:p>
           <a:p>
-            <a:pPr rtl="1" algn="r" indent="0" marL="0">
+            <a:pPr marL="0" indent="0" algn="r" rtl="1">
               <a:lnSpc>
                 <a:spcPts val="2600"/>
               </a:lnSpc>
@@ -13968,7 +13852,7 @@
             <a:endParaRPr lang="en-US" sz="1350" dirty="0"/>
           </a:p>
           <a:p>
-            <a:pPr rtl="1" algn="r" indent="0" marL="0">
+            <a:pPr marL="0" indent="0" algn="r" rtl="1">
               <a:lnSpc>
                 <a:spcPts val="2600"/>
               </a:lnSpc>
@@ -13988,7 +13872,7 @@
             <a:endParaRPr lang="en-US" sz="1350" dirty="0"/>
           </a:p>
           <a:p>
-            <a:pPr rtl="1" algn="r" indent="0" marL="0">
+            <a:pPr marL="0" indent="0" algn="r" rtl="1">
               <a:lnSpc>
                 <a:spcPts val="2600"/>
               </a:lnSpc>
@@ -14035,7 +13919,7 @@
             <a:prstDash val="solid"/>
           </a:ln>
           <a:effectLst>
-            <a:outerShdw sx="100000" sy="100000" kx="0" ky="0" algn="bl" rotWithShape="0" blurRad="101600" dist="25400" dir="5400000">
+            <a:outerShdw blurRad="101600" dist="25400" dir="5400000" algn="bl" rotWithShape="0">
               <a:srgbClr val="9AA9B5">
                 <a:alpha val="25000"/>
               </a:srgbClr>
@@ -14064,7 +13948,7 @@
           <a:bodyPr wrap="square" lIns="0" tIns="0" rIns="0" bIns="0" rtlCol="0" anchor="ctr"/>
           <a:lstStyle/>
           <a:p>
-            <a:pPr rtl="1" algn="r" indent="0" marL="0">
+            <a:pPr marL="0" indent="0" algn="r" rtl="1">
               <a:buNone/>
             </a:pPr>
             <a:r>
@@ -14383,4 +14267,299 @@
     </a:ext>
   </a:extLst>
 </a:theme>
+</file>
+
+<file path=ppt/theme/theme2.xml><?xml version="1.0" encoding="utf-8"?>
+<a:theme xmlns:a="http://schemas.openxmlformats.org/drawingml/2006/main" name="ערכת נושא Office">
+  <a:themeElements>
+    <a:clrScheme name="Office">
+      <a:dk1>
+        <a:sysClr val="windowText" lastClr="000000"/>
+      </a:dk1>
+      <a:lt1>
+        <a:sysClr val="window" lastClr="FFFFFF"/>
+      </a:lt1>
+      <a:dk2>
+        <a:srgbClr val="44546A"/>
+      </a:dk2>
+      <a:lt2>
+        <a:srgbClr val="E7E6E6"/>
+      </a:lt2>
+      <a:accent1>
+        <a:srgbClr val="4472C4"/>
+      </a:accent1>
+      <a:accent2>
+        <a:srgbClr val="ED7D31"/>
+      </a:accent2>
+      <a:accent3>
+        <a:srgbClr val="A5A5A5"/>
+      </a:accent3>
+      <a:accent4>
+        <a:srgbClr val="FFC000"/>
+      </a:accent4>
+      <a:accent5>
+        <a:srgbClr val="5B9BD5"/>
+      </a:accent5>
+      <a:accent6>
+        <a:srgbClr val="70AD47"/>
+      </a:accent6>
+      <a:hlink>
+        <a:srgbClr val="0563C1"/>
+      </a:hlink>
+      <a:folHlink>
+        <a:srgbClr val="954F72"/>
+      </a:folHlink>
+    </a:clrScheme>
+    <a:fontScheme name="Office">
+      <a:majorFont>
+        <a:latin typeface="Calibri Light" panose="020F0302020204030204"/>
+        <a:ea typeface=""/>
+        <a:cs typeface=""/>
+        <a:font script="Jpan" typeface="游ゴシック Light"/>
+        <a:font script="Hang" typeface="맑은 고딕"/>
+        <a:font script="Hans" typeface="等线 Light"/>
+        <a:font script="Hant" typeface="新細明體"/>
+        <a:font script="Arab" typeface="Times New Roman"/>
+        <a:font script="Hebr" typeface="Times New Roman"/>
+        <a:font script="Thai" typeface="Angsana New"/>
+        <a:font script="Ethi" typeface="Nyala"/>
+        <a:font script="Beng" typeface="Vrinda"/>
+        <a:font script="Gujr" typeface="Shruti"/>
+        <a:font script="Khmr" typeface="MoolBoran"/>
+        <a:font script="Knda" typeface="Tunga"/>
+        <a:font script="Guru" typeface="Raavi"/>
+        <a:font script="Cans" typeface="Euphemia"/>
+        <a:font script="Cher" typeface="Plantagenet Cherokee"/>
+        <a:font script="Yiii" typeface="Microsoft Yi Baiti"/>
+        <a:font script="Tibt" typeface="Microsoft Himalaya"/>
+        <a:font script="Thaa" typeface="MV Boli"/>
+        <a:font script="Deva" typeface="Mangal"/>
+        <a:font script="Telu" typeface="Gautami"/>
+        <a:font script="Taml" typeface="Latha"/>
+        <a:font script="Syrc" typeface="Estrangelo Edessa"/>
+        <a:font script="Orya" typeface="Kalinga"/>
+        <a:font script="Mlym" typeface="Kartika"/>
+        <a:font script="Laoo" typeface="DokChampa"/>
+        <a:font script="Sinh" typeface="Iskoola Pota"/>
+        <a:font script="Mong" typeface="Mongolian Baiti"/>
+        <a:font script="Viet" typeface="Times New Roman"/>
+        <a:font script="Uigh" typeface="Microsoft Uighur"/>
+        <a:font script="Geor" typeface="Sylfaen"/>
+        <a:font script="Armn" typeface="Arial"/>
+        <a:font script="Bugi" typeface="Leelawadee UI"/>
+        <a:font script="Bopo" typeface="Microsoft JhengHei"/>
+        <a:font script="Java" typeface="Javanese Text"/>
+        <a:font script="Lisu" typeface="Segoe UI"/>
+        <a:font script="Mymr" typeface="Myanmar Text"/>
+        <a:font script="Nkoo" typeface="Ebrima"/>
+        <a:font script="Olck" typeface="Nirmala UI"/>
+        <a:font script="Osma" typeface="Ebrima"/>
+        <a:font script="Phag" typeface="Phagspa"/>
+        <a:font script="Syrn" typeface="Estrangelo Edessa"/>
+        <a:font script="Syrj" typeface="Estrangelo Edessa"/>
+        <a:font script="Syre" typeface="Estrangelo Edessa"/>
+        <a:font script="Sora" typeface="Nirmala UI"/>
+        <a:font script="Tale" typeface="Microsoft Tai Le"/>
+        <a:font script="Talu" typeface="Microsoft New Tai Lue"/>
+        <a:font script="Tfng" typeface="Ebrima"/>
+      </a:majorFont>
+      <a:minorFont>
+        <a:latin typeface="Calibri" panose="020F0502020204030204"/>
+        <a:ea typeface=""/>
+        <a:cs typeface=""/>
+        <a:font script="Jpan" typeface="游ゴシック"/>
+        <a:font script="Hang" typeface="맑은 고딕"/>
+        <a:font script="Hans" typeface="等线"/>
+        <a:font script="Hant" typeface="新細明體"/>
+        <a:font script="Arab" typeface="Arial"/>
+        <a:font script="Hebr" typeface="Arial"/>
+        <a:font script="Thai" typeface="Cordia New"/>
+        <a:font script="Ethi" typeface="Nyala"/>
+        <a:font script="Beng" typeface="Vrinda"/>
+        <a:font script="Gujr" typeface="Shruti"/>
+        <a:font script="Khmr" typeface="DaunPenh"/>
+        <a:font script="Knda" typeface="Tunga"/>
+        <a:font script="Guru" typeface="Raavi"/>
+        <a:font script="Cans" typeface="Euphemia"/>
+        <a:font script="Cher" typeface="Plantagenet Cherokee"/>
+        <a:font script="Yiii" typeface="Microsoft Yi Baiti"/>
+        <a:font script="Tibt" typeface="Microsoft Himalaya"/>
+        <a:font script="Thaa" typeface="MV Boli"/>
+        <a:font script="Deva" typeface="Mangal"/>
+        <a:font script="Telu" typeface="Gautami"/>
+        <a:font script="Taml" typeface="Latha"/>
+        <a:font script="Syrc" typeface="Estrangelo Edessa"/>
+        <a:font script="Orya" typeface="Kalinga"/>
+        <a:font script="Mlym" typeface="Kartika"/>
+        <a:font script="Laoo" typeface="DokChampa"/>
+        <a:font script="Sinh" typeface="Iskoola Pota"/>
+        <a:font script="Mong" typeface="Mongolian Baiti"/>
+        <a:font script="Viet" typeface="Arial"/>
+        <a:font script="Uigh" typeface="Microsoft Uighur"/>
+        <a:font script="Geor" typeface="Sylfaen"/>
+        <a:font script="Armn" typeface="Arial"/>
+        <a:font script="Bugi" typeface="Leelawadee UI"/>
+        <a:font script="Bopo" typeface="Microsoft JhengHei"/>
+        <a:font script="Java" typeface="Javanese Text"/>
+        <a:font script="Lisu" typeface="Segoe UI"/>
+        <a:font script="Mymr" typeface="Myanmar Text"/>
+        <a:font script="Nkoo" typeface="Ebrima"/>
+        <a:font script="Olck" typeface="Nirmala UI"/>
+        <a:font script="Osma" typeface="Ebrima"/>
+        <a:font script="Phag" typeface="Phagspa"/>
+        <a:font script="Syrn" typeface="Estrangelo Edessa"/>
+        <a:font script="Syrj" typeface="Estrangelo Edessa"/>
+        <a:font script="Syre" typeface="Estrangelo Edessa"/>
+        <a:font script="Sora" typeface="Nirmala UI"/>
+        <a:font script="Tale" typeface="Microsoft Tai Le"/>
+        <a:font script="Talu" typeface="Microsoft New Tai Lue"/>
+        <a:font script="Tfng" typeface="Ebrima"/>
+      </a:minorFont>
+    </a:fontScheme>
+    <a:fmtScheme name="Office">
+      <a:fillStyleLst>
+        <a:solidFill>
+          <a:schemeClr val="phClr"/>
+        </a:solidFill>
+        <a:gradFill rotWithShape="1">
+          <a:gsLst>
+            <a:gs pos="0">
+              <a:schemeClr val="phClr">
+                <a:lumMod val="110000"/>
+                <a:satMod val="105000"/>
+                <a:tint val="67000"/>
+              </a:schemeClr>
+            </a:gs>
+            <a:gs pos="50000">
+              <a:schemeClr val="phClr">
+                <a:lumMod val="105000"/>
+                <a:satMod val="103000"/>
+                <a:tint val="73000"/>
+              </a:schemeClr>
+            </a:gs>
+            <a:gs pos="100000">
+              <a:schemeClr val="phClr">
+                <a:lumMod val="105000"/>
+                <a:satMod val="109000"/>
+                <a:tint val="81000"/>
+              </a:schemeClr>
+            </a:gs>
+          </a:gsLst>
+          <a:lin ang="5400000" scaled="0"/>
+        </a:gradFill>
+        <a:gradFill rotWithShape="1">
+          <a:gsLst>
+            <a:gs pos="0">
+              <a:schemeClr val="phClr">
+                <a:satMod val="103000"/>
+                <a:lumMod val="102000"/>
+                <a:tint val="94000"/>
+              </a:schemeClr>
+            </a:gs>
+            <a:gs pos="50000">
+              <a:schemeClr val="phClr">
+                <a:satMod val="110000"/>
+                <a:lumMod val="100000"/>
+                <a:shade val="100000"/>
+              </a:schemeClr>
+            </a:gs>
+            <a:gs pos="100000">
+              <a:schemeClr val="phClr">
+                <a:lumMod val="99000"/>
+                <a:satMod val="120000"/>
+                <a:shade val="78000"/>
+              </a:schemeClr>
+            </a:gs>
+          </a:gsLst>
+          <a:lin ang="5400000" scaled="0"/>
+        </a:gradFill>
+      </a:fillStyleLst>
+      <a:lnStyleLst>
+        <a:ln w="6350" cap="flat" cmpd="sng" algn="ctr">
+          <a:solidFill>
+            <a:schemeClr val="phClr"/>
+          </a:solidFill>
+          <a:prstDash val="solid"/>
+          <a:miter lim="800000"/>
+        </a:ln>
+        <a:ln w="12700" cap="flat" cmpd="sng" algn="ctr">
+          <a:solidFill>
+            <a:schemeClr val="phClr"/>
+          </a:solidFill>
+          <a:prstDash val="solid"/>
+          <a:miter lim="800000"/>
+        </a:ln>
+        <a:ln w="19050" cap="flat" cmpd="sng" algn="ctr">
+          <a:solidFill>
+            <a:schemeClr val="phClr"/>
+          </a:solidFill>
+          <a:prstDash val="solid"/>
+          <a:miter lim="800000"/>
+        </a:ln>
+      </a:lnStyleLst>
+      <a:effectStyleLst>
+        <a:effectStyle>
+          <a:effectLst/>
+        </a:effectStyle>
+        <a:effectStyle>
+          <a:effectLst/>
+        </a:effectStyle>
+        <a:effectStyle>
+          <a:effectLst>
+            <a:outerShdw blurRad="57150" dist="19050" dir="5400000" algn="ctr" rotWithShape="0">
+              <a:srgbClr val="000000">
+                <a:alpha val="63000"/>
+              </a:srgbClr>
+            </a:outerShdw>
+          </a:effectLst>
+        </a:effectStyle>
+      </a:effectStyleLst>
+      <a:bgFillStyleLst>
+        <a:solidFill>
+          <a:schemeClr val="phClr"/>
+        </a:solidFill>
+        <a:solidFill>
+          <a:schemeClr val="phClr">
+            <a:tint val="95000"/>
+            <a:satMod val="170000"/>
+          </a:schemeClr>
+        </a:solidFill>
+        <a:gradFill rotWithShape="1">
+          <a:gsLst>
+            <a:gs pos="0">
+              <a:schemeClr val="phClr">
+                <a:tint val="93000"/>
+                <a:satMod val="150000"/>
+                <a:shade val="98000"/>
+                <a:lumMod val="102000"/>
+              </a:schemeClr>
+            </a:gs>
+            <a:gs pos="50000">
+              <a:schemeClr val="phClr">
+                <a:tint val="98000"/>
+                <a:satMod val="130000"/>
+                <a:shade val="90000"/>
+                <a:lumMod val="103000"/>
+              </a:schemeClr>
+            </a:gs>
+            <a:gs pos="100000">
+              <a:schemeClr val="phClr">
+                <a:shade val="63000"/>
+                <a:satMod val="120000"/>
+              </a:schemeClr>
+            </a:gs>
+          </a:gsLst>
+          <a:lin ang="5400000" scaled="0"/>
+        </a:gradFill>
+      </a:bgFillStyleLst>
+    </a:fmtScheme>
+  </a:themeElements>
+  <a:objectDefaults/>
+  <a:extraClrSchemeLst/>
+  <a:extLst>
+    <a:ext uri="{05A4C25C-085E-4340-85A3-A5531E510DB2}">
+      <thm15:themeFamily xmlns:thm15="http://schemas.microsoft.com/office/thememl/2012/main" name="Office Theme" id="{62F939B6-93AF-4DB8-9C6B-D6C7DFDC589F}" vid="{4A3C46E8-61CC-4603-A589-7422A47A8E4A}"/>
+    </a:ext>
+  </a:extLst>
+</a:theme>
 </file>
--- a/CarStats-Presentation.pptx
+++ b/CarStats-Presentation.pptx
@@ -5,7 +5,7 @@
     <p:sldMasterId id="2147483648" r:id="rId1"/>
   </p:sldMasterIdLst>
   <p:notesMasterIdLst>
-    <p:notesMasterId r:id="rId18"/>
+    <p:notesMasterId r:id="rId15"/>
   </p:notesMasterIdLst>
   <p:sldIdLst>
     <p:sldId id="256" r:id="rId2"/>
@@ -18,12 +18,9 @@
     <p:sldId id="263" r:id="rId9"/>
     <p:sldId id="264" r:id="rId10"/>
     <p:sldId id="265" r:id="rId11"/>
-    <p:sldId id="266" r:id="rId12"/>
-    <p:sldId id="267" r:id="rId13"/>
-    <p:sldId id="268" r:id="rId14"/>
-    <p:sldId id="269" r:id="rId15"/>
-    <p:sldId id="270" r:id="rId16"/>
-    <p:sldId id="271" r:id="rId17"/>
+    <p:sldId id="267" r:id="rId12"/>
+    <p:sldId id="270" r:id="rId13"/>
+    <p:sldId id="271" r:id="rId14"/>
   </p:sldIdLst>
   <p:sldSz cx="12192000" cy="6858000"/>
   <p:notesSz cx="6858000" cy="12192000"/>
@@ -125,294 +122,6 @@
     </p:ext>
   </p:extLst>
 </p:presentation>
-</file>
-
-<file path=ppt/charts/chart1.xml><?xml version="1.0" encoding="utf-8"?>
-<c:chartSpace xmlns:c="http://schemas.openxmlformats.org/drawingml/2006/chart" xmlns:a="http://schemas.openxmlformats.org/drawingml/2006/main" xmlns:r="http://schemas.openxmlformats.org/officeDocument/2006/relationships" xmlns:c16r2="http://schemas.microsoft.com/office/drawing/2015/06/chart">
-  <c:date1904 val="0"/>
-  <c:lang val="he-IL"/>
-  <c:roundedCorners val="1"/>
-  <c:style val="2"/>
-  <c:chart>
-    <c:title>
-      <c:tx>
-        <c:rich>
-          <a:bodyPr/>
-          <a:lstStyle/>
-          <a:p>
-            <a:pPr>
-              <a:defRPr sz="1400" b="0" i="0" u="none" strike="noStrike">
-                <a:solidFill>
-                  <a:srgbClr val="16222E"/>
-                </a:solidFill>
-                <a:latin typeface="Arial"/>
-              </a:defRPr>
-            </a:pPr>
-            <a:r>
-              <a:rPr lang="he-IL" sz="1400" b="0" i="0" u="none" strike="noStrike">
-                <a:solidFill>
-                  <a:srgbClr val="16222E"/>
-                </a:solidFill>
-                <a:latin typeface="Arial"/>
-              </a:rPr>
-              <a:t>מספר בדיקות לכל חבילה</a:t>
-            </a:r>
-          </a:p>
-        </c:rich>
-      </c:tx>
-      <c:overlay val="0"/>
-    </c:title>
-    <c:autoTitleDeleted val="0"/>
-    <c:plotArea>
-      <c:layout/>
-      <c:barChart>
-        <c:barDir val="bar"/>
-        <c:grouping val="clustered"/>
-        <c:varyColors val="0"/>
-        <c:ser>
-          <c:idx val="0"/>
-          <c:order val="0"/>
-          <c:tx>
-            <c:strRef>
-              <c:f>Sheet1!$B$1</c:f>
-              <c:strCache>
-                <c:ptCount val="1"/>
-                <c:pt idx="0">
-                  <c:v>בדיקות</c:v>
-                </c:pt>
-              </c:strCache>
-            </c:strRef>
-          </c:tx>
-          <c:spPr>
-            <a:solidFill>
-              <a:srgbClr val="F5A623"/>
-            </a:solidFill>
-            <a:effectLst/>
-          </c:spPr>
-          <c:invertIfNegative val="0"/>
-          <c:dLbls>
-            <c:numFmt formatCode="#,##0" sourceLinked="0"/>
-            <c:spPr>
-              <a:noFill/>
-              <a:ln>
-                <a:noFill/>
-              </a:ln>
-              <a:effectLst/>
-            </c:spPr>
-            <c:txPr>
-              <a:bodyPr/>
-              <a:lstStyle/>
-              <a:p>
-                <a:pPr>
-                  <a:defRPr sz="1100" b="0" i="0" u="none" strike="noStrike">
-                    <a:solidFill>
-                      <a:srgbClr val="16222E"/>
-                    </a:solidFill>
-                    <a:latin typeface="Arial"/>
-                  </a:defRPr>
-                </a:pPr>
-                <a:endParaRPr lang="he-IL"/>
-              </a:p>
-            </c:txPr>
-            <c:showLegendKey val="0"/>
-            <c:showVal val="1"/>
-            <c:showCatName val="0"/>
-            <c:showSerName val="0"/>
-            <c:showPercent val="0"/>
-            <c:showBubbleSize val="0"/>
-            <c:showLeaderLines val="0"/>
-            <c:extLst>
-              <c:ext xmlns:c15="http://schemas.microsoft.com/office/drawing/2012/chart" uri="{CE6537A1-D6FC-4f65-9D91-7224C49458BB}">
-                <c15:showLeaderLines val="0"/>
-              </c:ext>
-            </c:extLst>
-          </c:dLbls>
-          <c:cat>
-            <c:strRef>
-              <c:f>Sheet1!$A$2:$A$7</c:f>
-              <c:strCache>
-                <c:ptCount val="6"/>
-                <c:pt idx="0">
-                  <c:v>routeErrorMessage</c:v>
-                </c:pt>
-                <c:pt idx="1">
-                  <c:v>vindecode</c:v>
-                </c:pt>
-                <c:pt idx="2">
-                  <c:v>password</c:v>
-                </c:pt>
-                <c:pt idx="3">
-                  <c:v>fueleconomy</c:v>
-                </c:pt>
-                <c:pt idx="4">
-                  <c:v>severity</c:v>
-                </c:pt>
-                <c:pt idx="5">
-                  <c:v>fuel</c:v>
-                </c:pt>
-              </c:strCache>
-            </c:strRef>
-          </c:cat>
-          <c:val>
-            <c:numRef>
-              <c:f>Sheet1!$B$2:$B$7</c:f>
-              <c:numCache>
-                <c:formatCode>General</c:formatCode>
-                <c:ptCount val="6"/>
-                <c:pt idx="0">
-                  <c:v>7</c:v>
-                </c:pt>
-                <c:pt idx="1">
-                  <c:v>7</c:v>
-                </c:pt>
-                <c:pt idx="2">
-                  <c:v>10</c:v>
-                </c:pt>
-                <c:pt idx="3">
-                  <c:v>11</c:v>
-                </c:pt>
-                <c:pt idx="4">
-                  <c:v>12</c:v>
-                </c:pt>
-                <c:pt idx="5">
-                  <c:v>35</c:v>
-                </c:pt>
-              </c:numCache>
-            </c:numRef>
-          </c:val>
-          <c:extLst>
-            <c:ext xmlns:c16="http://schemas.microsoft.com/office/drawing/2014/chart" uri="{C3380CC4-5D6E-409C-BE32-E72D297353CC}">
-              <c16:uniqueId val="{00000000-9486-4EAD-9854-54949AC4B6AA}"/>
-            </c:ext>
-          </c:extLst>
-        </c:ser>
-        <c:dLbls>
-          <c:showLegendKey val="0"/>
-          <c:showVal val="1"/>
-          <c:showCatName val="0"/>
-          <c:showSerName val="0"/>
-          <c:showPercent val="0"/>
-          <c:showBubbleSize val="0"/>
-        </c:dLbls>
-        <c:gapWidth val="55"/>
-        <c:axId val="2094734554"/>
-        <c:axId val="2094734552"/>
-      </c:barChart>
-      <c:catAx>
-        <c:axId val="2094734554"/>
-        <c:scaling>
-          <c:orientation val="minMax"/>
-        </c:scaling>
-        <c:delete val="0"/>
-        <c:axPos val="l"/>
-        <c:numFmt formatCode="General" sourceLinked="1"/>
-        <c:majorTickMark val="out"/>
-        <c:minorTickMark val="none"/>
-        <c:tickLblPos val="nextTo"/>
-        <c:spPr>
-          <a:ln w="12700" cap="flat">
-            <a:solidFill>
-              <a:srgbClr val="888888"/>
-            </a:solidFill>
-            <a:prstDash val="solid"/>
-            <a:round/>
-          </a:ln>
-        </c:spPr>
-        <c:txPr>
-          <a:bodyPr/>
-          <a:lstStyle/>
-          <a:p>
-            <a:pPr>
-              <a:defRPr sz="1100" b="0" i="0" u="none" strike="noStrike">
-                <a:solidFill>
-                  <a:srgbClr val="44566B"/>
-                </a:solidFill>
-                <a:latin typeface="Arial"/>
-              </a:defRPr>
-            </a:pPr>
-            <a:endParaRPr lang="en-US"/>
-          </a:p>
-        </c:txPr>
-        <c:crossAx val="2094734552"/>
-        <c:crosses val="autoZero"/>
-        <c:auto val="1"/>
-        <c:lblAlgn val="ctr"/>
-        <c:lblOffset val="100"/>
-        <c:noMultiLvlLbl val="1"/>
-      </c:catAx>
-      <c:valAx>
-        <c:axId val="2094734552"/>
-        <c:scaling>
-          <c:orientation val="minMax"/>
-        </c:scaling>
-        <c:delete val="0"/>
-        <c:axPos val="b"/>
-        <c:majorGridlines>
-          <c:spPr>
-            <a:ln w="12700" cap="flat">
-              <a:solidFill>
-                <a:srgbClr val="E3E9EE"/>
-              </a:solidFill>
-              <a:prstDash val="solid"/>
-              <a:round/>
-            </a:ln>
-          </c:spPr>
-        </c:majorGridlines>
-        <c:numFmt formatCode="General" sourceLinked="0"/>
-        <c:majorTickMark val="out"/>
-        <c:minorTickMark val="none"/>
-        <c:tickLblPos val="low"/>
-        <c:spPr>
-          <a:ln w="12700" cap="flat">
-            <a:solidFill>
-              <a:srgbClr val="888888"/>
-            </a:solidFill>
-            <a:prstDash val="solid"/>
-            <a:round/>
-          </a:ln>
-        </c:spPr>
-        <c:txPr>
-          <a:bodyPr/>
-          <a:lstStyle/>
-          <a:p>
-            <a:pPr>
-              <a:defRPr sz="1000" b="0" i="0" u="none" strike="noStrike">
-                <a:solidFill>
-                  <a:srgbClr val="6B7A88"/>
-                </a:solidFill>
-                <a:latin typeface="Arial"/>
-              </a:defRPr>
-            </a:pPr>
-            <a:endParaRPr lang="en-US"/>
-          </a:p>
-        </c:txPr>
-        <c:crossAx val="2094734554"/>
-        <c:crosses val="autoZero"/>
-        <c:crossBetween val="between"/>
-      </c:valAx>
-      <c:spPr>
-        <a:noFill/>
-        <a:ln>
-          <a:noFill/>
-        </a:ln>
-        <a:effectLst/>
-      </c:spPr>
-    </c:plotArea>
-    <c:plotVisOnly val="1"/>
-    <c:dispBlanksAs val="span"/>
-    <c:showDLblsOverMax val="1"/>
-  </c:chart>
-  <c:spPr>
-    <a:noFill/>
-    <a:ln>
-      <a:noFill/>
-    </a:ln>
-    <a:effectLst/>
-  </c:spPr>
-  <c:externalData r:id="rId1">
-    <c:autoUpdate val="0"/>
-  </c:externalData>
-</c:chartSpace>
 </file>
 
 <file path=ppt/notesMasters/notesMaster1.xml><?xml version="1.0" encoding="utf-8"?>
@@ -760,7 +469,7 @@
           <a:p>
             <a:r>
               <a:rPr lang="en-US" dirty="0"/>
-              <a:t>ארבע החלטות שמדגימות חשיבה הנדסית ולא רק כתיבת קוד.</a:t>
+              <a:t>פרטיות: הכתובת של המשתמש בכלל לא מגיעה לשרת.</a:t>
             </a:r>
           </a:p>
         </p:txBody>
@@ -847,7 +556,7 @@
           <a:p>
             <a:r>
               <a:rPr lang="en-US" dirty="0"/>
-              <a:t>פרטיות: הכתובת של המשתמש בכלל לא מגיעה לשרת.</a:t>
+              <a:t>להציג את המגבלות ביושר — זה מחזק את הפרויקט ולא מחליש אותו.</a:t>
             </a:r>
           </a:p>
         </p:txBody>
@@ -934,7 +643,7 @@
           <a:p>
             <a:r>
               <a:rPr lang="en-US" dirty="0"/>
-              <a:t>הרצה: npm test בתיקיית האפליקציה. שש חבילות, 82 בדיקות.</a:t>
+              <a:t>סיכום במספרים, ואז פתיחה לשאלות.</a:t>
             </a:r>
           </a:p>
         </p:txBody>
@@ -957,267 +666,6 @@
             <a:fld id="{F7021451-1387-4CA6-816F-3879F97B5CBC}" type="slidenum">
               <a:rPr lang="en-US"/>
               <a:t>13</a:t>
-            </a:fld>
-            <a:endParaRPr lang="en-US"/>
-          </a:p>
-        </p:txBody>
-      </p:sp>
-    </p:spTree>
-    <p:extLst>
-      <p:ext uri="{BB962C8B-B14F-4D97-AF65-F5344CB8AC3E}">
-        <p14:creationId xmlns:p14="http://schemas.microsoft.com/office/powerpoint/2010/main" val="1024086991"/>
-      </p:ext>
-    </p:extLst>
-  </p:cSld>
-  <p:clrMapOvr>
-    <a:masterClrMapping/>
-  </p:clrMapOvr>
-</p:notes>
-</file>
-
-<file path=ppt/notesSlides/notesSlide14.xml><?xml version="1.0" encoding="utf-8"?>
-<p:notes xmlns:a="http://schemas.openxmlformats.org/drawingml/2006/main" xmlns:r="http://schemas.openxmlformats.org/officeDocument/2006/relationships" xmlns:p="http://schemas.openxmlformats.org/presentationml/2006/main">
-  <p:cSld>
-    <p:spTree>
-      <p:nvGrpSpPr>
-        <p:cNvPr id="1" name=""/>
-        <p:cNvGrpSpPr/>
-        <p:nvPr/>
-      </p:nvGrpSpPr>
-      <p:grpSpPr>
-        <a:xfrm>
-          <a:off x="0" y="0"/>
-          <a:ext cx="0" cy="0"/>
-          <a:chOff x="0" y="0"/>
-          <a:chExt cx="0" cy="0"/>
-        </a:xfrm>
-      </p:grpSpPr>
-      <p:sp>
-        <p:nvSpPr>
-          <p:cNvPr id="2" name="Slide Image Placeholder 1"/>
-          <p:cNvSpPr>
-            <a:spLocks noGrp="1" noRot="1" noChangeAspect="1"/>
-          </p:cNvSpPr>
-          <p:nvPr>
-            <p:ph type="sldImg"/>
-          </p:nvPr>
-        </p:nvSpPr>
-        <p:spPr/>
-      </p:sp>
-      <p:sp>
-        <p:nvSpPr>
-          <p:cNvPr id="3" name="Notes Placeholder 2"/>
-          <p:cNvSpPr>
-            <a:spLocks noGrp="1"/>
-          </p:cNvSpPr>
-          <p:nvPr>
-            <p:ph type="body" idx="1"/>
-          </p:nvPr>
-        </p:nvSpPr>
-        <p:spPr/>
-        <p:txBody>
-          <a:bodyPr/>
-          <a:lstStyle/>
-          <a:p>
-            <a:r>
-              <a:rPr lang="en-US" dirty="0"/>
-              <a:t>החלוקה לפי שכבות, מהאפליקציה שהמשתמש רואה ועד הענן.</a:t>
-            </a:r>
-          </a:p>
-        </p:txBody>
-      </p:sp>
-      <p:sp>
-        <p:nvSpPr>
-          <p:cNvPr id="4" name="Slide Number Placeholder 3"/>
-          <p:cNvSpPr>
-            <a:spLocks noGrp="1"/>
-          </p:cNvSpPr>
-          <p:nvPr>
-            <p:ph type="sldNum" sz="quarter" idx="10"/>
-          </p:nvPr>
-        </p:nvSpPr>
-        <p:spPr/>
-        <p:txBody>
-          <a:bodyPr/>
-          <a:lstStyle/>
-          <a:p>
-            <a:fld id="{F7021451-1387-4CA6-816F-3879F97B5CBC}" type="slidenum">
-              <a:rPr lang="en-US"/>
-              <a:t>14</a:t>
-            </a:fld>
-            <a:endParaRPr lang="en-US"/>
-          </a:p>
-        </p:txBody>
-      </p:sp>
-    </p:spTree>
-    <p:extLst>
-      <p:ext uri="{BB962C8B-B14F-4D97-AF65-F5344CB8AC3E}">
-        <p14:creationId xmlns:p14="http://schemas.microsoft.com/office/powerpoint/2010/main" val="1024086991"/>
-      </p:ext>
-    </p:extLst>
-  </p:cSld>
-  <p:clrMapOvr>
-    <a:masterClrMapping/>
-  </p:clrMapOvr>
-</p:notes>
-</file>
-
-<file path=ppt/notesSlides/notesSlide15.xml><?xml version="1.0" encoding="utf-8"?>
-<p:notes xmlns:a="http://schemas.openxmlformats.org/drawingml/2006/main" xmlns:r="http://schemas.openxmlformats.org/officeDocument/2006/relationships" xmlns:p="http://schemas.openxmlformats.org/presentationml/2006/main">
-  <p:cSld>
-    <p:spTree>
-      <p:nvGrpSpPr>
-        <p:cNvPr id="1" name=""/>
-        <p:cNvGrpSpPr/>
-        <p:nvPr/>
-      </p:nvGrpSpPr>
-      <p:grpSpPr>
-        <a:xfrm>
-          <a:off x="0" y="0"/>
-          <a:ext cx="0" cy="0"/>
-          <a:chOff x="0" y="0"/>
-          <a:chExt cx="0" cy="0"/>
-        </a:xfrm>
-      </p:grpSpPr>
-      <p:sp>
-        <p:nvSpPr>
-          <p:cNvPr id="2" name="Slide Image Placeholder 1"/>
-          <p:cNvSpPr>
-            <a:spLocks noGrp="1" noRot="1" noChangeAspect="1"/>
-          </p:cNvSpPr>
-          <p:nvPr>
-            <p:ph type="sldImg"/>
-          </p:nvPr>
-        </p:nvSpPr>
-        <p:spPr/>
-      </p:sp>
-      <p:sp>
-        <p:nvSpPr>
-          <p:cNvPr id="3" name="Notes Placeholder 2"/>
-          <p:cNvSpPr>
-            <a:spLocks noGrp="1"/>
-          </p:cNvSpPr>
-          <p:nvPr>
-            <p:ph type="body" idx="1"/>
-          </p:nvPr>
-        </p:nvSpPr>
-        <p:spPr/>
-        <p:txBody>
-          <a:bodyPr/>
-          <a:lstStyle/>
-          <a:p>
-            <a:r>
-              <a:rPr lang="en-US" dirty="0"/>
-              <a:t>להציג את המגבלות ביושר — זה מחזק את הפרויקט ולא מחליש אותו.</a:t>
-            </a:r>
-          </a:p>
-        </p:txBody>
-      </p:sp>
-      <p:sp>
-        <p:nvSpPr>
-          <p:cNvPr id="4" name="Slide Number Placeholder 3"/>
-          <p:cNvSpPr>
-            <a:spLocks noGrp="1"/>
-          </p:cNvSpPr>
-          <p:nvPr>
-            <p:ph type="sldNum" sz="quarter" idx="10"/>
-          </p:nvPr>
-        </p:nvSpPr>
-        <p:spPr/>
-        <p:txBody>
-          <a:bodyPr/>
-          <a:lstStyle/>
-          <a:p>
-            <a:fld id="{F7021451-1387-4CA6-816F-3879F97B5CBC}" type="slidenum">
-              <a:rPr lang="en-US"/>
-              <a:t>15</a:t>
-            </a:fld>
-            <a:endParaRPr lang="en-US"/>
-          </a:p>
-        </p:txBody>
-      </p:sp>
-    </p:spTree>
-    <p:extLst>
-      <p:ext uri="{BB962C8B-B14F-4D97-AF65-F5344CB8AC3E}">
-        <p14:creationId xmlns:p14="http://schemas.microsoft.com/office/powerpoint/2010/main" val="1024086991"/>
-      </p:ext>
-    </p:extLst>
-  </p:cSld>
-  <p:clrMapOvr>
-    <a:masterClrMapping/>
-  </p:clrMapOvr>
-</p:notes>
-</file>
-
-<file path=ppt/notesSlides/notesSlide16.xml><?xml version="1.0" encoding="utf-8"?>
-<p:notes xmlns:a="http://schemas.openxmlformats.org/drawingml/2006/main" xmlns:r="http://schemas.openxmlformats.org/officeDocument/2006/relationships" xmlns:p="http://schemas.openxmlformats.org/presentationml/2006/main">
-  <p:cSld>
-    <p:spTree>
-      <p:nvGrpSpPr>
-        <p:cNvPr id="1" name=""/>
-        <p:cNvGrpSpPr/>
-        <p:nvPr/>
-      </p:nvGrpSpPr>
-      <p:grpSpPr>
-        <a:xfrm>
-          <a:off x="0" y="0"/>
-          <a:ext cx="0" cy="0"/>
-          <a:chOff x="0" y="0"/>
-          <a:chExt cx="0" cy="0"/>
-        </a:xfrm>
-      </p:grpSpPr>
-      <p:sp>
-        <p:nvSpPr>
-          <p:cNvPr id="2" name="Slide Image Placeholder 1"/>
-          <p:cNvSpPr>
-            <a:spLocks noGrp="1" noRot="1" noChangeAspect="1"/>
-          </p:cNvSpPr>
-          <p:nvPr>
-            <p:ph type="sldImg"/>
-          </p:nvPr>
-        </p:nvSpPr>
-        <p:spPr/>
-      </p:sp>
-      <p:sp>
-        <p:nvSpPr>
-          <p:cNvPr id="3" name="Notes Placeholder 2"/>
-          <p:cNvSpPr>
-            <a:spLocks noGrp="1"/>
-          </p:cNvSpPr>
-          <p:nvPr>
-            <p:ph type="body" idx="1"/>
-          </p:nvPr>
-        </p:nvSpPr>
-        <p:spPr/>
-        <p:txBody>
-          <a:bodyPr/>
-          <a:lstStyle/>
-          <a:p>
-            <a:r>
-              <a:rPr lang="en-US" dirty="0"/>
-              <a:t>סיכום במספרים, ואז פתיחה לשאלות.</a:t>
-            </a:r>
-          </a:p>
-        </p:txBody>
-      </p:sp>
-      <p:sp>
-        <p:nvSpPr>
-          <p:cNvPr id="4" name="Slide Number Placeholder 3"/>
-          <p:cNvSpPr>
-            <a:spLocks noGrp="1"/>
-          </p:cNvSpPr>
-          <p:nvPr>
-            <p:ph type="sldNum" sz="quarter" idx="10"/>
-          </p:nvPr>
-        </p:nvSpPr>
-        <p:spPr/>
-        <p:txBody>
-          <a:bodyPr/>
-          <a:lstStyle/>
-          <a:p>
-            <a:fld id="{F7021451-1387-4CA6-816F-3879F97B5CBC}" type="slidenum">
-              <a:rPr lang="en-US"/>
-              <a:t>16</a:t>
             </a:fld>
             <a:endParaRPr lang="en-US"/>
           </a:p>
@@ -2293,6 +1741,13 @@
             <a:prstDash val="solid"/>
           </a:ln>
         </p:spPr>
+        <p:txBody>
+          <a:bodyPr/>
+          <a:lstStyle/>
+          <a:p>
+            <a:endParaRPr lang="en-US"/>
+          </a:p>
+        </p:txBody>
       </p:sp>
       <p:sp>
         <p:nvSpPr>
@@ -2318,6 +1773,13 @@
             <a:prstDash val="solid"/>
           </a:ln>
         </p:spPr>
+        <p:txBody>
+          <a:bodyPr/>
+          <a:lstStyle/>
+          <a:p>
+            <a:endParaRPr lang="en-US"/>
+          </a:p>
+        </p:txBody>
       </p:sp>
       <p:sp>
         <p:nvSpPr>
@@ -2343,6 +1805,13 @@
             <a:prstDash val="solid"/>
           </a:ln>
         </p:spPr>
+        <p:txBody>
+          <a:bodyPr/>
+          <a:lstStyle/>
+          <a:p>
+            <a:endParaRPr lang="en-US"/>
+          </a:p>
+        </p:txBody>
       </p:sp>
       <p:sp>
         <p:nvSpPr>
@@ -2706,6 +2175,13 @@
             </a:outerShdw>
           </a:effectLst>
         </p:spPr>
+        <p:txBody>
+          <a:bodyPr/>
+          <a:lstStyle/>
+          <a:p>
+            <a:endParaRPr lang="en-US"/>
+          </a:p>
+        </p:txBody>
       </p:sp>
       <p:pic>
         <p:nvPicPr>
@@ -2845,6 +2321,13 @@
             </a:outerShdw>
           </a:effectLst>
         </p:spPr>
+        <p:txBody>
+          <a:bodyPr/>
+          <a:lstStyle/>
+          <a:p>
+            <a:endParaRPr lang="en-US"/>
+          </a:p>
+        </p:txBody>
       </p:sp>
       <p:pic>
         <p:nvPicPr>
@@ -2984,6 +2467,13 @@
             </a:outerShdw>
           </a:effectLst>
         </p:spPr>
+        <p:txBody>
+          <a:bodyPr/>
+          <a:lstStyle/>
+          <a:p>
+            <a:endParaRPr lang="en-US"/>
+          </a:p>
+        </p:txBody>
       </p:sp>
       <p:pic>
         <p:nvPicPr>
@@ -3099,733 +2589,6 @@
 </file>
 
 <file path=ppt/slides/slide11.xml><?xml version="1.0" encoding="utf-8"?>
-<p:sld xmlns:a="http://schemas.openxmlformats.org/drawingml/2006/main" xmlns:r="http://schemas.openxmlformats.org/officeDocument/2006/relationships" xmlns:p="http://schemas.openxmlformats.org/presentationml/2006/main">
-  <p:cSld name="Slide 11">
-    <p:bg>
-      <p:bgPr>
-        <a:solidFill>
-          <a:srgbClr val="FFFFFF"/>
-        </a:solidFill>
-        <a:effectLst/>
-      </p:bgPr>
-    </p:bg>
-    <p:spTree>
-      <p:nvGrpSpPr>
-        <p:cNvPr id="1" name=""/>
-        <p:cNvGrpSpPr/>
-        <p:nvPr/>
-      </p:nvGrpSpPr>
-      <p:grpSpPr>
-        <a:xfrm>
-          <a:off x="0" y="0"/>
-          <a:ext cx="0" cy="0"/>
-          <a:chOff x="0" y="0"/>
-          <a:chExt cx="0" cy="0"/>
-        </a:xfrm>
-      </p:grpSpPr>
-      <p:sp>
-        <p:nvSpPr>
-          <p:cNvPr id="2" name="Text 0"/>
-          <p:cNvSpPr txBox="1"/>
-          <p:nvPr/>
-        </p:nvSpPr>
-        <p:spPr>
-          <a:xfrm>
-            <a:off x="548640" y="347472"/>
-            <a:ext cx="11091672" cy="274320"/>
-          </a:xfrm>
-          <a:prstGeom prst="rect">
-            <a:avLst/>
-          </a:prstGeom>
-          <a:noFill/>
-          <a:ln/>
-        </p:spPr>
-        <p:txBody>
-          <a:bodyPr wrap="square" rtlCol="0" anchor="t"/>
-          <a:lstStyle/>
-          <a:p>
-            <a:pPr marL="0" indent="0" algn="r" rtl="1">
-              <a:buNone/>
-            </a:pPr>
-            <a:r>
-              <a:rPr lang="en-US" sz="1200" b="1" kern="0" spc="100" dirty="0">
-                <a:solidFill>
-                  <a:srgbClr val="F5A623"/>
-                </a:solidFill>
-                <a:latin typeface="Arial" pitchFamily="34" charset="0"/>
-                <a:ea typeface="Arial" pitchFamily="34" charset="-122"/>
-                <a:cs typeface="Arial" pitchFamily="34" charset="-120"/>
-              </a:rPr>
-              <a:t>החלטות הנדסיות‏</a:t>
-            </a:r>
-            <a:endParaRPr lang="en-US" sz="1200" dirty="0"/>
-          </a:p>
-        </p:txBody>
-      </p:sp>
-      <p:sp>
-        <p:nvSpPr>
-          <p:cNvPr id="3" name="Text 1"/>
-          <p:cNvSpPr txBox="1"/>
-          <p:nvPr/>
-        </p:nvSpPr>
-        <p:spPr>
-          <a:xfrm>
-            <a:off x="548640" y="621792"/>
-            <a:ext cx="11091672" cy="685800"/>
-          </a:xfrm>
-          <a:prstGeom prst="rect">
-            <a:avLst/>
-          </a:prstGeom>
-          <a:noFill/>
-          <a:ln/>
-        </p:spPr>
-        <p:txBody>
-          <a:bodyPr wrap="square" rtlCol="0" anchor="t"/>
-          <a:lstStyle/>
-          <a:p>
-            <a:pPr marL="0" indent="0" algn="r" rtl="1">
-              <a:buNone/>
-            </a:pPr>
-            <a:r>
-              <a:rPr lang="en-US" sz="3600" b="1" dirty="0">
-                <a:solidFill>
-                  <a:srgbClr val="16222E"/>
-                </a:solidFill>
-                <a:latin typeface="Arial" pitchFamily="34" charset="0"/>
-                <a:ea typeface="Arial" pitchFamily="34" charset="-122"/>
-                <a:cs typeface="Arial" pitchFamily="34" charset="-120"/>
-              </a:rPr>
-              <a:t>המקומות שבהם הייתה העבודה המעניינת‏</a:t>
-            </a:r>
-            <a:endParaRPr lang="en-US" sz="3600" dirty="0"/>
-          </a:p>
-        </p:txBody>
-      </p:sp>
-      <p:sp>
-        <p:nvSpPr>
-          <p:cNvPr id="4" name="Shape 2"/>
-          <p:cNvSpPr/>
-          <p:nvPr/>
-        </p:nvSpPr>
-        <p:spPr>
-          <a:xfrm>
-            <a:off x="6199632" y="1691640"/>
-            <a:ext cx="5440680" cy="1874520"/>
-          </a:xfrm>
-          <a:prstGeom prst="roundRect">
-            <a:avLst>
-              <a:gd name="adj" fmla="val 5854"/>
-            </a:avLst>
-          </a:prstGeom>
-          <a:solidFill>
-            <a:srgbClr val="F2F5F8"/>
-          </a:solidFill>
-          <a:ln w="12700">
-            <a:solidFill>
-              <a:srgbClr val="F2F5F8"/>
-            </a:solidFill>
-            <a:prstDash val="solid"/>
-          </a:ln>
-          <a:effectLst>
-            <a:outerShdw blurRad="101600" dist="25400" dir="5400000" algn="bl" rotWithShape="0">
-              <a:srgbClr val="9AA9B5">
-                <a:alpha val="25000"/>
-              </a:srgbClr>
-            </a:outerShdw>
-          </a:effectLst>
-        </p:spPr>
-      </p:sp>
-      <p:sp>
-        <p:nvSpPr>
-          <p:cNvPr id="5" name="Text 3"/>
-          <p:cNvSpPr txBox="1"/>
-          <p:nvPr/>
-        </p:nvSpPr>
-        <p:spPr>
-          <a:xfrm>
-            <a:off x="6428232" y="1837944"/>
-            <a:ext cx="4983480" cy="365760"/>
-          </a:xfrm>
-          <a:prstGeom prst="rect">
-            <a:avLst/>
-          </a:prstGeom>
-          <a:noFill/>
-          <a:ln/>
-        </p:spPr>
-        <p:txBody>
-          <a:bodyPr wrap="square" lIns="0" tIns="0" rIns="0" bIns="0" rtlCol="0" anchor="t"/>
-          <a:lstStyle/>
-          <a:p>
-            <a:pPr marL="0" indent="0" algn="r" rtl="1">
-              <a:buNone/>
-            </a:pPr>
-            <a:r>
-              <a:rPr lang="en-US" sz="1550" b="1" dirty="0">
-                <a:solidFill>
-                  <a:srgbClr val="16222E"/>
-                </a:solidFill>
-                <a:latin typeface="Arial" pitchFamily="34" charset="0"/>
-                <a:ea typeface="Arial" pitchFamily="34" charset="-122"/>
-                <a:cs typeface="Arial" pitchFamily="34" charset="-120"/>
-              </a:rPr>
-              <a:t>ספירת תקלות נגזרת, לא נשמרת‏</a:t>
-            </a:r>
-            <a:endParaRPr lang="en-US" sz="1550" dirty="0"/>
-          </a:p>
-        </p:txBody>
-      </p:sp>
-      <p:sp>
-        <p:nvSpPr>
-          <p:cNvPr id="6" name="Text 4"/>
-          <p:cNvSpPr txBox="1"/>
-          <p:nvPr/>
-        </p:nvSpPr>
-        <p:spPr>
-          <a:xfrm>
-            <a:off x="6428232" y="2221992"/>
-            <a:ext cx="4983480" cy="960120"/>
-          </a:xfrm>
-          <a:prstGeom prst="rect">
-            <a:avLst/>
-          </a:prstGeom>
-          <a:noFill/>
-          <a:ln/>
-        </p:spPr>
-        <p:txBody>
-          <a:bodyPr wrap="square" lIns="0" tIns="0" rIns="0" bIns="0" rtlCol="0" anchor="t"/>
-          <a:lstStyle/>
-          <a:p>
-            <a:pPr marL="0" indent="0" algn="r" rtl="1">
-              <a:lnSpc>
-                <a:spcPts val="2000"/>
-              </a:lnSpc>
-              <a:buNone/>
-            </a:pPr>
-            <a:r>
-              <a:rPr lang="en-US" sz="1250" dirty="0">
-                <a:solidFill>
-                  <a:srgbClr val="44566B"/>
-                </a:solidFill>
-                <a:latin typeface="Arial" pitchFamily="34" charset="0"/>
-                <a:ea typeface="Arial" pitchFamily="34" charset="-122"/>
-                <a:cs typeface="Arial" pitchFamily="34" charset="-120"/>
-              </a:rPr>
-              <a:t>סריקה מדווחת על כל הקודים בבת אחת, ולכן מונה שמור מאבד עדכונים במרוץ. הספירה היא ‏COUNT‏ על האירועים, ולכן היא לא יכולה לסתור את מסך ההיסטוריה.‏</a:t>
-            </a:r>
-            <a:endParaRPr lang="en-US" sz="1250" dirty="0"/>
-          </a:p>
-        </p:txBody>
-      </p:sp>
-      <p:sp>
-        <p:nvSpPr>
-          <p:cNvPr id="7" name="Text 5"/>
-          <p:cNvSpPr txBox="1"/>
-          <p:nvPr/>
-        </p:nvSpPr>
-        <p:spPr>
-          <a:xfrm>
-            <a:off x="6428232" y="3154680"/>
-            <a:ext cx="4983480" cy="292608"/>
-          </a:xfrm>
-          <a:prstGeom prst="rect">
-            <a:avLst/>
-          </a:prstGeom>
-          <a:noFill/>
-          <a:ln/>
-        </p:spPr>
-        <p:txBody>
-          <a:bodyPr wrap="square" lIns="0" tIns="0" rIns="0" bIns="0" rtlCol="0" anchor="ctr"/>
-          <a:lstStyle/>
-          <a:p>
-            <a:pPr marL="0" indent="0" algn="l">
-              <a:buNone/>
-            </a:pPr>
-            <a:r>
-              <a:rPr lang="en-US" sz="1100" b="1" dirty="0">
-                <a:solidFill>
-                  <a:srgbClr val="F5A623"/>
-                </a:solidFill>
-                <a:latin typeface="Courier New" pitchFamily="34" charset="0"/>
-                <a:ea typeface="Courier New" pitchFamily="34" charset="-122"/>
-                <a:cs typeface="Courier New" pitchFamily="34" charset="-120"/>
-              </a:rPr>
-              <a:t>UsersController.cs</a:t>
-            </a:r>
-            <a:endParaRPr lang="en-US" sz="1100" dirty="0"/>
-          </a:p>
-        </p:txBody>
-      </p:sp>
-      <p:sp>
-        <p:nvSpPr>
-          <p:cNvPr id="8" name="Shape 6"/>
-          <p:cNvSpPr/>
-          <p:nvPr/>
-        </p:nvSpPr>
-        <p:spPr>
-          <a:xfrm>
-            <a:off x="548640" y="1691640"/>
-            <a:ext cx="5440680" cy="1874520"/>
-          </a:xfrm>
-          <a:prstGeom prst="roundRect">
-            <a:avLst>
-              <a:gd name="adj" fmla="val 5854"/>
-            </a:avLst>
-          </a:prstGeom>
-          <a:solidFill>
-            <a:srgbClr val="F2F5F8"/>
-          </a:solidFill>
-          <a:ln w="12700">
-            <a:solidFill>
-              <a:srgbClr val="F2F5F8"/>
-            </a:solidFill>
-            <a:prstDash val="solid"/>
-          </a:ln>
-          <a:effectLst>
-            <a:outerShdw blurRad="101600" dist="25400" dir="5400000" algn="bl" rotWithShape="0">
-              <a:srgbClr val="9AA9B5">
-                <a:alpha val="25000"/>
-              </a:srgbClr>
-            </a:outerShdw>
-          </a:effectLst>
-        </p:spPr>
-      </p:sp>
-      <p:sp>
-        <p:nvSpPr>
-          <p:cNvPr id="9" name="Text 7"/>
-          <p:cNvSpPr txBox="1"/>
-          <p:nvPr/>
-        </p:nvSpPr>
-        <p:spPr>
-          <a:xfrm>
-            <a:off x="777240" y="1837944"/>
-            <a:ext cx="4983480" cy="365760"/>
-          </a:xfrm>
-          <a:prstGeom prst="rect">
-            <a:avLst/>
-          </a:prstGeom>
-          <a:noFill/>
-          <a:ln/>
-        </p:spPr>
-        <p:txBody>
-          <a:bodyPr wrap="square" lIns="0" tIns="0" rIns="0" bIns="0" rtlCol="0" anchor="t"/>
-          <a:lstStyle/>
-          <a:p>
-            <a:pPr marL="0" indent="0" algn="r" rtl="1">
-              <a:buNone/>
-            </a:pPr>
-            <a:r>
-              <a:rPr lang="en-US" sz="1550" b="1" dirty="0">
-                <a:solidFill>
-                  <a:srgbClr val="16222E"/>
-                </a:solidFill>
-                <a:latin typeface="Arial" pitchFamily="34" charset="0"/>
-                <a:ea typeface="Arial" pitchFamily="34" charset="-122"/>
-                <a:cs typeface="Arial" pitchFamily="34" charset="-120"/>
-              </a:rPr>
-              <a:t>מפתחות ‏Google‏ לא מגיעים לטלפון‏</a:t>
-            </a:r>
-            <a:endParaRPr lang="en-US" sz="1550" dirty="0"/>
-          </a:p>
-        </p:txBody>
-      </p:sp>
-      <p:sp>
-        <p:nvSpPr>
-          <p:cNvPr id="10" name="Text 8"/>
-          <p:cNvSpPr txBox="1"/>
-          <p:nvPr/>
-        </p:nvSpPr>
-        <p:spPr>
-          <a:xfrm>
-            <a:off x="777240" y="2221992"/>
-            <a:ext cx="4983480" cy="960120"/>
-          </a:xfrm>
-          <a:prstGeom prst="rect">
-            <a:avLst/>
-          </a:prstGeom>
-          <a:noFill/>
-          <a:ln/>
-        </p:spPr>
-        <p:txBody>
-          <a:bodyPr wrap="square" lIns="0" tIns="0" rIns="0" bIns="0" rtlCol="0" anchor="t"/>
-          <a:lstStyle/>
-          <a:p>
-            <a:pPr marL="0" indent="0" algn="r" rtl="1">
-              <a:lnSpc>
-                <a:spcPts val="2000"/>
-              </a:lnSpc>
-              <a:buNone/>
-            </a:pPr>
-            <a:r>
-              <a:rPr lang="en-US" sz="1250" dirty="0">
-                <a:solidFill>
-                  <a:srgbClr val="44566B"/>
-                </a:solidFill>
-                <a:latin typeface="Arial" pitchFamily="34" charset="0"/>
-                <a:ea typeface="Arial" pitchFamily="34" charset="-122"/>
-                <a:cs typeface="Arial" pitchFamily="34" charset="-120"/>
-              </a:rPr>
-              <a:t>כל קריאות ה-‏Maps‏ עוברות דרך פרוקסי בשרת: ‏Google‏ לא שולחת כותרות ‏CORS‏, ומפתח בקוד הלקוח ניתן לחילוץ ולשימוש על חשבוננו.‏</a:t>
-            </a:r>
-            <a:endParaRPr lang="en-US" sz="1250" dirty="0"/>
-          </a:p>
-        </p:txBody>
-      </p:sp>
-      <p:sp>
-        <p:nvSpPr>
-          <p:cNvPr id="11" name="Text 9"/>
-          <p:cNvSpPr txBox="1"/>
-          <p:nvPr/>
-        </p:nvSpPr>
-        <p:spPr>
-          <a:xfrm>
-            <a:off x="777240" y="3154680"/>
-            <a:ext cx="4983480" cy="292608"/>
-          </a:xfrm>
-          <a:prstGeom prst="rect">
-            <a:avLst/>
-          </a:prstGeom>
-          <a:noFill/>
-          <a:ln/>
-        </p:spPr>
-        <p:txBody>
-          <a:bodyPr wrap="square" lIns="0" tIns="0" rIns="0" bIns="0" rtlCol="0" anchor="ctr"/>
-          <a:lstStyle/>
-          <a:p>
-            <a:pPr marL="0" indent="0" algn="l">
-              <a:buNone/>
-            </a:pPr>
-            <a:r>
-              <a:rPr lang="en-US" sz="1100" b="1" dirty="0">
-                <a:solidFill>
-                  <a:srgbClr val="F5A623"/>
-                </a:solidFill>
-                <a:latin typeface="Courier New" pitchFamily="34" charset="0"/>
-                <a:ea typeface="Courier New" pitchFamily="34" charset="-122"/>
-                <a:cs typeface="Courier New" pitchFamily="34" charset="-120"/>
-              </a:rPr>
-              <a:t>NavigationController.cs</a:t>
-            </a:r>
-            <a:endParaRPr lang="en-US" sz="1100" dirty="0"/>
-          </a:p>
-        </p:txBody>
-      </p:sp>
-      <p:sp>
-        <p:nvSpPr>
-          <p:cNvPr id="12" name="Shape 10"/>
-          <p:cNvSpPr/>
-          <p:nvPr/>
-        </p:nvSpPr>
-        <p:spPr>
-          <a:xfrm>
-            <a:off x="6199632" y="3794760"/>
-            <a:ext cx="5440680" cy="1874520"/>
-          </a:xfrm>
-          <a:prstGeom prst="roundRect">
-            <a:avLst>
-              <a:gd name="adj" fmla="val 5854"/>
-            </a:avLst>
-          </a:prstGeom>
-          <a:solidFill>
-            <a:srgbClr val="F2F5F8"/>
-          </a:solidFill>
-          <a:ln w="12700">
-            <a:solidFill>
-              <a:srgbClr val="F2F5F8"/>
-            </a:solidFill>
-            <a:prstDash val="solid"/>
-          </a:ln>
-          <a:effectLst>
-            <a:outerShdw blurRad="101600" dist="25400" dir="5400000" algn="bl" rotWithShape="0">
-              <a:srgbClr val="9AA9B5">
-                <a:alpha val="25000"/>
-              </a:srgbClr>
-            </a:outerShdw>
-          </a:effectLst>
-        </p:spPr>
-      </p:sp>
-      <p:sp>
-        <p:nvSpPr>
-          <p:cNvPr id="13" name="Text 11"/>
-          <p:cNvSpPr txBox="1"/>
-          <p:nvPr/>
-        </p:nvSpPr>
-        <p:spPr>
-          <a:xfrm>
-            <a:off x="6428232" y="3941064"/>
-            <a:ext cx="4983480" cy="365760"/>
-          </a:xfrm>
-          <a:prstGeom prst="rect">
-            <a:avLst/>
-          </a:prstGeom>
-          <a:noFill/>
-          <a:ln/>
-        </p:spPr>
-        <p:txBody>
-          <a:bodyPr wrap="square" lIns="0" tIns="0" rIns="0" bIns="0" rtlCol="0" anchor="t"/>
-          <a:lstStyle/>
-          <a:p>
-            <a:pPr marL="0" indent="0" algn="r" rtl="1">
-              <a:buNone/>
-            </a:pPr>
-            <a:r>
-              <a:rPr lang="en-US" sz="1550" b="1" dirty="0">
-                <a:solidFill>
-                  <a:srgbClr val="16222E"/>
-                </a:solidFill>
-                <a:latin typeface="Arial" pitchFamily="34" charset="0"/>
-                <a:ea typeface="Arial" pitchFamily="34" charset="-122"/>
-                <a:cs typeface="Arial" pitchFamily="34" charset="-120"/>
-              </a:rPr>
-              <a:t>מחיקת רכב שומרת היסטוריה‏</a:t>
-            </a:r>
-            <a:endParaRPr lang="en-US" sz="1550" dirty="0"/>
-          </a:p>
-        </p:txBody>
-      </p:sp>
-      <p:sp>
-        <p:nvSpPr>
-          <p:cNvPr id="14" name="Text 12"/>
-          <p:cNvSpPr txBox="1"/>
-          <p:nvPr/>
-        </p:nvSpPr>
-        <p:spPr>
-          <a:xfrm>
-            <a:off x="6428232" y="4325112"/>
-            <a:ext cx="4983480" cy="960120"/>
-          </a:xfrm>
-          <a:prstGeom prst="rect">
-            <a:avLst/>
-          </a:prstGeom>
-          <a:noFill/>
-          <a:ln/>
-        </p:spPr>
-        <p:txBody>
-          <a:bodyPr wrap="square" lIns="0" tIns="0" rIns="0" bIns="0" rtlCol="0" anchor="t"/>
-          <a:lstStyle/>
-          <a:p>
-            <a:pPr marL="0" indent="0" algn="r" rtl="1">
-              <a:lnSpc>
-                <a:spcPts val="2000"/>
-              </a:lnSpc>
-              <a:buNone/>
-            </a:pPr>
-            <a:r>
-              <a:rPr lang="en-US" sz="1250" dirty="0">
-                <a:solidFill>
-                  <a:srgbClr val="44566B"/>
-                </a:solidFill>
-                <a:latin typeface="Arial" pitchFamily="34" charset="0"/>
-                <a:ea typeface="Arial" pitchFamily="34" charset="-122"/>
-                <a:cs typeface="Arial" pitchFamily="34" charset="-120"/>
-              </a:rPr>
-              <a:t>אירועי תקלה מנותקים מהרכב במקום להימחק, כך שציר הזמן של המשתמש שורד את מכירת הרכב.‏</a:t>
-            </a:r>
-            <a:endParaRPr lang="en-US" sz="1250" dirty="0"/>
-          </a:p>
-        </p:txBody>
-      </p:sp>
-      <p:sp>
-        <p:nvSpPr>
-          <p:cNvPr id="15" name="Text 13"/>
-          <p:cNvSpPr txBox="1"/>
-          <p:nvPr/>
-        </p:nvSpPr>
-        <p:spPr>
-          <a:xfrm>
-            <a:off x="6428232" y="5257800"/>
-            <a:ext cx="4983480" cy="292608"/>
-          </a:xfrm>
-          <a:prstGeom prst="rect">
-            <a:avLst/>
-          </a:prstGeom>
-          <a:noFill/>
-          <a:ln/>
-        </p:spPr>
-        <p:txBody>
-          <a:bodyPr wrap="square" lIns="0" tIns="0" rIns="0" bIns="0" rtlCol="0" anchor="ctr"/>
-          <a:lstStyle/>
-          <a:p>
-            <a:pPr marL="0" indent="0" algn="l">
-              <a:buNone/>
-            </a:pPr>
-            <a:r>
-              <a:rPr lang="en-US" sz="1100" b="1" dirty="0">
-                <a:solidFill>
-                  <a:srgbClr val="F5A623"/>
-                </a:solidFill>
-                <a:latin typeface="Courier New" pitchFamily="34" charset="0"/>
-                <a:ea typeface="Courier New" pitchFamily="34" charset="-122"/>
-                <a:cs typeface="Courier New" pitchFamily="34" charset="-120"/>
-              </a:rPr>
-              <a:t>VehiclesController.cs</a:t>
-            </a:r>
-            <a:endParaRPr lang="en-US" sz="1100" dirty="0"/>
-          </a:p>
-        </p:txBody>
-      </p:sp>
-      <p:sp>
-        <p:nvSpPr>
-          <p:cNvPr id="16" name="Shape 14"/>
-          <p:cNvSpPr/>
-          <p:nvPr/>
-        </p:nvSpPr>
-        <p:spPr>
-          <a:xfrm>
-            <a:off x="548640" y="3794760"/>
-            <a:ext cx="5440680" cy="1874520"/>
-          </a:xfrm>
-          <a:prstGeom prst="roundRect">
-            <a:avLst>
-              <a:gd name="adj" fmla="val 5854"/>
-            </a:avLst>
-          </a:prstGeom>
-          <a:solidFill>
-            <a:srgbClr val="F2F5F8"/>
-          </a:solidFill>
-          <a:ln w="12700">
-            <a:solidFill>
-              <a:srgbClr val="F2F5F8"/>
-            </a:solidFill>
-            <a:prstDash val="solid"/>
-          </a:ln>
-          <a:effectLst>
-            <a:outerShdw blurRad="101600" dist="25400" dir="5400000" algn="bl" rotWithShape="0">
-              <a:srgbClr val="9AA9B5">
-                <a:alpha val="25000"/>
-              </a:srgbClr>
-            </a:outerShdw>
-          </a:effectLst>
-        </p:spPr>
-      </p:sp>
-      <p:sp>
-        <p:nvSpPr>
-          <p:cNvPr id="17" name="Text 15"/>
-          <p:cNvSpPr txBox="1"/>
-          <p:nvPr/>
-        </p:nvSpPr>
-        <p:spPr>
-          <a:xfrm>
-            <a:off x="777240" y="3941064"/>
-            <a:ext cx="4983480" cy="365760"/>
-          </a:xfrm>
-          <a:prstGeom prst="rect">
-            <a:avLst/>
-          </a:prstGeom>
-          <a:noFill/>
-          <a:ln/>
-        </p:spPr>
-        <p:txBody>
-          <a:bodyPr wrap="square" lIns="0" tIns="0" rIns="0" bIns="0" rtlCol="0" anchor="t"/>
-          <a:lstStyle/>
-          <a:p>
-            <a:pPr marL="0" indent="0" algn="r" rtl="1">
-              <a:buNone/>
-            </a:pPr>
-            <a:r>
-              <a:rPr lang="en-US" sz="1550" b="1" dirty="0">
-                <a:solidFill>
-                  <a:srgbClr val="16222E"/>
-                </a:solidFill>
-                <a:latin typeface="Arial" pitchFamily="34" charset="0"/>
-                <a:ea typeface="Arial" pitchFamily="34" charset="-122"/>
-                <a:cs typeface="Arial" pitchFamily="34" charset="-120"/>
-              </a:rPr>
-              <a:t>החשבון חי בפונקציות טהורות‏</a:t>
-            </a:r>
-            <a:endParaRPr lang="en-US" sz="1550" dirty="0"/>
-          </a:p>
-        </p:txBody>
-      </p:sp>
-      <p:sp>
-        <p:nvSpPr>
-          <p:cNvPr id="18" name="Text 16"/>
-          <p:cNvSpPr txBox="1"/>
-          <p:nvPr/>
-        </p:nvSpPr>
-        <p:spPr>
-          <a:xfrm>
-            <a:off x="777240" y="4325112"/>
-            <a:ext cx="4983480" cy="960120"/>
-          </a:xfrm>
-          <a:prstGeom prst="rect">
-            <a:avLst/>
-          </a:prstGeom>
-          <a:noFill/>
-          <a:ln/>
-        </p:spPr>
-        <p:txBody>
-          <a:bodyPr wrap="square" lIns="0" tIns="0" rIns="0" bIns="0" rtlCol="0" anchor="t"/>
-          <a:lstStyle/>
-          <a:p>
-            <a:pPr marL="0" indent="0" algn="r" rtl="1">
-              <a:lnSpc>
-                <a:spcPts val="2000"/>
-              </a:lnSpc>
-              <a:buNone/>
-            </a:pPr>
-            <a:r>
-              <a:rPr lang="en-US" sz="1250" dirty="0">
-                <a:solidFill>
-                  <a:srgbClr val="44566B"/>
-                </a:solidFill>
-                <a:latin typeface="Arial" pitchFamily="34" charset="0"/>
-                <a:ea typeface="Arial" pitchFamily="34" charset="-122"/>
-                <a:cs typeface="Arial" pitchFamily="34" charset="-120"/>
-              </a:rPr>
-              <a:t>הערכת דלק, תחזית נסיעה ועלות ל-‏100‏ ק"מ, בלי רשת ובלי אחסון, כך שכל מקרה קצה נבדק ביוניט-טסט.‏</a:t>
-            </a:r>
-            <a:endParaRPr lang="en-US" sz="1250" dirty="0"/>
-          </a:p>
-        </p:txBody>
-      </p:sp>
-      <p:sp>
-        <p:nvSpPr>
-          <p:cNvPr id="19" name="Text 17"/>
-          <p:cNvSpPr txBox="1"/>
-          <p:nvPr/>
-        </p:nvSpPr>
-        <p:spPr>
-          <a:xfrm>
-            <a:off x="777240" y="5257800"/>
-            <a:ext cx="4983480" cy="292608"/>
-          </a:xfrm>
-          <a:prstGeom prst="rect">
-            <a:avLst/>
-          </a:prstGeom>
-          <a:noFill/>
-          <a:ln/>
-        </p:spPr>
-        <p:txBody>
-          <a:bodyPr wrap="square" lIns="0" tIns="0" rIns="0" bIns="0" rtlCol="0" anchor="ctr"/>
-          <a:lstStyle/>
-          <a:p>
-            <a:pPr marL="0" indent="0" algn="l">
-              <a:buNone/>
-            </a:pPr>
-            <a:r>
-              <a:rPr lang="en-US" sz="1100" b="1" dirty="0">
-                <a:solidFill>
-                  <a:srgbClr val="F5A623"/>
-                </a:solidFill>
-                <a:latin typeface="Courier New" pitchFamily="34" charset="0"/>
-                <a:ea typeface="Courier New" pitchFamily="34" charset="-122"/>
-                <a:cs typeface="Courier New" pitchFamily="34" charset="-120"/>
-              </a:rPr>
-              <a:t>utils/fuel.ts</a:t>
-            </a:r>
-            <a:endParaRPr lang="en-US" sz="1100" dirty="0"/>
-          </a:p>
-        </p:txBody>
-      </p:sp>
-    </p:spTree>
-  </p:cSld>
-  <p:clrMapOvr>
-    <a:masterClrMapping/>
-  </p:clrMapOvr>
-</p:sld>
-</file>
-
-<file path=ppt/slides/slide12.xml><?xml version="1.0" encoding="utf-8"?>
 <p:sld xmlns:a="http://schemas.openxmlformats.org/drawingml/2006/main" xmlns:r="http://schemas.openxmlformats.org/officeDocument/2006/relationships" xmlns:p="http://schemas.openxmlformats.org/presentationml/2006/main">
   <p:cSld name="Slide 12">
     <p:bg>
@@ -3961,6 +2724,13 @@
             </a:outerShdw>
           </a:effectLst>
         </p:spPr>
+        <p:txBody>
+          <a:bodyPr/>
+          <a:lstStyle/>
+          <a:p>
+            <a:endParaRPr lang="en-US"/>
+          </a:p>
+        </p:txBody>
       </p:sp>
       <p:sp>
         <p:nvSpPr>
@@ -3986,6 +2756,13 @@
             <a:prstDash val="solid"/>
           </a:ln>
         </p:spPr>
+        <p:txBody>
+          <a:bodyPr/>
+          <a:lstStyle/>
+          <a:p>
+            <a:endParaRPr lang="en-US"/>
+          </a:p>
+        </p:txBody>
       </p:sp>
       <p:sp>
         <p:nvSpPr>
@@ -4137,6 +2914,13 @@
             </a:outerShdw>
           </a:effectLst>
         </p:spPr>
+        <p:txBody>
+          <a:bodyPr/>
+          <a:lstStyle/>
+          <a:p>
+            <a:endParaRPr lang="en-US"/>
+          </a:p>
+        </p:txBody>
       </p:sp>
       <p:sp>
         <p:nvSpPr>
@@ -4162,6 +2946,13 @@
             <a:prstDash val="solid"/>
           </a:ln>
         </p:spPr>
+        <p:txBody>
+          <a:bodyPr/>
+          <a:lstStyle/>
+          <a:p>
+            <a:endParaRPr lang="en-US"/>
+          </a:p>
+        </p:txBody>
       </p:sp>
       <p:sp>
         <p:nvSpPr>
@@ -4394,6 +3185,13 @@
             </a:outerShdw>
           </a:effectLst>
         </p:spPr>
+        <p:txBody>
+          <a:bodyPr/>
+          <a:lstStyle/>
+          <a:p>
+            <a:endParaRPr lang="en-US"/>
+          </a:p>
+        </p:txBody>
       </p:sp>
       <p:sp>
         <p:nvSpPr>
@@ -4419,6 +3217,13 @@
             <a:prstDash val="solid"/>
           </a:ln>
         </p:spPr>
+        <p:txBody>
+          <a:bodyPr/>
+          <a:lstStyle/>
+          <a:p>
+            <a:endParaRPr lang="en-US"/>
+          </a:p>
+        </p:txBody>
       </p:sp>
       <p:sp>
         <p:nvSpPr>
@@ -4570,6 +3375,13 @@
             </a:outerShdw>
           </a:effectLst>
         </p:spPr>
+        <p:txBody>
+          <a:bodyPr/>
+          <a:lstStyle/>
+          <a:p>
+            <a:endParaRPr lang="en-US"/>
+          </a:p>
+        </p:txBody>
       </p:sp>
       <p:sp>
         <p:nvSpPr>
@@ -4595,6 +3407,13 @@
             <a:prstDash val="solid"/>
           </a:ln>
         </p:spPr>
+        <p:txBody>
+          <a:bodyPr/>
+          <a:lstStyle/>
+          <a:p>
+            <a:endParaRPr lang="en-US"/>
+          </a:p>
+        </p:txBody>
       </p:sp>
       <p:sp>
         <p:nvSpPr>
@@ -4746,6 +3565,13 @@
             </a:outerShdw>
           </a:effectLst>
         </p:spPr>
+        <p:txBody>
+          <a:bodyPr/>
+          <a:lstStyle/>
+          <a:p>
+            <a:endParaRPr lang="en-US"/>
+          </a:p>
+        </p:txBody>
       </p:sp>
       <p:sp>
         <p:nvSpPr>
@@ -4771,6 +3597,13 @@
             <a:prstDash val="solid"/>
           </a:ln>
         </p:spPr>
+        <p:txBody>
+          <a:bodyPr/>
+          <a:lstStyle/>
+          <a:p>
+            <a:endParaRPr lang="en-US"/>
+          </a:p>
+        </p:txBody>
       </p:sp>
       <p:sp>
         <p:nvSpPr>
@@ -4897,1008 +3730,7 @@
 </p:sld>
 </file>
 
-<file path=ppt/slides/slide13.xml><?xml version="1.0" encoding="utf-8"?>
-<p:sld xmlns:a="http://schemas.openxmlformats.org/drawingml/2006/main" xmlns:r="http://schemas.openxmlformats.org/officeDocument/2006/relationships" xmlns:p="http://schemas.openxmlformats.org/presentationml/2006/main">
-  <p:cSld name="Slide 13">
-    <p:bg>
-      <p:bgPr>
-        <a:solidFill>
-          <a:srgbClr val="FFFFFF"/>
-        </a:solidFill>
-        <a:effectLst/>
-      </p:bgPr>
-    </p:bg>
-    <p:spTree>
-      <p:nvGrpSpPr>
-        <p:cNvPr id="1" name=""/>
-        <p:cNvGrpSpPr/>
-        <p:nvPr/>
-      </p:nvGrpSpPr>
-      <p:grpSpPr>
-        <a:xfrm>
-          <a:off x="0" y="0"/>
-          <a:ext cx="0" cy="0"/>
-          <a:chOff x="0" y="0"/>
-          <a:chExt cx="0" cy="0"/>
-        </a:xfrm>
-      </p:grpSpPr>
-      <p:sp>
-        <p:nvSpPr>
-          <p:cNvPr id="2" name="Text 0"/>
-          <p:cNvSpPr txBox="1"/>
-          <p:nvPr/>
-        </p:nvSpPr>
-        <p:spPr>
-          <a:xfrm>
-            <a:off x="548640" y="347472"/>
-            <a:ext cx="11091672" cy="274320"/>
-          </a:xfrm>
-          <a:prstGeom prst="rect">
-            <a:avLst/>
-          </a:prstGeom>
-          <a:noFill/>
-          <a:ln/>
-        </p:spPr>
-        <p:txBody>
-          <a:bodyPr wrap="square" rtlCol="0" anchor="t"/>
-          <a:lstStyle/>
-          <a:p>
-            <a:pPr marL="0" indent="0" algn="r" rtl="1">
-              <a:buNone/>
-            </a:pPr>
-            <a:r>
-              <a:rPr lang="en-US" sz="1200" b="1" kern="0" spc="100" dirty="0">
-                <a:solidFill>
-                  <a:srgbClr val="F5A623"/>
-                </a:solidFill>
-                <a:latin typeface="Arial" pitchFamily="34" charset="0"/>
-                <a:ea typeface="Arial" pitchFamily="34" charset="-122"/>
-                <a:cs typeface="Arial" pitchFamily="34" charset="-120"/>
-              </a:rPr>
-              <a:t>בדיקות‏</a:t>
-            </a:r>
-            <a:endParaRPr lang="en-US" sz="1200" dirty="0"/>
-          </a:p>
-        </p:txBody>
-      </p:sp>
-      <p:sp>
-        <p:nvSpPr>
-          <p:cNvPr id="3" name="Text 1"/>
-          <p:cNvSpPr txBox="1"/>
-          <p:nvPr/>
-        </p:nvSpPr>
-        <p:spPr>
-          <a:xfrm>
-            <a:off x="548640" y="621792"/>
-            <a:ext cx="11091672" cy="685800"/>
-          </a:xfrm>
-          <a:prstGeom prst="rect">
-            <a:avLst/>
-          </a:prstGeom>
-          <a:noFill/>
-          <a:ln/>
-        </p:spPr>
-        <p:txBody>
-          <a:bodyPr wrap="square" rtlCol="0" anchor="t"/>
-          <a:lstStyle/>
-          <a:p>
-            <a:pPr marL="0" indent="0" algn="r" rtl="1">
-              <a:buNone/>
-            </a:pPr>
-            <a:r>
-              <a:rPr lang="en-US" sz="3600" b="1" dirty="0">
-                <a:solidFill>
-                  <a:srgbClr val="16222E"/>
-                </a:solidFill>
-                <a:latin typeface="Arial" pitchFamily="34" charset="0"/>
-                <a:ea typeface="Arial" pitchFamily="34" charset="-122"/>
-                <a:cs typeface="Arial" pitchFamily="34" charset="-120"/>
-              </a:rPr>
-              <a:t>‏82‏ יוניט-טסטים בשש חבילות‏</a:t>
-            </a:r>
-            <a:endParaRPr lang="en-US" sz="3600" dirty="0"/>
-          </a:p>
-        </p:txBody>
-      </p:sp>
-      <p:sp>
-        <p:nvSpPr>
-          <p:cNvPr id="4" name="Shape 2"/>
-          <p:cNvSpPr/>
-          <p:nvPr/>
-        </p:nvSpPr>
-        <p:spPr>
-          <a:xfrm>
-            <a:off x="8439912" y="1691640"/>
-            <a:ext cx="3200400" cy="2011680"/>
-          </a:xfrm>
-          <a:prstGeom prst="roundRect">
-            <a:avLst>
-              <a:gd name="adj" fmla="val 5455"/>
-            </a:avLst>
-          </a:prstGeom>
-          <a:solidFill>
-            <a:srgbClr val="16222E"/>
-          </a:solidFill>
-          <a:ln w="12700">
-            <a:solidFill>
-              <a:srgbClr val="16222E"/>
-            </a:solidFill>
-            <a:prstDash val="solid"/>
-          </a:ln>
-          <a:effectLst>
-            <a:outerShdw blurRad="101600" dist="25400" dir="5400000" algn="bl" rotWithShape="0">
-              <a:srgbClr val="9AA9B5">
-                <a:alpha val="25000"/>
-              </a:srgbClr>
-            </a:outerShdw>
-          </a:effectLst>
-        </p:spPr>
-      </p:sp>
-      <p:sp>
-        <p:nvSpPr>
-          <p:cNvPr id="5" name="Text 3"/>
-          <p:cNvSpPr txBox="1"/>
-          <p:nvPr/>
-        </p:nvSpPr>
-        <p:spPr>
-          <a:xfrm>
-            <a:off x="8439912" y="1783080"/>
-            <a:ext cx="3200400" cy="1097280"/>
-          </a:xfrm>
-          <a:prstGeom prst="rect">
-            <a:avLst/>
-          </a:prstGeom>
-          <a:noFill/>
-          <a:ln/>
-        </p:spPr>
-        <p:txBody>
-          <a:bodyPr wrap="square" lIns="0" tIns="0" rIns="0" bIns="0" rtlCol="0" anchor="ctr"/>
-          <a:lstStyle/>
-          <a:p>
-            <a:pPr marL="0" indent="0" algn="ctr">
-              <a:buNone/>
-            </a:pPr>
-            <a:r>
-              <a:rPr lang="en-US" sz="6600" b="1" dirty="0">
-                <a:solidFill>
-                  <a:srgbClr val="F5A623"/>
-                </a:solidFill>
-                <a:latin typeface="Arial" pitchFamily="34" charset="0"/>
-                <a:ea typeface="Arial" pitchFamily="34" charset="-122"/>
-                <a:cs typeface="Arial" pitchFamily="34" charset="-120"/>
-              </a:rPr>
-              <a:t>82</a:t>
-            </a:r>
-            <a:endParaRPr lang="en-US" sz="6600" dirty="0"/>
-          </a:p>
-        </p:txBody>
-      </p:sp>
-      <p:sp>
-        <p:nvSpPr>
-          <p:cNvPr id="6" name="Text 4"/>
-          <p:cNvSpPr txBox="1"/>
-          <p:nvPr/>
-        </p:nvSpPr>
-        <p:spPr>
-          <a:xfrm>
-            <a:off x="8439912" y="2926080"/>
-            <a:ext cx="3200400" cy="457200"/>
-          </a:xfrm>
-          <a:prstGeom prst="rect">
-            <a:avLst/>
-          </a:prstGeom>
-          <a:noFill/>
-          <a:ln/>
-        </p:spPr>
-        <p:txBody>
-          <a:bodyPr wrap="square" lIns="0" tIns="0" rIns="0" bIns="0" rtlCol="0" anchor="ctr"/>
-          <a:lstStyle/>
-          <a:p>
-            <a:pPr marL="0" indent="0" algn="ctr" rtl="1">
-              <a:buNone/>
-            </a:pPr>
-            <a:r>
-              <a:rPr lang="en-US" sz="1500" dirty="0">
-                <a:solidFill>
-                  <a:srgbClr val="FFFFFF"/>
-                </a:solidFill>
-                <a:latin typeface="Arial" pitchFamily="34" charset="0"/>
-                <a:ea typeface="Arial" pitchFamily="34" charset="-122"/>
-                <a:cs typeface="Arial" pitchFamily="34" charset="-120"/>
-              </a:rPr>
-              <a:t>בדיקות עוברות‏</a:t>
-            </a:r>
-            <a:endParaRPr lang="en-US" sz="1500" dirty="0"/>
-          </a:p>
-        </p:txBody>
-      </p:sp>
-      <p:sp>
-        <p:nvSpPr>
-          <p:cNvPr id="7" name="Shape 5"/>
-          <p:cNvSpPr/>
-          <p:nvPr/>
-        </p:nvSpPr>
-        <p:spPr>
-          <a:xfrm>
-            <a:off x="8439912" y="3840480"/>
-            <a:ext cx="3200400" cy="1828800"/>
-          </a:xfrm>
-          <a:prstGeom prst="roundRect">
-            <a:avLst>
-              <a:gd name="adj" fmla="val 6000"/>
-            </a:avLst>
-          </a:prstGeom>
-          <a:solidFill>
-            <a:srgbClr val="F2F5F8"/>
-          </a:solidFill>
-          <a:ln w="12700">
-            <a:solidFill>
-              <a:srgbClr val="F2F5F8"/>
-            </a:solidFill>
-            <a:prstDash val="solid"/>
-          </a:ln>
-          <a:effectLst>
-            <a:outerShdw blurRad="101600" dist="25400" dir="5400000" algn="bl" rotWithShape="0">
-              <a:srgbClr val="9AA9B5">
-                <a:alpha val="25000"/>
-              </a:srgbClr>
-            </a:outerShdw>
-          </a:effectLst>
-        </p:spPr>
-      </p:sp>
-      <p:sp>
-        <p:nvSpPr>
-          <p:cNvPr id="8" name="Text 6"/>
-          <p:cNvSpPr txBox="1"/>
-          <p:nvPr/>
-        </p:nvSpPr>
-        <p:spPr>
-          <a:xfrm>
-            <a:off x="8641080" y="3977640"/>
-            <a:ext cx="2798064" cy="1554480"/>
-          </a:xfrm>
-          <a:prstGeom prst="rect">
-            <a:avLst/>
-          </a:prstGeom>
-          <a:noFill/>
-          <a:ln/>
-        </p:spPr>
-        <p:txBody>
-          <a:bodyPr wrap="square" lIns="0" tIns="0" rIns="0" bIns="0" rtlCol="0" anchor="t"/>
-          <a:lstStyle/>
-          <a:p>
-            <a:pPr marL="0" indent="0" algn="r" rtl="1">
-              <a:lnSpc>
-                <a:spcPts val="1900"/>
-              </a:lnSpc>
-              <a:buNone/>
-            </a:pPr>
-            <a:r>
-              <a:rPr lang="en-US" sz="1200" dirty="0">
-                <a:solidFill>
-                  <a:srgbClr val="44566B"/>
-                </a:solidFill>
-                <a:latin typeface="Arial" pitchFamily="34" charset="0"/>
-                <a:ea typeface="Arial" pitchFamily="34" charset="-122"/>
-                <a:cs typeface="Arial" pitchFamily="34" charset="-120"/>
-              </a:rPr>
-              <a:t>הבדיקות מכוונות בכוונה לפונקציות טהורות, החשבון שמניע את המחוונים ואת הערכות העלות, שם תשובה שגויה היא שקטה ולא בולטת לעין.‏</a:t>
-            </a:r>
-            <a:endParaRPr lang="en-US" sz="1200" dirty="0"/>
-          </a:p>
-        </p:txBody>
-      </p:sp>
-      <p:graphicFrame>
-        <p:nvGraphicFramePr>
-          <p:cNvPr id="9" name="Chart 0"/>
-          <p:cNvGraphicFramePr/>
-          <p:nvPr/>
-        </p:nvGraphicFramePr>
-        <p:xfrm>
-          <a:off x="548640" y="1691640"/>
-          <a:ext cx="7726680" cy="3977640"/>
-        </p:xfrm>
-        <a:graphic>
-          <a:graphicData uri="http://schemas.openxmlformats.org/drawingml/2006/chart">
-            <c:chart xmlns:c="http://schemas.openxmlformats.org/drawingml/2006/chart" xmlns:r="http://schemas.openxmlformats.org/officeDocument/2006/relationships" r:id="rId3"/>
-          </a:graphicData>
-        </a:graphic>
-      </p:graphicFrame>
-    </p:spTree>
-  </p:cSld>
-  <p:clrMapOvr>
-    <a:masterClrMapping/>
-  </p:clrMapOvr>
-</p:sld>
-</file>
-
-<file path=ppt/slides/slide14.xml><?xml version="1.0" encoding="utf-8"?>
-<p:sld xmlns:a="http://schemas.openxmlformats.org/drawingml/2006/main" xmlns:r="http://schemas.openxmlformats.org/officeDocument/2006/relationships" xmlns:p="http://schemas.openxmlformats.org/presentationml/2006/main">
-  <p:cSld name="Slide 14">
-    <p:bg>
-      <p:bgPr>
-        <a:solidFill>
-          <a:srgbClr val="FFFFFF"/>
-        </a:solidFill>
-        <a:effectLst/>
-      </p:bgPr>
-    </p:bg>
-    <p:spTree>
-      <p:nvGrpSpPr>
-        <p:cNvPr id="1" name=""/>
-        <p:cNvGrpSpPr/>
-        <p:nvPr/>
-      </p:nvGrpSpPr>
-      <p:grpSpPr>
-        <a:xfrm>
-          <a:off x="0" y="0"/>
-          <a:ext cx="0" cy="0"/>
-          <a:chOff x="0" y="0"/>
-          <a:chExt cx="0" cy="0"/>
-        </a:xfrm>
-      </p:grpSpPr>
-      <p:sp>
-        <p:nvSpPr>
-          <p:cNvPr id="2" name="Text 0"/>
-          <p:cNvSpPr txBox="1"/>
-          <p:nvPr/>
-        </p:nvSpPr>
-        <p:spPr>
-          <a:xfrm>
-            <a:off x="548640" y="347472"/>
-            <a:ext cx="11091672" cy="274320"/>
-          </a:xfrm>
-          <a:prstGeom prst="rect">
-            <a:avLst/>
-          </a:prstGeom>
-          <a:noFill/>
-          <a:ln/>
-        </p:spPr>
-        <p:txBody>
-          <a:bodyPr wrap="square" rtlCol="0" anchor="t"/>
-          <a:lstStyle/>
-          <a:p>
-            <a:pPr marL="0" indent="0" algn="r" rtl="1">
-              <a:buNone/>
-            </a:pPr>
-            <a:r>
-              <a:rPr lang="en-US" sz="1200" b="1" kern="0" spc="100" dirty="0">
-                <a:solidFill>
-                  <a:srgbClr val="F5A623"/>
-                </a:solidFill>
-                <a:latin typeface="Arial" pitchFamily="34" charset="0"/>
-                <a:ea typeface="Arial" pitchFamily="34" charset="-122"/>
-                <a:cs typeface="Arial" pitchFamily="34" charset="-120"/>
-              </a:rPr>
-              <a:t>טכנולוגיות‏</a:t>
-            </a:r>
-            <a:endParaRPr lang="en-US" sz="1200" dirty="0"/>
-          </a:p>
-        </p:txBody>
-      </p:sp>
-      <p:sp>
-        <p:nvSpPr>
-          <p:cNvPr id="3" name="Text 1"/>
-          <p:cNvSpPr txBox="1"/>
-          <p:nvPr/>
-        </p:nvSpPr>
-        <p:spPr>
-          <a:xfrm>
-            <a:off x="548640" y="621792"/>
-            <a:ext cx="11091672" cy="685800"/>
-          </a:xfrm>
-          <a:prstGeom prst="rect">
-            <a:avLst/>
-          </a:prstGeom>
-          <a:noFill/>
-          <a:ln/>
-        </p:spPr>
-        <p:txBody>
-          <a:bodyPr wrap="square" rtlCol="0" anchor="t"/>
-          <a:lstStyle/>
-          <a:p>
-            <a:pPr marL="0" indent="0" algn="r" rtl="1">
-              <a:buNone/>
-            </a:pPr>
-            <a:r>
-              <a:rPr lang="en-US" sz="3600" b="1" dirty="0">
-                <a:solidFill>
-                  <a:srgbClr val="16222E"/>
-                </a:solidFill>
-                <a:latin typeface="Arial" pitchFamily="34" charset="0"/>
-                <a:ea typeface="Arial" pitchFamily="34" charset="-122"/>
-                <a:cs typeface="Arial" pitchFamily="34" charset="-120"/>
-              </a:rPr>
-              <a:t>מחסנית הטכנולוגיות‏</a:t>
-            </a:r>
-            <a:endParaRPr lang="en-US" sz="3600" dirty="0"/>
-          </a:p>
-        </p:txBody>
-      </p:sp>
-      <p:sp>
-        <p:nvSpPr>
-          <p:cNvPr id="4" name="Shape 2"/>
-          <p:cNvSpPr/>
-          <p:nvPr/>
-        </p:nvSpPr>
-        <p:spPr>
-          <a:xfrm>
-            <a:off x="548640" y="1645920"/>
-            <a:ext cx="11091672" cy="1051560"/>
-          </a:xfrm>
-          <a:prstGeom prst="roundRect">
-            <a:avLst>
-              <a:gd name="adj" fmla="val 10435"/>
-            </a:avLst>
-          </a:prstGeom>
-          <a:solidFill>
-            <a:srgbClr val="16222E"/>
-          </a:solidFill>
-          <a:ln w="12700">
-            <a:solidFill>
-              <a:srgbClr val="16222E"/>
-            </a:solidFill>
-            <a:prstDash val="solid"/>
-          </a:ln>
-          <a:effectLst>
-            <a:outerShdw blurRad="101600" dist="25400" dir="5400000" algn="bl" rotWithShape="0">
-              <a:srgbClr val="9AA9B5">
-                <a:alpha val="25000"/>
-              </a:srgbClr>
-            </a:outerShdw>
-          </a:effectLst>
-        </p:spPr>
-      </p:sp>
-      <p:sp>
-        <p:nvSpPr>
-          <p:cNvPr id="5" name="Text 3"/>
-          <p:cNvSpPr txBox="1"/>
-          <p:nvPr/>
-        </p:nvSpPr>
-        <p:spPr>
-          <a:xfrm>
-            <a:off x="9537192" y="1645920"/>
-            <a:ext cx="1874520" cy="1051560"/>
-          </a:xfrm>
-          <a:prstGeom prst="rect">
-            <a:avLst/>
-          </a:prstGeom>
-          <a:noFill/>
-          <a:ln/>
-        </p:spPr>
-        <p:txBody>
-          <a:bodyPr wrap="square" lIns="0" tIns="0" rIns="0" bIns="0" rtlCol="0" anchor="ctr"/>
-          <a:lstStyle/>
-          <a:p>
-            <a:pPr marL="0" indent="0" algn="r" rtl="1">
-              <a:buNone/>
-            </a:pPr>
-            <a:r>
-              <a:rPr lang="en-US" sz="1600" b="1" dirty="0">
-                <a:solidFill>
-                  <a:srgbClr val="F5A623"/>
-                </a:solidFill>
-                <a:latin typeface="Arial" pitchFamily="34" charset="0"/>
-                <a:ea typeface="Arial" pitchFamily="34" charset="-122"/>
-                <a:cs typeface="Arial" pitchFamily="34" charset="-120"/>
-              </a:rPr>
-              <a:t>ניידת‏</a:t>
-            </a:r>
-            <a:endParaRPr lang="en-US" sz="1600" dirty="0"/>
-          </a:p>
-        </p:txBody>
-      </p:sp>
-      <p:sp>
-        <p:nvSpPr>
-          <p:cNvPr id="6" name="Text 4"/>
-          <p:cNvSpPr txBox="1"/>
-          <p:nvPr/>
-        </p:nvSpPr>
-        <p:spPr>
-          <a:xfrm>
-            <a:off x="822960" y="1645920"/>
-            <a:ext cx="9509760" cy="1051560"/>
-          </a:xfrm>
-          <a:prstGeom prst="rect">
-            <a:avLst/>
-          </a:prstGeom>
-          <a:noFill/>
-          <a:ln/>
-        </p:spPr>
-        <p:txBody>
-          <a:bodyPr wrap="square" lIns="0" tIns="0" rIns="0" bIns="0" rtlCol="0" anchor="ctr"/>
-          <a:lstStyle/>
-          <a:p>
-            <a:pPr marL="0" indent="0" algn="r" rtl="1">
-              <a:lnSpc>
-                <a:spcPts val="2000"/>
-              </a:lnSpc>
-              <a:buNone/>
-            </a:pPr>
-            <a:r>
-              <a:rPr lang="en-US" sz="1250" dirty="0">
-                <a:solidFill>
-                  <a:srgbClr val="C6D2DC"/>
-                </a:solidFill>
-                <a:latin typeface="Arial" pitchFamily="34" charset="0"/>
-                <a:ea typeface="Arial" pitchFamily="34" charset="-122"/>
-                <a:cs typeface="Arial" pitchFamily="34" charset="-120"/>
-              </a:rPr>
-              <a:t>React Native 0.81 · React 19 · Expo SDK 54 · expo-router · TypeScript · react-native-paper · react-native-maps · expo-location · expo-notifications · AsyncStorage · axios · Jest</a:t>
-            </a:r>
-            <a:endParaRPr lang="en-US" sz="1250" dirty="0"/>
-          </a:p>
-        </p:txBody>
-      </p:sp>
-      <p:sp>
-        <p:nvSpPr>
-          <p:cNvPr id="7" name="Shape 5"/>
-          <p:cNvSpPr/>
-          <p:nvPr/>
-        </p:nvSpPr>
-        <p:spPr>
-          <a:xfrm>
-            <a:off x="548640" y="2825496"/>
-            <a:ext cx="11091672" cy="777240"/>
-          </a:xfrm>
-          <a:prstGeom prst="roundRect">
-            <a:avLst>
-              <a:gd name="adj" fmla="val 14118"/>
-            </a:avLst>
-          </a:prstGeom>
-          <a:solidFill>
-            <a:srgbClr val="F2F5F8"/>
-          </a:solidFill>
-          <a:ln w="12700">
-            <a:solidFill>
-              <a:srgbClr val="F2F5F8"/>
-            </a:solidFill>
-            <a:prstDash val="solid"/>
-          </a:ln>
-          <a:effectLst>
-            <a:outerShdw blurRad="101600" dist="25400" dir="5400000" algn="bl" rotWithShape="0">
-              <a:srgbClr val="9AA9B5">
-                <a:alpha val="25000"/>
-              </a:srgbClr>
-            </a:outerShdw>
-          </a:effectLst>
-        </p:spPr>
-      </p:sp>
-      <p:sp>
-        <p:nvSpPr>
-          <p:cNvPr id="8" name="Text 6"/>
-          <p:cNvSpPr txBox="1"/>
-          <p:nvPr/>
-        </p:nvSpPr>
-        <p:spPr>
-          <a:xfrm>
-            <a:off x="9537192" y="2825496"/>
-            <a:ext cx="1874520" cy="777240"/>
-          </a:xfrm>
-          <a:prstGeom prst="rect">
-            <a:avLst/>
-          </a:prstGeom>
-          <a:noFill/>
-          <a:ln/>
-        </p:spPr>
-        <p:txBody>
-          <a:bodyPr wrap="square" lIns="0" tIns="0" rIns="0" bIns="0" rtlCol="0" anchor="ctr"/>
-          <a:lstStyle/>
-          <a:p>
-            <a:pPr marL="0" indent="0" algn="r" rtl="1">
-              <a:buNone/>
-            </a:pPr>
-            <a:r>
-              <a:rPr lang="en-US" sz="1600" b="1" dirty="0">
-                <a:solidFill>
-                  <a:srgbClr val="16222E"/>
-                </a:solidFill>
-                <a:latin typeface="Arial" pitchFamily="34" charset="0"/>
-                <a:ea typeface="Arial" pitchFamily="34" charset="-122"/>
-                <a:cs typeface="Arial" pitchFamily="34" charset="-120"/>
-              </a:rPr>
-              <a:t>שרת‏</a:t>
-            </a:r>
-            <a:endParaRPr lang="en-US" sz="1600" dirty="0"/>
-          </a:p>
-        </p:txBody>
-      </p:sp>
-      <p:sp>
-        <p:nvSpPr>
-          <p:cNvPr id="9" name="Text 7"/>
-          <p:cNvSpPr txBox="1"/>
-          <p:nvPr/>
-        </p:nvSpPr>
-        <p:spPr>
-          <a:xfrm>
-            <a:off x="822960" y="2825496"/>
-            <a:ext cx="9509760" cy="777240"/>
-          </a:xfrm>
-          <a:prstGeom prst="rect">
-            <a:avLst/>
-          </a:prstGeom>
-          <a:noFill/>
-          <a:ln/>
-        </p:spPr>
-        <p:txBody>
-          <a:bodyPr wrap="square" lIns="0" tIns="0" rIns="0" bIns="0" rtlCol="0" anchor="ctr"/>
-          <a:lstStyle/>
-          <a:p>
-            <a:pPr marL="0" indent="0" algn="r" rtl="1">
-              <a:lnSpc>
-                <a:spcPts val="2000"/>
-              </a:lnSpc>
-              <a:buNone/>
-            </a:pPr>
-            <a:r>
-              <a:rPr lang="en-US" sz="1250" dirty="0">
-                <a:solidFill>
-                  <a:srgbClr val="44566B"/>
-                </a:solidFill>
-                <a:latin typeface="Arial" pitchFamily="34" charset="0"/>
-                <a:ea typeface="Arial" pitchFamily="34" charset="-122"/>
-                <a:cs typeface="Arial" pitchFamily="34" charset="-120"/>
-              </a:rPr>
-              <a:t>ASP.NET Core 10 · EF Core 8 · SQL Server · BCrypt.Net · JWT bearer · Swashbuckle</a:t>
-            </a:r>
-            <a:endParaRPr lang="en-US" sz="1250" dirty="0"/>
-          </a:p>
-        </p:txBody>
-      </p:sp>
-      <p:sp>
-        <p:nvSpPr>
-          <p:cNvPr id="10" name="Shape 8"/>
-          <p:cNvSpPr/>
-          <p:nvPr/>
-        </p:nvSpPr>
-        <p:spPr>
-          <a:xfrm>
-            <a:off x="548640" y="3730752"/>
-            <a:ext cx="11091672" cy="777240"/>
-          </a:xfrm>
-          <a:prstGeom prst="roundRect">
-            <a:avLst>
-              <a:gd name="adj" fmla="val 14118"/>
-            </a:avLst>
-          </a:prstGeom>
-          <a:solidFill>
-            <a:srgbClr val="F2F5F8"/>
-          </a:solidFill>
-          <a:ln w="12700">
-            <a:solidFill>
-              <a:srgbClr val="F2F5F8"/>
-            </a:solidFill>
-            <a:prstDash val="solid"/>
-          </a:ln>
-          <a:effectLst>
-            <a:outerShdw blurRad="101600" dist="25400" dir="5400000" algn="bl" rotWithShape="0">
-              <a:srgbClr val="9AA9B5">
-                <a:alpha val="25000"/>
-              </a:srgbClr>
-            </a:outerShdw>
-          </a:effectLst>
-        </p:spPr>
-      </p:sp>
-      <p:sp>
-        <p:nvSpPr>
-          <p:cNvPr id="11" name="Text 9"/>
-          <p:cNvSpPr txBox="1"/>
-          <p:nvPr/>
-        </p:nvSpPr>
-        <p:spPr>
-          <a:xfrm>
-            <a:off x="9537192" y="3730752"/>
-            <a:ext cx="1874520" cy="777240"/>
-          </a:xfrm>
-          <a:prstGeom prst="rect">
-            <a:avLst/>
-          </a:prstGeom>
-          <a:noFill/>
-          <a:ln/>
-        </p:spPr>
-        <p:txBody>
-          <a:bodyPr wrap="square" lIns="0" tIns="0" rIns="0" bIns="0" rtlCol="0" anchor="ctr"/>
-          <a:lstStyle/>
-          <a:p>
-            <a:pPr marL="0" indent="0" algn="r" rtl="1">
-              <a:buNone/>
-            </a:pPr>
-            <a:r>
-              <a:rPr lang="en-US" sz="1600" b="1" dirty="0">
-                <a:solidFill>
-                  <a:srgbClr val="16222E"/>
-                </a:solidFill>
-                <a:latin typeface="Arial" pitchFamily="34" charset="0"/>
-                <a:ea typeface="Arial" pitchFamily="34" charset="-122"/>
-                <a:cs typeface="Arial" pitchFamily="34" charset="-120"/>
-              </a:rPr>
-              <a:t>פאנל ניהול‏</a:t>
-            </a:r>
-            <a:endParaRPr lang="en-US" sz="1600" dirty="0"/>
-          </a:p>
-        </p:txBody>
-      </p:sp>
-      <p:sp>
-        <p:nvSpPr>
-          <p:cNvPr id="12" name="Text 10"/>
-          <p:cNvSpPr txBox="1"/>
-          <p:nvPr/>
-        </p:nvSpPr>
-        <p:spPr>
-          <a:xfrm>
-            <a:off x="822960" y="3730752"/>
-            <a:ext cx="9509760" cy="777240"/>
-          </a:xfrm>
-          <a:prstGeom prst="rect">
-            <a:avLst/>
-          </a:prstGeom>
-          <a:noFill/>
-          <a:ln/>
-        </p:spPr>
-        <p:txBody>
-          <a:bodyPr wrap="square" lIns="0" tIns="0" rIns="0" bIns="0" rtlCol="0" anchor="ctr"/>
-          <a:lstStyle/>
-          <a:p>
-            <a:pPr marL="0" indent="0" algn="r" rtl="1">
-              <a:lnSpc>
-                <a:spcPts val="2000"/>
-              </a:lnSpc>
-              <a:buNone/>
-            </a:pPr>
-            <a:r>
-              <a:rPr lang="en-US" sz="1250" dirty="0">
-                <a:solidFill>
-                  <a:srgbClr val="44566B"/>
-                </a:solidFill>
-                <a:latin typeface="Arial" pitchFamily="34" charset="0"/>
-                <a:ea typeface="Arial" pitchFamily="34" charset="-122"/>
-                <a:cs typeface="Arial" pitchFamily="34" charset="-120"/>
-              </a:rPr>
-              <a:t>React 19 · MUI 9 · Vite · axios</a:t>
-            </a:r>
-            <a:endParaRPr lang="en-US" sz="1250" dirty="0"/>
-          </a:p>
-        </p:txBody>
-      </p:sp>
-      <p:sp>
-        <p:nvSpPr>
-          <p:cNvPr id="13" name="Shape 11"/>
-          <p:cNvSpPr/>
-          <p:nvPr/>
-        </p:nvSpPr>
-        <p:spPr>
-          <a:xfrm>
-            <a:off x="548640" y="4636008"/>
-            <a:ext cx="11091672" cy="777240"/>
-          </a:xfrm>
-          <a:prstGeom prst="roundRect">
-            <a:avLst>
-              <a:gd name="adj" fmla="val 14118"/>
-            </a:avLst>
-          </a:prstGeom>
-          <a:solidFill>
-            <a:srgbClr val="F2F5F8"/>
-          </a:solidFill>
-          <a:ln w="12700">
-            <a:solidFill>
-              <a:srgbClr val="F2F5F8"/>
-            </a:solidFill>
-            <a:prstDash val="solid"/>
-          </a:ln>
-          <a:effectLst>
-            <a:outerShdw blurRad="101600" dist="25400" dir="5400000" algn="bl" rotWithShape="0">
-              <a:srgbClr val="9AA9B5">
-                <a:alpha val="25000"/>
-              </a:srgbClr>
-            </a:outerShdw>
-          </a:effectLst>
-        </p:spPr>
-      </p:sp>
-      <p:sp>
-        <p:nvSpPr>
-          <p:cNvPr id="14" name="Text 12"/>
-          <p:cNvSpPr txBox="1"/>
-          <p:nvPr/>
-        </p:nvSpPr>
-        <p:spPr>
-          <a:xfrm>
-            <a:off x="9537192" y="4636008"/>
-            <a:ext cx="1874520" cy="777240"/>
-          </a:xfrm>
-          <a:prstGeom prst="rect">
-            <a:avLst/>
-          </a:prstGeom>
-          <a:noFill/>
-          <a:ln/>
-        </p:spPr>
-        <p:txBody>
-          <a:bodyPr wrap="square" lIns="0" tIns="0" rIns="0" bIns="0" rtlCol="0" anchor="ctr"/>
-          <a:lstStyle/>
-          <a:p>
-            <a:pPr marL="0" indent="0" algn="r" rtl="1">
-              <a:buNone/>
-            </a:pPr>
-            <a:r>
-              <a:rPr lang="en-US" sz="1600" b="1" dirty="0">
-                <a:solidFill>
-                  <a:srgbClr val="16222E"/>
-                </a:solidFill>
-                <a:latin typeface="Arial" pitchFamily="34" charset="0"/>
-                <a:ea typeface="Arial" pitchFamily="34" charset="-122"/>
-                <a:cs typeface="Arial" pitchFamily="34" charset="-120"/>
-              </a:rPr>
-              <a:t>קושחה‏</a:t>
-            </a:r>
-            <a:endParaRPr lang="en-US" sz="1600" dirty="0"/>
-          </a:p>
-        </p:txBody>
-      </p:sp>
-      <p:sp>
-        <p:nvSpPr>
-          <p:cNvPr id="15" name="Text 13"/>
-          <p:cNvSpPr txBox="1"/>
-          <p:nvPr/>
-        </p:nvSpPr>
-        <p:spPr>
-          <a:xfrm>
-            <a:off x="822960" y="4636008"/>
-            <a:ext cx="9509760" cy="777240"/>
-          </a:xfrm>
-          <a:prstGeom prst="rect">
-            <a:avLst/>
-          </a:prstGeom>
-          <a:noFill/>
-          <a:ln/>
-        </p:spPr>
-        <p:txBody>
-          <a:bodyPr wrap="square" lIns="0" tIns="0" rIns="0" bIns="0" rtlCol="0" anchor="ctr"/>
-          <a:lstStyle/>
-          <a:p>
-            <a:pPr marL="0" indent="0" algn="r" rtl="1">
-              <a:lnSpc>
-                <a:spcPts val="2000"/>
-              </a:lnSpc>
-              <a:buNone/>
-            </a:pPr>
-            <a:r>
-              <a:rPr lang="en-US" sz="1250" dirty="0">
-                <a:solidFill>
-                  <a:srgbClr val="44566B"/>
-                </a:solidFill>
-                <a:latin typeface="Arial" pitchFamily="34" charset="0"/>
-                <a:ea typeface="Arial" pitchFamily="34" charset="-122"/>
-                <a:cs typeface="Arial" pitchFamily="34" charset="-120"/>
-              </a:rPr>
-              <a:t>‏ESP32‏ · מנהל התקן ‏TWAI/CAN · ArduinoJson · WebServer‏‏</a:t>
-            </a:r>
-            <a:endParaRPr lang="en-US" sz="1250" dirty="0"/>
-          </a:p>
-        </p:txBody>
-      </p:sp>
-      <p:sp>
-        <p:nvSpPr>
-          <p:cNvPr id="16" name="Shape 14"/>
-          <p:cNvSpPr/>
-          <p:nvPr/>
-        </p:nvSpPr>
-        <p:spPr>
-          <a:xfrm>
-            <a:off x="548640" y="5541264"/>
-            <a:ext cx="11091672" cy="777240"/>
-          </a:xfrm>
-          <a:prstGeom prst="roundRect">
-            <a:avLst>
-              <a:gd name="adj" fmla="val 14118"/>
-            </a:avLst>
-          </a:prstGeom>
-          <a:solidFill>
-            <a:srgbClr val="F2F5F8"/>
-          </a:solidFill>
-          <a:ln w="12700">
-            <a:solidFill>
-              <a:srgbClr val="F2F5F8"/>
-            </a:solidFill>
-            <a:prstDash val="solid"/>
-          </a:ln>
-          <a:effectLst>
-            <a:outerShdw blurRad="101600" dist="25400" dir="5400000" algn="bl" rotWithShape="0">
-              <a:srgbClr val="9AA9B5">
-                <a:alpha val="25000"/>
-              </a:srgbClr>
-            </a:outerShdw>
-          </a:effectLst>
-        </p:spPr>
-      </p:sp>
-      <p:sp>
-        <p:nvSpPr>
-          <p:cNvPr id="17" name="Text 15"/>
-          <p:cNvSpPr txBox="1"/>
-          <p:nvPr/>
-        </p:nvSpPr>
-        <p:spPr>
-          <a:xfrm>
-            <a:off x="9537192" y="5541264"/>
-            <a:ext cx="1874520" cy="777240"/>
-          </a:xfrm>
-          <a:prstGeom prst="rect">
-            <a:avLst/>
-          </a:prstGeom>
-          <a:noFill/>
-          <a:ln/>
-        </p:spPr>
-        <p:txBody>
-          <a:bodyPr wrap="square" lIns="0" tIns="0" rIns="0" bIns="0" rtlCol="0" anchor="ctr"/>
-          <a:lstStyle/>
-          <a:p>
-            <a:pPr marL="0" indent="0" algn="r" rtl="1">
-              <a:buNone/>
-            </a:pPr>
-            <a:r>
-              <a:rPr lang="en-US" sz="1600" b="1" dirty="0">
-                <a:solidFill>
-                  <a:srgbClr val="16222E"/>
-                </a:solidFill>
-                <a:latin typeface="Arial" pitchFamily="34" charset="0"/>
-                <a:ea typeface="Arial" pitchFamily="34" charset="-122"/>
-                <a:cs typeface="Arial" pitchFamily="34" charset="-120"/>
-              </a:rPr>
-              <a:t>אחסון וענן‏</a:t>
-            </a:r>
-            <a:endParaRPr lang="en-US" sz="1600" dirty="0"/>
-          </a:p>
-        </p:txBody>
-      </p:sp>
-      <p:sp>
-        <p:nvSpPr>
-          <p:cNvPr id="18" name="Text 16"/>
-          <p:cNvSpPr txBox="1"/>
-          <p:nvPr/>
-        </p:nvSpPr>
-        <p:spPr>
-          <a:xfrm>
-            <a:off x="822960" y="5541264"/>
-            <a:ext cx="9509760" cy="777240"/>
-          </a:xfrm>
-          <a:prstGeom prst="rect">
-            <a:avLst/>
-          </a:prstGeom>
-          <a:noFill/>
-          <a:ln/>
-        </p:spPr>
-        <p:txBody>
-          <a:bodyPr wrap="square" lIns="0" tIns="0" rIns="0" bIns="0" rtlCol="0" anchor="ctr"/>
-          <a:lstStyle/>
-          <a:p>
-            <a:pPr marL="0" indent="0" algn="r" rtl="1">
-              <a:lnSpc>
-                <a:spcPts val="2000"/>
-              </a:lnSpc>
-              <a:buNone/>
-            </a:pPr>
-            <a:r>
-              <a:rPr lang="en-US" sz="1250" dirty="0">
-                <a:solidFill>
-                  <a:srgbClr val="44566B"/>
-                </a:solidFill>
-                <a:latin typeface="Arial" pitchFamily="34" charset="0"/>
-                <a:ea typeface="Arial" pitchFamily="34" charset="-122"/>
-                <a:cs typeface="Arial" pitchFamily="34" charset="-120"/>
-              </a:rPr>
-              <a:t>השרת ובסיס הנתונים ב-‏Somee‏ · פאנל הניהול ב-‏Netlify‏‏</a:t>
-            </a:r>
-            <a:endParaRPr lang="en-US" sz="1250" dirty="0"/>
-          </a:p>
-        </p:txBody>
-      </p:sp>
-    </p:spTree>
-  </p:cSld>
-  <p:clrMapOvr>
-    <a:masterClrMapping/>
-  </p:clrMapOvr>
-</p:sld>
-</file>
-
-<file path=ppt/slides/slide15.xml><?xml version="1.0" encoding="utf-8"?>
+<file path=ppt/slides/slide12.xml><?xml version="1.0" encoding="utf-8"?>
 <p:sld xmlns:a="http://schemas.openxmlformats.org/drawingml/2006/main" xmlns:r="http://schemas.openxmlformats.org/officeDocument/2006/relationships" xmlns:p="http://schemas.openxmlformats.org/presentationml/2006/main">
   <p:cSld name="Slide 15">
     <p:bg>
@@ -5995,7 +3827,84 @@
                 <a:ea typeface="Arial" pitchFamily="34" charset="-122"/>
                 <a:cs typeface="Arial" pitchFamily="34" charset="-120"/>
               </a:rPr>
-              <a:t>מה המערכת לא עושה, וזה בכוונה‏</a:t>
+              <a:t>מה המערכת </a:t>
+            </a:r>
+            <a:r>
+              <a:rPr lang="en-US" sz="3600" b="1" dirty="0" err="1">
+                <a:solidFill>
+                  <a:srgbClr val="16222E"/>
+                </a:solidFill>
+                <a:latin typeface="Arial" pitchFamily="34" charset="0"/>
+                <a:ea typeface="Arial" pitchFamily="34" charset="-122"/>
+                <a:cs typeface="Arial" pitchFamily="34" charset="-120"/>
+              </a:rPr>
+              <a:t>לא</a:t>
+            </a:r>
+            <a:r>
+              <a:rPr lang="en-US" sz="3600" b="1" dirty="0">
+                <a:solidFill>
+                  <a:srgbClr val="16222E"/>
+                </a:solidFill>
+                <a:latin typeface="Arial" pitchFamily="34" charset="0"/>
+                <a:ea typeface="Arial" pitchFamily="34" charset="-122"/>
+                <a:cs typeface="Arial" pitchFamily="34" charset="-120"/>
+              </a:rPr>
+              <a:t> </a:t>
+            </a:r>
+            <a:r>
+              <a:rPr lang="en-US" sz="3600" b="1" dirty="0" err="1">
+                <a:solidFill>
+                  <a:srgbClr val="16222E"/>
+                </a:solidFill>
+                <a:latin typeface="Arial" pitchFamily="34" charset="0"/>
+                <a:ea typeface="Arial" pitchFamily="34" charset="-122"/>
+                <a:cs typeface="Arial" pitchFamily="34" charset="-120"/>
+              </a:rPr>
+              <a:t>עושה</a:t>
+            </a:r>
+            <a:r>
+              <a:rPr lang="en-US" sz="3600" b="1" dirty="0">
+                <a:solidFill>
+                  <a:srgbClr val="16222E"/>
+                </a:solidFill>
+                <a:latin typeface="Arial" pitchFamily="34" charset="0"/>
+                <a:ea typeface="Arial" pitchFamily="34" charset="-122"/>
+                <a:cs typeface="Arial" pitchFamily="34" charset="-120"/>
+              </a:rPr>
+              <a:t>,</a:t>
+            </a:r>
+            <a:r>
+              <a:rPr lang="he-IL" sz="3600" b="1" dirty="0">
+                <a:solidFill>
+                  <a:srgbClr val="16222E"/>
+                </a:solidFill>
+                <a:latin typeface="Arial" pitchFamily="34" charset="0"/>
+                <a:ea typeface="Arial" pitchFamily="34" charset="-122"/>
+                <a:cs typeface="Arial" pitchFamily="34" charset="-120"/>
+              </a:rPr>
+              <a:t> </a:t>
+            </a:r>
+            <a:r>
+              <a:rPr lang="en-US" sz="3600" b="1" dirty="0" err="1">
+                <a:solidFill>
+                  <a:srgbClr val="16222E"/>
+                </a:solidFill>
+                <a:latin typeface="Arial" pitchFamily="34" charset="0"/>
+                <a:ea typeface="Arial" pitchFamily="34" charset="-122"/>
+                <a:cs typeface="Arial" pitchFamily="34" charset="-120"/>
+              </a:rPr>
+              <a:t>וזה</a:t>
+            </a:r>
+            <a:r>
+              <a:rPr lang="en-US" sz="3600" b="1" dirty="0">
+                <a:solidFill>
+                  <a:srgbClr val="16222E"/>
+                </a:solidFill>
+                <a:latin typeface="Arial" pitchFamily="34" charset="0"/>
+                <a:ea typeface="Arial" pitchFamily="34" charset="-122"/>
+                <a:cs typeface="Arial" pitchFamily="34" charset="-120"/>
+              </a:rPr>
+              <a:t> בכוונה‏</a:t>
             </a:r>
             <a:endParaRPr lang="en-US" sz="3600" dirty="0"/>
           </a:p>
@@ -6034,6 +3943,13 @@
             </a:outerShdw>
           </a:effectLst>
         </p:spPr>
+        <p:txBody>
+          <a:bodyPr/>
+          <a:lstStyle/>
+          <a:p>
+            <a:endParaRPr lang="en-US"/>
+          </a:p>
+        </p:txBody>
       </p:sp>
       <p:sp>
         <p:nvSpPr>
@@ -6149,6 +4065,13 @@
             </a:outerShdw>
           </a:effectLst>
         </p:spPr>
+        <p:txBody>
+          <a:bodyPr/>
+          <a:lstStyle/>
+          <a:p>
+            <a:endParaRPr lang="en-US"/>
+          </a:p>
+        </p:txBody>
       </p:sp>
       <p:sp>
         <p:nvSpPr>
@@ -6264,6 +4187,13 @@
             </a:outerShdw>
           </a:effectLst>
         </p:spPr>
+        <p:txBody>
+          <a:bodyPr/>
+          <a:lstStyle/>
+          <a:p>
+            <a:endParaRPr lang="en-US"/>
+          </a:p>
+        </p:txBody>
       </p:sp>
       <p:sp>
         <p:nvSpPr>
@@ -6348,13 +4278,13 @@
       </p:sp>
       <p:sp>
         <p:nvSpPr>
-          <p:cNvPr id="13" name="Shape 11"/>
+          <p:cNvPr id="16" name="Shape 14"/>
           <p:cNvSpPr/>
           <p:nvPr/>
         </p:nvSpPr>
         <p:spPr>
           <a:xfrm>
-            <a:off x="8028432" y="3611880"/>
+            <a:off x="4288536" y="3611880"/>
             <a:ext cx="3611880" cy="1691640"/>
           </a:xfrm>
           <a:prstGeom prst="roundRect">
@@ -6379,16 +4309,23 @@
             </a:outerShdw>
           </a:effectLst>
         </p:spPr>
-      </p:sp>
-      <p:sp>
-        <p:nvSpPr>
-          <p:cNvPr id="14" name="Text 12"/>
-          <p:cNvSpPr txBox="1"/>
-          <p:nvPr/>
-        </p:nvSpPr>
-        <p:spPr>
-          <a:xfrm>
-            <a:off x="8229600" y="3758184"/>
+        <p:txBody>
+          <a:bodyPr/>
+          <a:lstStyle/>
+          <a:p>
+            <a:endParaRPr lang="en-US" dirty="0"/>
+          </a:p>
+        </p:txBody>
+      </p:sp>
+      <p:sp>
+        <p:nvSpPr>
+          <p:cNvPr id="17" name="Text 15"/>
+          <p:cNvSpPr txBox="1"/>
+          <p:nvPr/>
+        </p:nvSpPr>
+        <p:spPr>
+          <a:xfrm>
+            <a:off x="4489704" y="3758184"/>
             <a:ext cx="3209544" cy="548640"/>
           </a:xfrm>
           <a:prstGeom prst="rect">
@@ -6413,7 +4350,7 @@
                 <a:ea typeface="Arial" pitchFamily="34" charset="-122"/>
                 <a:cs typeface="Arial" pitchFamily="34" charset="-120"/>
               </a:rPr>
-              <a:t>קנס התנועה הוא הנחת מודל‏</a:t>
+              <a:t>מרחקים למוסכים אוויריים‏</a:t>
             </a:r>
             <a:endParaRPr lang="en-US" sz="1450" dirty="0"/>
           </a:p>
@@ -6421,13 +4358,13 @@
       </p:sp>
       <p:sp>
         <p:nvSpPr>
-          <p:cNvPr id="15" name="Text 13"/>
-          <p:cNvSpPr txBox="1"/>
-          <p:nvPr/>
-        </p:nvSpPr>
-        <p:spPr>
-          <a:xfrm>
-            <a:off x="8229600" y="4343400"/>
+          <p:cNvPr id="18" name="Text 16"/>
+          <p:cNvSpPr txBox="1"/>
+          <p:nvPr/>
+        </p:nvSpPr>
+        <p:spPr>
+          <a:xfrm>
+            <a:off x="4489704" y="4343400"/>
             <a:ext cx="3209544" cy="822960"/>
           </a:xfrm>
           <a:prstGeom prst="rect">
@@ -6447,6 +4384,17 @@
               <a:buNone/>
             </a:pPr>
             <a:r>
+              <a:rPr lang="en-US" sz="1200" dirty="0" err="1">
+                <a:solidFill>
+                  <a:srgbClr val="44566B"/>
+                </a:solidFill>
+                <a:latin typeface="Arial" pitchFamily="34" charset="0"/>
+                <a:ea typeface="Arial" pitchFamily="34" charset="-122"/>
+                <a:cs typeface="Arial" pitchFamily="34" charset="-120"/>
+              </a:rPr>
+              <a:t>כפתור</a:t>
+            </a:r>
+            <a:r>
               <a:rPr lang="en-US" sz="1200" dirty="0">
                 <a:solidFill>
                   <a:srgbClr val="44566B"/>
@@ -6455,276 +4403,7 @@
                 <a:ea typeface="Arial" pitchFamily="34" charset="-122"/>
                 <a:cs typeface="Arial" pitchFamily="34" charset="-120"/>
               </a:rPr>
-              <a:t>ולא קבוע שנמדד בשטח מול צריכה אמיתית בפקקים‏</a:t>
-            </a:r>
-            <a:endParaRPr lang="en-US" sz="1200" dirty="0"/>
-          </a:p>
-        </p:txBody>
-      </p:sp>
-      <p:sp>
-        <p:nvSpPr>
-          <p:cNvPr id="16" name="Shape 14"/>
-          <p:cNvSpPr/>
-          <p:nvPr/>
-        </p:nvSpPr>
-        <p:spPr>
-          <a:xfrm>
-            <a:off x="4288536" y="3611880"/>
-            <a:ext cx="3611880" cy="1691640"/>
-          </a:xfrm>
-          <a:prstGeom prst="roundRect">
-            <a:avLst>
-              <a:gd name="adj" fmla="val 6486"/>
-            </a:avLst>
-          </a:prstGeom>
-          <a:solidFill>
-            <a:srgbClr val="F2F5F8"/>
-          </a:solidFill>
-          <a:ln w="12700">
-            <a:solidFill>
-              <a:srgbClr val="F2F5F8"/>
-            </a:solidFill>
-            <a:prstDash val="solid"/>
-          </a:ln>
-          <a:effectLst>
-            <a:outerShdw blurRad="101600" dist="25400" dir="5400000" algn="bl" rotWithShape="0">
-              <a:srgbClr val="9AA9B5">
-                <a:alpha val="25000"/>
-              </a:srgbClr>
-            </a:outerShdw>
-          </a:effectLst>
-        </p:spPr>
-      </p:sp>
-      <p:sp>
-        <p:nvSpPr>
-          <p:cNvPr id="17" name="Text 15"/>
-          <p:cNvSpPr txBox="1"/>
-          <p:nvPr/>
-        </p:nvSpPr>
-        <p:spPr>
-          <a:xfrm>
-            <a:off x="4489704" y="3758184"/>
-            <a:ext cx="3209544" cy="548640"/>
-          </a:xfrm>
-          <a:prstGeom prst="rect">
-            <a:avLst/>
-          </a:prstGeom>
-          <a:noFill/>
-          <a:ln/>
-        </p:spPr>
-        <p:txBody>
-          <a:bodyPr wrap="square" lIns="0" tIns="0" rIns="0" bIns="0" rtlCol="0" anchor="t"/>
-          <a:lstStyle/>
-          <a:p>
-            <a:pPr marL="0" indent="0" algn="r" rtl="1">
-              <a:buNone/>
-            </a:pPr>
-            <a:r>
-              <a:rPr lang="en-US" sz="1450" b="1" dirty="0">
-                <a:solidFill>
-                  <a:srgbClr val="16222E"/>
-                </a:solidFill>
-                <a:latin typeface="Arial" pitchFamily="34" charset="0"/>
-                <a:ea typeface="Arial" pitchFamily="34" charset="-122"/>
-                <a:cs typeface="Arial" pitchFamily="34" charset="-120"/>
-              </a:rPr>
-              <a:t>מרחקים למוסכים אוויריים‏</a:t>
-            </a:r>
-            <a:endParaRPr lang="en-US" sz="1450" dirty="0"/>
-          </a:p>
-        </p:txBody>
-      </p:sp>
-      <p:sp>
-        <p:nvSpPr>
-          <p:cNvPr id="18" name="Text 16"/>
-          <p:cNvSpPr txBox="1"/>
-          <p:nvPr/>
-        </p:nvSpPr>
-        <p:spPr>
-          <a:xfrm>
-            <a:off x="4489704" y="4343400"/>
-            <a:ext cx="3209544" cy="822960"/>
-          </a:xfrm>
-          <a:prstGeom prst="rect">
-            <a:avLst/>
-          </a:prstGeom>
-          <a:noFill/>
-          <a:ln/>
-        </p:spPr>
-        <p:txBody>
-          <a:bodyPr wrap="square" lIns="0" tIns="0" rIns="0" bIns="0" rtlCol="0" anchor="t"/>
-          <a:lstStyle/>
-          <a:p>
-            <a:pPr marL="0" indent="0" algn="r" rtl="1">
-              <a:lnSpc>
-                <a:spcPts val="1900"/>
-              </a:lnSpc>
-              <a:buNone/>
-            </a:pPr>
-            <a:r>
-              <a:rPr lang="en-US" sz="1200" dirty="0">
-                <a:solidFill>
-                  <a:srgbClr val="44566B"/>
-                </a:solidFill>
-                <a:latin typeface="Arial" pitchFamily="34" charset="0"/>
-                <a:ea typeface="Arial" pitchFamily="34" charset="-122"/>
-                <a:cs typeface="Arial" pitchFamily="34" charset="-120"/>
-              </a:rPr>
-              <a:t>מספיק כדי לדרג; כפתור הניווט מעביר את המסלול האמיתי ל-‏Google‏‏</a:t>
-            </a:r>
-            <a:endParaRPr lang="en-US" sz="1200" dirty="0"/>
-          </a:p>
-        </p:txBody>
-      </p:sp>
-      <p:sp>
-        <p:nvSpPr>
-          <p:cNvPr id="19" name="Shape 17"/>
-          <p:cNvSpPr/>
-          <p:nvPr/>
-        </p:nvSpPr>
-        <p:spPr>
-          <a:xfrm>
-            <a:off x="548640" y="3611880"/>
-            <a:ext cx="3611880" cy="1691640"/>
-          </a:xfrm>
-          <a:prstGeom prst="roundRect">
-            <a:avLst>
-              <a:gd name="adj" fmla="val 6486"/>
-            </a:avLst>
-          </a:prstGeom>
-          <a:solidFill>
-            <a:srgbClr val="F2F5F8"/>
-          </a:solidFill>
-          <a:ln w="12700">
-            <a:solidFill>
-              <a:srgbClr val="F2F5F8"/>
-            </a:solidFill>
-            <a:prstDash val="solid"/>
-          </a:ln>
-          <a:effectLst>
-            <a:outerShdw blurRad="101600" dist="25400" dir="5400000" algn="bl" rotWithShape="0">
-              <a:srgbClr val="9AA9B5">
-                <a:alpha val="25000"/>
-              </a:srgbClr>
-            </a:outerShdw>
-          </a:effectLst>
-        </p:spPr>
-      </p:sp>
-      <p:sp>
-        <p:nvSpPr>
-          <p:cNvPr id="20" name="Text 18"/>
-          <p:cNvSpPr txBox="1"/>
-          <p:nvPr/>
-        </p:nvSpPr>
-        <p:spPr>
-          <a:xfrm>
-            <a:off x="749808" y="3758184"/>
-            <a:ext cx="3209544" cy="548640"/>
-          </a:xfrm>
-          <a:prstGeom prst="rect">
-            <a:avLst/>
-          </a:prstGeom>
-          <a:noFill/>
-          <a:ln/>
-        </p:spPr>
-        <p:txBody>
-          <a:bodyPr wrap="square" lIns="0" tIns="0" rIns="0" bIns="0" rtlCol="0" anchor="t"/>
-          <a:lstStyle/>
-          <a:p>
-            <a:pPr marL="0" indent="0" algn="r" rtl="1">
-              <a:buNone/>
-            </a:pPr>
-            <a:r>
-              <a:rPr lang="en-US" sz="1450" b="1" dirty="0">
-                <a:solidFill>
-                  <a:srgbClr val="16222E"/>
-                </a:solidFill>
-                <a:latin typeface="Arial" pitchFamily="34" charset="0"/>
-                <a:ea typeface="Arial" pitchFamily="34" charset="-122"/>
-                <a:cs typeface="Arial" pitchFamily="34" charset="-120"/>
-              </a:rPr>
-              <a:t>מיקום ברקע לא זמין ב-‏Expo Go‏‏</a:t>
-            </a:r>
-            <a:endParaRPr lang="en-US" sz="1450" dirty="0"/>
-          </a:p>
-        </p:txBody>
-      </p:sp>
-      <p:sp>
-        <p:nvSpPr>
-          <p:cNvPr id="21" name="Text 19"/>
-          <p:cNvSpPr txBox="1"/>
-          <p:nvPr/>
-        </p:nvSpPr>
-        <p:spPr>
-          <a:xfrm>
-            <a:off x="749808" y="4343400"/>
-            <a:ext cx="3209544" cy="822960"/>
-          </a:xfrm>
-          <a:prstGeom prst="rect">
-            <a:avLst/>
-          </a:prstGeom>
-          <a:noFill/>
-          <a:ln/>
-        </p:spPr>
-        <p:txBody>
-          <a:bodyPr wrap="square" lIns="0" tIns="0" rIns="0" bIns="0" rtlCol="0" anchor="t"/>
-          <a:lstStyle/>
-          <a:p>
-            <a:pPr marL="0" indent="0" algn="r" rtl="1">
-              <a:lnSpc>
-                <a:spcPts val="1900"/>
-              </a:lnSpc>
-              <a:buNone/>
-            </a:pPr>
-            <a:r>
-              <a:rPr lang="en-US" sz="1200" dirty="0">
-                <a:solidFill>
-                  <a:srgbClr val="44566B"/>
-                </a:solidFill>
-                <a:latin typeface="Arial" pitchFamily="34" charset="0"/>
-                <a:ea typeface="Arial" pitchFamily="34" charset="-122"/>
-                <a:cs typeface="Arial" pitchFamily="34" charset="-120"/>
-              </a:rPr>
-              <a:t>ולכן בהגדרות יש כפתור שמפעיל את התראת הבטיחות ישירות להדגמה‏</a:t>
-            </a:r>
-            <a:endParaRPr lang="en-US" sz="1200" dirty="0"/>
-          </a:p>
-        </p:txBody>
-      </p:sp>
-      <p:sp>
-        <p:nvSpPr>
-          <p:cNvPr id="22" name="Text 20"/>
-          <p:cNvSpPr txBox="1"/>
-          <p:nvPr/>
-        </p:nvSpPr>
-        <p:spPr>
-          <a:xfrm>
-            <a:off x="548640" y="5669280"/>
-            <a:ext cx="11091672" cy="365760"/>
-          </a:xfrm>
-          <a:prstGeom prst="rect">
-            <a:avLst/>
-          </a:prstGeom>
-          <a:noFill/>
-          <a:ln/>
-        </p:spPr>
-        <p:txBody>
-          <a:bodyPr wrap="square" rtlCol="0" anchor="t"/>
-          <a:lstStyle/>
-          <a:p>
-            <a:pPr marL="0" indent="0" algn="r" rtl="1">
-              <a:buNone/>
-            </a:pPr>
-            <a:r>
-              <a:rPr lang="en-US" sz="1200" dirty="0">
-                <a:solidFill>
-                  <a:srgbClr val="6B7A88"/>
-                </a:solidFill>
-                <a:latin typeface="Arial" pitchFamily="34" charset="0"/>
-                <a:ea typeface="Arial" pitchFamily="34" charset="-122"/>
-                <a:cs typeface="Arial" pitchFamily="34" charset="-120"/>
-              </a:rPr>
-              <a:t>אלה גבולות תכנון שהוצגו במפורש, לא פספוסים.‏</a:t>
+              <a:t> הניווט מעביר את המסלול האמיתי ל-‏Google‏‏</a:t>
             </a:r>
             <a:endParaRPr lang="en-US" sz="1200" dirty="0"/>
           </a:p>
@@ -6738,7 +4417,7 @@
 </p:sld>
 </file>
 
-<file path=ppt/slides/slide16.xml><?xml version="1.0" encoding="utf-8"?>
+<file path=ppt/slides/slide13.xml><?xml version="1.0" encoding="utf-8"?>
 <p:sld xmlns:a="http://schemas.openxmlformats.org/drawingml/2006/main" xmlns:r="http://schemas.openxmlformats.org/officeDocument/2006/relationships" xmlns:p="http://schemas.openxmlformats.org/presentationml/2006/main">
   <p:cSld name="Slide 16">
     <p:bg>
@@ -6843,13 +4522,80 @@
       </p:sp>
       <p:sp>
         <p:nvSpPr>
-          <p:cNvPr id="4" name="Shape 2"/>
+          <p:cNvPr id="8" name="Text 6"/>
+          <p:cNvSpPr txBox="1"/>
+          <p:nvPr/>
+        </p:nvSpPr>
+        <p:spPr>
+          <a:xfrm>
+            <a:off x="6144768" y="2331720"/>
+            <a:ext cx="2697480" cy="868680"/>
+          </a:xfrm>
+          <a:prstGeom prst="rect">
+            <a:avLst/>
+          </a:prstGeom>
+          <a:noFill/>
+          <a:ln/>
+        </p:spPr>
+        <p:txBody>
+          <a:bodyPr wrap="square" lIns="0" tIns="0" rIns="0" bIns="0" rtlCol="0" anchor="ctr"/>
+          <a:lstStyle/>
+          <a:p>
+            <a:pPr marL="0" indent="0" algn="ctr">
+              <a:buNone/>
+            </a:pPr>
+            <a:endParaRPr lang="en-US" sz="4600" dirty="0"/>
+          </a:p>
+        </p:txBody>
+      </p:sp>
+      <p:sp>
+        <p:nvSpPr>
+          <p:cNvPr id="9" name="Text 7"/>
+          <p:cNvSpPr txBox="1"/>
+          <p:nvPr/>
+        </p:nvSpPr>
+        <p:spPr>
+          <a:xfrm>
+            <a:off x="6144768" y="3200400"/>
+            <a:ext cx="2697480" cy="457200"/>
+          </a:xfrm>
+          <a:prstGeom prst="rect">
+            <a:avLst/>
+          </a:prstGeom>
+          <a:noFill/>
+          <a:ln/>
+        </p:spPr>
+        <p:txBody>
+          <a:bodyPr wrap="square" lIns="0" tIns="0" rIns="0" bIns="0" rtlCol="0" anchor="ctr"/>
+          <a:lstStyle/>
+          <a:p>
+            <a:pPr marL="0" indent="0" algn="ctr" rtl="1">
+              <a:buNone/>
+            </a:pPr>
+            <a:r>
+              <a:rPr lang="en-US" sz="1300" dirty="0">
+                <a:solidFill>
+                  <a:srgbClr val="C6D2DC"/>
+                </a:solidFill>
+                <a:latin typeface="Arial" pitchFamily="34" charset="0"/>
+                <a:ea typeface="Arial" pitchFamily="34" charset="-122"/>
+                <a:cs typeface="Arial" pitchFamily="34" charset="-120"/>
+              </a:rPr>
+              <a:t>‏</a:t>
+            </a:r>
+            <a:endParaRPr lang="en-US" sz="1300" dirty="0"/>
+          </a:p>
+        </p:txBody>
+      </p:sp>
+      <p:sp>
+        <p:nvSpPr>
+          <p:cNvPr id="10" name="Shape 8"/>
           <p:cNvSpPr/>
           <p:nvPr/>
         </p:nvSpPr>
         <p:spPr>
           <a:xfrm>
-            <a:off x="8942832" y="2194560"/>
+            <a:off x="3346704" y="2194560"/>
             <a:ext cx="2697480" cy="1691640"/>
           </a:xfrm>
           <a:prstGeom prst="roundRect">
@@ -6867,16 +4613,23 @@
             <a:prstDash val="solid"/>
           </a:ln>
         </p:spPr>
-      </p:sp>
-      <p:sp>
-        <p:nvSpPr>
-          <p:cNvPr id="5" name="Text 3"/>
-          <p:cNvSpPr txBox="1"/>
-          <p:nvPr/>
-        </p:nvSpPr>
-        <p:spPr>
-          <a:xfrm>
-            <a:off x="8942832" y="2331720"/>
+        <p:txBody>
+          <a:bodyPr/>
+          <a:lstStyle/>
+          <a:p>
+            <a:endParaRPr lang="en-US"/>
+          </a:p>
+        </p:txBody>
+      </p:sp>
+      <p:sp>
+        <p:nvSpPr>
+          <p:cNvPr id="11" name="Text 9"/>
+          <p:cNvSpPr txBox="1"/>
+          <p:nvPr/>
+        </p:nvSpPr>
+        <p:spPr>
+          <a:xfrm>
+            <a:off x="3346704" y="2331720"/>
             <a:ext cx="2697480" cy="868680"/>
           </a:xfrm>
           <a:prstGeom prst="rect">
@@ -6901,7 +4654,7 @@
                 <a:ea typeface="Arial" pitchFamily="34" charset="-122"/>
                 <a:cs typeface="Arial" pitchFamily="34" charset="-120"/>
               </a:rPr>
-              <a:t>5</a:t>
+              <a:t>34</a:t>
             </a:r>
             <a:endParaRPr lang="en-US" sz="4600" dirty="0"/>
           </a:p>
@@ -6909,13 +4662,13 @@
       </p:sp>
       <p:sp>
         <p:nvSpPr>
-          <p:cNvPr id="6" name="Text 4"/>
-          <p:cNvSpPr txBox="1"/>
-          <p:nvPr/>
-        </p:nvSpPr>
-        <p:spPr>
-          <a:xfrm>
-            <a:off x="8942832" y="3200400"/>
+          <p:cNvPr id="12" name="Text 10"/>
+          <p:cNvSpPr txBox="1"/>
+          <p:nvPr/>
+        </p:nvSpPr>
+        <p:spPr>
+          <a:xfrm>
+            <a:off x="3346704" y="3200400"/>
             <a:ext cx="2697480" cy="457200"/>
           </a:xfrm>
           <a:prstGeom prst="rect">
@@ -6940,7 +4693,7 @@
                 <a:ea typeface="Arial" pitchFamily="34" charset="-122"/>
                 <a:cs typeface="Arial" pitchFamily="34" charset="-120"/>
               </a:rPr>
-              <a:t>רכיבים במערכת‏</a:t>
+              <a:t>קודי תקלה במילון‏</a:t>
             </a:r>
             <a:endParaRPr lang="en-US" sz="1300" dirty="0"/>
           </a:p>
@@ -6948,13 +4701,13 @@
       </p:sp>
       <p:sp>
         <p:nvSpPr>
-          <p:cNvPr id="7" name="Shape 5"/>
+          <p:cNvPr id="13" name="Shape 11"/>
           <p:cNvSpPr/>
           <p:nvPr/>
         </p:nvSpPr>
         <p:spPr>
           <a:xfrm>
-            <a:off x="6144768" y="2194560"/>
+            <a:off x="548640" y="2194560"/>
             <a:ext cx="2697480" cy="1691640"/>
           </a:xfrm>
           <a:prstGeom prst="roundRect">
@@ -6972,216 +4725,13 @@
             <a:prstDash val="solid"/>
           </a:ln>
         </p:spPr>
-      </p:sp>
-      <p:sp>
-        <p:nvSpPr>
-          <p:cNvPr id="8" name="Text 6"/>
-          <p:cNvSpPr txBox="1"/>
-          <p:nvPr/>
-        </p:nvSpPr>
-        <p:spPr>
-          <a:xfrm>
-            <a:off x="6144768" y="2331720"/>
-            <a:ext cx="2697480" cy="868680"/>
-          </a:xfrm>
-          <a:prstGeom prst="rect">
-            <a:avLst/>
-          </a:prstGeom>
-          <a:noFill/>
-          <a:ln/>
-        </p:spPr>
-        <p:txBody>
-          <a:bodyPr wrap="square" lIns="0" tIns="0" rIns="0" bIns="0" rtlCol="0" anchor="ctr"/>
-          <a:lstStyle/>
-          <a:p>
-            <a:pPr marL="0" indent="0" algn="ctr">
-              <a:buNone/>
-            </a:pPr>
-            <a:r>
-              <a:rPr lang="en-US" sz="4600" b="1" dirty="0">
-                <a:solidFill>
-                  <a:srgbClr val="F5A623"/>
-                </a:solidFill>
-                <a:latin typeface="Arial" pitchFamily="34" charset="0"/>
-                <a:ea typeface="Arial" pitchFamily="34" charset="-122"/>
-                <a:cs typeface="Arial" pitchFamily="34" charset="-120"/>
-              </a:rPr>
-              <a:t>82</a:t>
-            </a:r>
-            <a:endParaRPr lang="en-US" sz="4600" dirty="0"/>
-          </a:p>
-        </p:txBody>
-      </p:sp>
-      <p:sp>
-        <p:nvSpPr>
-          <p:cNvPr id="9" name="Text 7"/>
-          <p:cNvSpPr txBox="1"/>
-          <p:nvPr/>
-        </p:nvSpPr>
-        <p:spPr>
-          <a:xfrm>
-            <a:off x="6144768" y="3200400"/>
-            <a:ext cx="2697480" cy="457200"/>
-          </a:xfrm>
-          <a:prstGeom prst="rect">
-            <a:avLst/>
-          </a:prstGeom>
-          <a:noFill/>
-          <a:ln/>
-        </p:spPr>
-        <p:txBody>
-          <a:bodyPr wrap="square" lIns="0" tIns="0" rIns="0" bIns="0" rtlCol="0" anchor="ctr"/>
-          <a:lstStyle/>
-          <a:p>
-            <a:pPr marL="0" indent="0" algn="ctr" rtl="1">
-              <a:buNone/>
-            </a:pPr>
-            <a:r>
-              <a:rPr lang="en-US" sz="1300" dirty="0">
-                <a:solidFill>
-                  <a:srgbClr val="C6D2DC"/>
-                </a:solidFill>
-                <a:latin typeface="Arial" pitchFamily="34" charset="0"/>
-                <a:ea typeface="Arial" pitchFamily="34" charset="-122"/>
-                <a:cs typeface="Arial" pitchFamily="34" charset="-120"/>
-              </a:rPr>
-              <a:t>בדיקות אוטומטיות‏</a:t>
-            </a:r>
-            <a:endParaRPr lang="en-US" sz="1300" dirty="0"/>
-          </a:p>
-        </p:txBody>
-      </p:sp>
-      <p:sp>
-        <p:nvSpPr>
-          <p:cNvPr id="10" name="Shape 8"/>
-          <p:cNvSpPr/>
-          <p:nvPr/>
-        </p:nvSpPr>
-        <p:spPr>
-          <a:xfrm>
-            <a:off x="3346704" y="2194560"/>
-            <a:ext cx="2697480" cy="1691640"/>
-          </a:xfrm>
-          <a:prstGeom prst="roundRect">
-            <a:avLst>
-              <a:gd name="adj" fmla="val 6486"/>
-            </a:avLst>
-          </a:prstGeom>
-          <a:solidFill>
-            <a:srgbClr val="22323F"/>
-          </a:solidFill>
-          <a:ln w="12700">
-            <a:solidFill>
-              <a:srgbClr val="22323F"/>
-            </a:solidFill>
-            <a:prstDash val="solid"/>
-          </a:ln>
-        </p:spPr>
-      </p:sp>
-      <p:sp>
-        <p:nvSpPr>
-          <p:cNvPr id="11" name="Text 9"/>
-          <p:cNvSpPr txBox="1"/>
-          <p:nvPr/>
-        </p:nvSpPr>
-        <p:spPr>
-          <a:xfrm>
-            <a:off x="3346704" y="2331720"/>
-            <a:ext cx="2697480" cy="868680"/>
-          </a:xfrm>
-          <a:prstGeom prst="rect">
-            <a:avLst/>
-          </a:prstGeom>
-          <a:noFill/>
-          <a:ln/>
-        </p:spPr>
-        <p:txBody>
-          <a:bodyPr wrap="square" lIns="0" tIns="0" rIns="0" bIns="0" rtlCol="0" anchor="ctr"/>
-          <a:lstStyle/>
-          <a:p>
-            <a:pPr marL="0" indent="0" algn="ctr">
-              <a:buNone/>
-            </a:pPr>
-            <a:r>
-              <a:rPr lang="en-US" sz="4600" b="1" dirty="0">
-                <a:solidFill>
-                  <a:srgbClr val="F5A623"/>
-                </a:solidFill>
-                <a:latin typeface="Arial" pitchFamily="34" charset="0"/>
-                <a:ea typeface="Arial" pitchFamily="34" charset="-122"/>
-                <a:cs typeface="Arial" pitchFamily="34" charset="-120"/>
-              </a:rPr>
-              <a:t>34</a:t>
-            </a:r>
-            <a:endParaRPr lang="en-US" sz="4600" dirty="0"/>
-          </a:p>
-        </p:txBody>
-      </p:sp>
-      <p:sp>
-        <p:nvSpPr>
-          <p:cNvPr id="12" name="Text 10"/>
-          <p:cNvSpPr txBox="1"/>
-          <p:nvPr/>
-        </p:nvSpPr>
-        <p:spPr>
-          <a:xfrm>
-            <a:off x="3346704" y="3200400"/>
-            <a:ext cx="2697480" cy="457200"/>
-          </a:xfrm>
-          <a:prstGeom prst="rect">
-            <a:avLst/>
-          </a:prstGeom>
-          <a:noFill/>
-          <a:ln/>
-        </p:spPr>
-        <p:txBody>
-          <a:bodyPr wrap="square" lIns="0" tIns="0" rIns="0" bIns="0" rtlCol="0" anchor="ctr"/>
-          <a:lstStyle/>
-          <a:p>
-            <a:pPr marL="0" indent="0" algn="ctr" rtl="1">
-              <a:buNone/>
-            </a:pPr>
-            <a:r>
-              <a:rPr lang="en-US" sz="1300" dirty="0">
-                <a:solidFill>
-                  <a:srgbClr val="C6D2DC"/>
-                </a:solidFill>
-                <a:latin typeface="Arial" pitchFamily="34" charset="0"/>
-                <a:ea typeface="Arial" pitchFamily="34" charset="-122"/>
-                <a:cs typeface="Arial" pitchFamily="34" charset="-120"/>
-              </a:rPr>
-              <a:t>קודי תקלה במילון‏</a:t>
-            </a:r>
-            <a:endParaRPr lang="en-US" sz="1300" dirty="0"/>
-          </a:p>
-        </p:txBody>
-      </p:sp>
-      <p:sp>
-        <p:nvSpPr>
-          <p:cNvPr id="13" name="Shape 11"/>
-          <p:cNvSpPr/>
-          <p:nvPr/>
-        </p:nvSpPr>
-        <p:spPr>
-          <a:xfrm>
-            <a:off x="548640" y="2194560"/>
-            <a:ext cx="2697480" cy="1691640"/>
-          </a:xfrm>
-          <a:prstGeom prst="roundRect">
-            <a:avLst>
-              <a:gd name="adj" fmla="val 6486"/>
-            </a:avLst>
-          </a:prstGeom>
-          <a:solidFill>
-            <a:srgbClr val="22323F"/>
-          </a:solidFill>
-          <a:ln w="12700">
-            <a:solidFill>
-              <a:srgbClr val="22323F"/>
-            </a:solidFill>
-            <a:prstDash val="solid"/>
-          </a:ln>
-        </p:spPr>
+        <p:txBody>
+          <a:bodyPr/>
+          <a:lstStyle/>
+          <a:p>
+            <a:endParaRPr lang="en-US"/>
+          </a:p>
+        </p:txBody>
       </p:sp>
       <p:sp>
         <p:nvSpPr>
@@ -7328,6 +4878,17 @@
               <a:buNone/>
             </a:pPr>
             <a:r>
+              <a:rPr lang="en-US" sz="1800" b="1" dirty="0" err="1">
+                <a:solidFill>
+                  <a:srgbClr val="F5A623"/>
+                </a:solidFill>
+                <a:latin typeface="Arial" pitchFamily="34" charset="0"/>
+                <a:ea typeface="Arial" pitchFamily="34" charset="-122"/>
+                <a:cs typeface="Arial" pitchFamily="34" charset="-120"/>
+              </a:rPr>
+              <a:t>תודה</a:t>
+            </a:r>
+            <a:r>
               <a:rPr lang="en-US" sz="1800" b="1" dirty="0">
                 <a:solidFill>
                   <a:srgbClr val="F5A623"/>
@@ -7336,7 +4897,7 @@
                 <a:ea typeface="Arial" pitchFamily="34" charset="-122"/>
                 <a:cs typeface="Arial" pitchFamily="34" charset="-120"/>
               </a:rPr>
-              <a:t>תודה  ·  ‏CarStats‏‏</a:t>
+              <a:t>‏‏</a:t>
             </a:r>
             <a:endParaRPr lang="en-US" sz="1800" dirty="0"/>
           </a:p>
@@ -7486,6 +5047,13 @@
             </a:outerShdw>
           </a:effectLst>
         </p:spPr>
+        <p:txBody>
+          <a:bodyPr/>
+          <a:lstStyle/>
+          <a:p>
+            <a:endParaRPr lang="en-US"/>
+          </a:p>
+        </p:txBody>
       </p:sp>
       <p:sp>
         <p:nvSpPr>
@@ -7621,6 +5189,13 @@
             </a:outerShdw>
           </a:effectLst>
         </p:spPr>
+        <p:txBody>
+          <a:bodyPr/>
+          <a:lstStyle/>
+          <a:p>
+            <a:endParaRPr lang="en-US"/>
+          </a:p>
+        </p:txBody>
       </p:sp>
       <p:sp>
         <p:nvSpPr>
@@ -7646,6 +5221,13 @@
             <a:prstDash val="solid"/>
           </a:ln>
         </p:spPr>
+        <p:txBody>
+          <a:bodyPr/>
+          <a:lstStyle/>
+          <a:p>
+            <a:endParaRPr lang="en-US"/>
+          </a:p>
+        </p:txBody>
       </p:sp>
       <p:sp>
         <p:nvSpPr>
@@ -7758,6 +5340,13 @@
             </a:outerShdw>
           </a:effectLst>
         </p:spPr>
+        <p:txBody>
+          <a:bodyPr/>
+          <a:lstStyle/>
+          <a:p>
+            <a:endParaRPr lang="en-US"/>
+          </a:p>
+        </p:txBody>
       </p:sp>
       <p:sp>
         <p:nvSpPr>
@@ -7783,6 +5372,13 @@
             <a:prstDash val="solid"/>
           </a:ln>
         </p:spPr>
+        <p:txBody>
+          <a:bodyPr/>
+          <a:lstStyle/>
+          <a:p>
+            <a:endParaRPr lang="en-US"/>
+          </a:p>
+        </p:txBody>
       </p:sp>
       <p:sp>
         <p:nvSpPr>
@@ -7895,6 +5491,13 @@
             </a:outerShdw>
           </a:effectLst>
         </p:spPr>
+        <p:txBody>
+          <a:bodyPr/>
+          <a:lstStyle/>
+          <a:p>
+            <a:endParaRPr lang="en-US"/>
+          </a:p>
+        </p:txBody>
       </p:sp>
       <p:sp>
         <p:nvSpPr>
@@ -7920,6 +5523,13 @@
             <a:prstDash val="solid"/>
           </a:ln>
         </p:spPr>
+        <p:txBody>
+          <a:bodyPr/>
+          <a:lstStyle/>
+          <a:p>
+            <a:endParaRPr lang="en-US"/>
+          </a:p>
+        </p:txBody>
       </p:sp>
       <p:sp>
         <p:nvSpPr>
@@ -8185,6 +5795,13 @@
             </a:outerShdw>
           </a:effectLst>
         </p:spPr>
+        <p:txBody>
+          <a:bodyPr/>
+          <a:lstStyle/>
+          <a:p>
+            <a:endParaRPr lang="en-US"/>
+          </a:p>
+        </p:txBody>
       </p:sp>
       <p:sp>
         <p:nvSpPr>
@@ -8210,6 +5827,13 @@
             <a:prstDash val="solid"/>
           </a:ln>
         </p:spPr>
+        <p:txBody>
+          <a:bodyPr/>
+          <a:lstStyle/>
+          <a:p>
+            <a:endParaRPr lang="en-US"/>
+          </a:p>
+        </p:txBody>
       </p:sp>
       <p:sp>
         <p:nvSpPr>
@@ -8364,6 +5988,13 @@
             </a:outerShdw>
           </a:effectLst>
         </p:spPr>
+        <p:txBody>
+          <a:bodyPr/>
+          <a:lstStyle/>
+          <a:p>
+            <a:endParaRPr lang="en-US"/>
+          </a:p>
+        </p:txBody>
       </p:sp>
       <p:sp>
         <p:nvSpPr>
@@ -8389,6 +6020,13 @@
             <a:prstDash val="solid"/>
           </a:ln>
         </p:spPr>
+        <p:txBody>
+          <a:bodyPr/>
+          <a:lstStyle/>
+          <a:p>
+            <a:endParaRPr lang="en-US"/>
+          </a:p>
+        </p:txBody>
       </p:sp>
       <p:sp>
         <p:nvSpPr>
@@ -8543,6 +6181,13 @@
             </a:outerShdw>
           </a:effectLst>
         </p:spPr>
+        <p:txBody>
+          <a:bodyPr/>
+          <a:lstStyle/>
+          <a:p>
+            <a:endParaRPr lang="en-US"/>
+          </a:p>
+        </p:txBody>
       </p:sp>
       <p:sp>
         <p:nvSpPr>
@@ -8568,6 +6213,13 @@
             <a:prstDash val="solid"/>
           </a:ln>
         </p:spPr>
+        <p:txBody>
+          <a:bodyPr/>
+          <a:lstStyle/>
+          <a:p>
+            <a:endParaRPr lang="en-US"/>
+          </a:p>
+        </p:txBody>
       </p:sp>
       <p:sp>
         <p:nvSpPr>
@@ -8722,6 +6374,13 @@
             </a:outerShdw>
           </a:effectLst>
         </p:spPr>
+        <p:txBody>
+          <a:bodyPr/>
+          <a:lstStyle/>
+          <a:p>
+            <a:endParaRPr lang="en-US"/>
+          </a:p>
+        </p:txBody>
       </p:sp>
       <p:sp>
         <p:nvSpPr>
@@ -8747,6 +6406,13 @@
             <a:prstDash val="solid"/>
           </a:ln>
         </p:spPr>
+        <p:txBody>
+          <a:bodyPr/>
+          <a:lstStyle/>
+          <a:p>
+            <a:endParaRPr lang="en-US"/>
+          </a:p>
+        </p:txBody>
       </p:sp>
       <p:sp>
         <p:nvSpPr>
@@ -8901,6 +6567,13 @@
             </a:outerShdw>
           </a:effectLst>
         </p:spPr>
+        <p:txBody>
+          <a:bodyPr/>
+          <a:lstStyle/>
+          <a:p>
+            <a:endParaRPr lang="en-US"/>
+          </a:p>
+        </p:txBody>
       </p:sp>
       <p:sp>
         <p:nvSpPr>
@@ -9085,6 +6758,13 @@
             </a:outerShdw>
           </a:effectLst>
         </p:spPr>
+        <p:txBody>
+          <a:bodyPr/>
+          <a:lstStyle/>
+          <a:p>
+            <a:endParaRPr lang="en-US"/>
+          </a:p>
+        </p:txBody>
       </p:sp>
       <p:sp>
         <p:nvSpPr>
@@ -9226,6 +6906,13 @@
             <a:tailEnd type="triangle"/>
           </a:ln>
         </p:spPr>
+        <p:txBody>
+          <a:bodyPr/>
+          <a:lstStyle/>
+          <a:p>
+            <a:endParaRPr lang="en-US"/>
+          </a:p>
+        </p:txBody>
       </p:sp>
       <p:sp>
         <p:nvSpPr>
@@ -9260,6 +6947,13 @@
             </a:outerShdw>
           </a:effectLst>
         </p:spPr>
+        <p:txBody>
+          <a:bodyPr/>
+          <a:lstStyle/>
+          <a:p>
+            <a:endParaRPr lang="en-US"/>
+          </a:p>
+        </p:txBody>
       </p:sp>
       <p:sp>
         <p:nvSpPr>
@@ -9409,6 +7103,13 @@
             </a:outerShdw>
           </a:effectLst>
         </p:spPr>
+        <p:txBody>
+          <a:bodyPr/>
+          <a:lstStyle/>
+          <a:p>
+            <a:endParaRPr lang="en-US"/>
+          </a:p>
+        </p:txBody>
       </p:sp>
       <p:sp>
         <p:nvSpPr>
@@ -9560,6 +7261,13 @@
             </a:outerShdw>
           </a:effectLst>
         </p:spPr>
+        <p:txBody>
+          <a:bodyPr/>
+          <a:lstStyle/>
+          <a:p>
+            <a:endParaRPr lang="en-US"/>
+          </a:p>
+        </p:txBody>
       </p:sp>
       <p:sp>
         <p:nvSpPr>
@@ -9711,6 +7419,13 @@
             </a:outerShdw>
           </a:effectLst>
         </p:spPr>
+        <p:txBody>
+          <a:bodyPr/>
+          <a:lstStyle/>
+          <a:p>
+            <a:endParaRPr lang="en-US"/>
+          </a:p>
+        </p:txBody>
       </p:sp>
       <p:sp>
         <p:nvSpPr>
@@ -9862,6 +7577,13 @@
             </a:outerShdw>
           </a:effectLst>
         </p:spPr>
+        <p:txBody>
+          <a:bodyPr/>
+          <a:lstStyle/>
+          <a:p>
+            <a:endParaRPr lang="en-US"/>
+          </a:p>
+        </p:txBody>
       </p:sp>
       <p:sp>
         <p:nvSpPr>
@@ -9977,6 +7699,13 @@
             </a:outerShdw>
           </a:effectLst>
         </p:spPr>
+        <p:txBody>
+          <a:bodyPr/>
+          <a:lstStyle/>
+          <a:p>
+            <a:endParaRPr lang="en-US"/>
+          </a:p>
+        </p:txBody>
       </p:sp>
       <p:sp>
         <p:nvSpPr>
@@ -10088,6 +7817,13 @@
             <a:tailEnd type="triangle"/>
           </a:ln>
         </p:spPr>
+        <p:txBody>
+          <a:bodyPr/>
+          <a:lstStyle/>
+          <a:p>
+            <a:endParaRPr lang="en-US"/>
+          </a:p>
+        </p:txBody>
       </p:sp>
       <p:sp>
         <p:nvSpPr>
@@ -10118,6 +7854,13 @@
             <a:tailEnd type="triangle"/>
           </a:ln>
         </p:spPr>
+        <p:txBody>
+          <a:bodyPr/>
+          <a:lstStyle/>
+          <a:p>
+            <a:endParaRPr lang="en-US"/>
+          </a:p>
+        </p:txBody>
       </p:sp>
       <p:sp>
         <p:nvSpPr>
@@ -10148,6 +7891,13 @@
             <a:tailEnd type="triangle"/>
           </a:ln>
         </p:spPr>
+        <p:txBody>
+          <a:bodyPr/>
+          <a:lstStyle/>
+          <a:p>
+            <a:endParaRPr lang="en-US"/>
+          </a:p>
+        </p:txBody>
       </p:sp>
     </p:spTree>
   </p:cSld>
@@ -10293,6 +8043,13 @@
             </a:outerShdw>
           </a:effectLst>
         </p:spPr>
+        <p:txBody>
+          <a:bodyPr/>
+          <a:lstStyle/>
+          <a:p>
+            <a:endParaRPr lang="en-US"/>
+          </a:p>
+        </p:txBody>
       </p:sp>
       <p:sp>
         <p:nvSpPr>
@@ -10318,6 +8075,13 @@
             <a:prstDash val="solid"/>
           </a:ln>
         </p:spPr>
+        <p:txBody>
+          <a:bodyPr/>
+          <a:lstStyle/>
+          <a:p>
+            <a:endParaRPr lang="en-US"/>
+          </a:p>
+        </p:txBody>
       </p:sp>
       <p:sp>
         <p:nvSpPr>
@@ -10472,6 +8236,13 @@
             </a:outerShdw>
           </a:effectLst>
         </p:spPr>
+        <p:txBody>
+          <a:bodyPr/>
+          <a:lstStyle/>
+          <a:p>
+            <a:endParaRPr lang="en-US"/>
+          </a:p>
+        </p:txBody>
       </p:sp>
       <p:sp>
         <p:nvSpPr>
@@ -10497,6 +8268,13 @@
             <a:prstDash val="solid"/>
           </a:ln>
         </p:spPr>
+        <p:txBody>
+          <a:bodyPr/>
+          <a:lstStyle/>
+          <a:p>
+            <a:endParaRPr lang="en-US"/>
+          </a:p>
+        </p:txBody>
       </p:sp>
       <p:sp>
         <p:nvSpPr>
@@ -10651,6 +8429,13 @@
             </a:outerShdw>
           </a:effectLst>
         </p:spPr>
+        <p:txBody>
+          <a:bodyPr/>
+          <a:lstStyle/>
+          <a:p>
+            <a:endParaRPr lang="en-US"/>
+          </a:p>
+        </p:txBody>
       </p:sp>
       <p:sp>
         <p:nvSpPr>
@@ -10676,6 +8461,13 @@
             <a:prstDash val="solid"/>
           </a:ln>
         </p:spPr>
+        <p:txBody>
+          <a:bodyPr/>
+          <a:lstStyle/>
+          <a:p>
+            <a:endParaRPr lang="en-US"/>
+          </a:p>
+        </p:txBody>
       </p:sp>
       <p:sp>
         <p:nvSpPr>
@@ -10830,6 +8622,13 @@
             </a:outerShdw>
           </a:effectLst>
         </p:spPr>
+        <p:txBody>
+          <a:bodyPr/>
+          <a:lstStyle/>
+          <a:p>
+            <a:endParaRPr lang="en-US"/>
+          </a:p>
+        </p:txBody>
       </p:sp>
       <p:sp>
         <p:nvSpPr>
@@ -10855,6 +8654,13 @@
             <a:prstDash val="solid"/>
           </a:ln>
         </p:spPr>
+        <p:txBody>
+          <a:bodyPr/>
+          <a:lstStyle/>
+          <a:p>
+            <a:endParaRPr lang="en-US"/>
+          </a:p>
+        </p:txBody>
       </p:sp>
       <p:sp>
         <p:nvSpPr>
@@ -11002,6 +8808,13 @@
             <a:prstDash val="solid"/>
           </a:ln>
         </p:spPr>
+        <p:txBody>
+          <a:bodyPr/>
+          <a:lstStyle/>
+          <a:p>
+            <a:endParaRPr lang="en-US"/>
+          </a:p>
+        </p:txBody>
       </p:sp>
       <p:sp>
         <p:nvSpPr>
@@ -11107,6 +8920,13 @@
             <a:prstDash val="solid"/>
           </a:ln>
         </p:spPr>
+        <p:txBody>
+          <a:bodyPr/>
+          <a:lstStyle/>
+          <a:p>
+            <a:endParaRPr lang="en-US"/>
+          </a:p>
+        </p:txBody>
       </p:sp>
       <p:sp>
         <p:nvSpPr>
@@ -11212,6 +9032,13 @@
             <a:prstDash val="solid"/>
           </a:ln>
         </p:spPr>
+        <p:txBody>
+          <a:bodyPr/>
+          <a:lstStyle/>
+          <a:p>
+            <a:endParaRPr lang="en-US"/>
+          </a:p>
+        </p:txBody>
       </p:sp>
       <p:sp>
         <p:nvSpPr>
@@ -11435,6 +9262,13 @@
             </a:outerShdw>
           </a:effectLst>
         </p:spPr>
+        <p:txBody>
+          <a:bodyPr/>
+          <a:lstStyle/>
+          <a:p>
+            <a:endParaRPr lang="en-US"/>
+          </a:p>
+        </p:txBody>
       </p:sp>
       <p:pic>
         <p:nvPicPr>
@@ -11574,6 +9408,13 @@
             </a:outerShdw>
           </a:effectLst>
         </p:spPr>
+        <p:txBody>
+          <a:bodyPr/>
+          <a:lstStyle/>
+          <a:p>
+            <a:endParaRPr lang="en-US"/>
+          </a:p>
+        </p:txBody>
       </p:sp>
       <p:pic>
         <p:nvPicPr>
@@ -11713,6 +9554,13 @@
             </a:outerShdw>
           </a:effectLst>
         </p:spPr>
+        <p:txBody>
+          <a:bodyPr/>
+          <a:lstStyle/>
+          <a:p>
+            <a:endParaRPr lang="en-US"/>
+          </a:p>
+        </p:txBody>
       </p:sp>
       <p:pic>
         <p:nvPicPr>
@@ -12041,6 +9889,13 @@
             </a:outerShdw>
           </a:effectLst>
         </p:spPr>
+        <p:txBody>
+          <a:bodyPr/>
+          <a:lstStyle/>
+          <a:p>
+            <a:endParaRPr lang="en-US"/>
+          </a:p>
+        </p:txBody>
       </p:sp>
       <p:sp>
         <p:nvSpPr>
@@ -12156,6 +10011,13 @@
             </a:outerShdw>
           </a:effectLst>
         </p:spPr>
+        <p:txBody>
+          <a:bodyPr/>
+          <a:lstStyle/>
+          <a:p>
+            <a:endParaRPr lang="en-US"/>
+          </a:p>
+        </p:txBody>
       </p:sp>
       <p:sp>
         <p:nvSpPr>
@@ -12271,6 +10133,13 @@
             </a:outerShdw>
           </a:effectLst>
         </p:spPr>
+        <p:txBody>
+          <a:bodyPr/>
+          <a:lstStyle/>
+          <a:p>
+            <a:endParaRPr lang="en-US"/>
+          </a:p>
+        </p:txBody>
       </p:sp>
       <p:sp>
         <p:nvSpPr>
@@ -12425,6 +10294,13 @@
             </a:outerShdw>
           </a:effectLst>
         </p:spPr>
+        <p:txBody>
+          <a:bodyPr/>
+          <a:lstStyle/>
+          <a:p>
+            <a:endParaRPr lang="en-US"/>
+          </a:p>
+        </p:txBody>
       </p:sp>
       <p:sp>
         <p:nvSpPr>
@@ -12540,6 +10416,13 @@
             </a:outerShdw>
           </a:effectLst>
         </p:spPr>
+        <p:txBody>
+          <a:bodyPr/>
+          <a:lstStyle/>
+          <a:p>
+            <a:endParaRPr lang="en-US"/>
+          </a:p>
+        </p:txBody>
       </p:sp>
       <p:sp>
         <p:nvSpPr>
@@ -12655,6 +10538,13 @@
             </a:outerShdw>
           </a:effectLst>
         </p:spPr>
+        <p:txBody>
+          <a:bodyPr/>
+          <a:lstStyle/>
+          <a:p>
+            <a:endParaRPr lang="en-US"/>
+          </a:p>
+        </p:txBody>
       </p:sp>
       <p:sp>
         <p:nvSpPr>
@@ -12920,6 +10810,13 @@
             </a:outerShdw>
           </a:effectLst>
         </p:spPr>
+        <p:txBody>
+          <a:bodyPr/>
+          <a:lstStyle/>
+          <a:p>
+            <a:endParaRPr lang="en-US"/>
+          </a:p>
+        </p:txBody>
       </p:sp>
       <p:pic>
         <p:nvPicPr>
@@ -13059,6 +10956,13 @@
             </a:outerShdw>
           </a:effectLst>
         </p:spPr>
+        <p:txBody>
+          <a:bodyPr/>
+          <a:lstStyle/>
+          <a:p>
+            <a:endParaRPr lang="en-US"/>
+          </a:p>
+        </p:txBody>
       </p:sp>
       <p:pic>
         <p:nvPicPr>
@@ -13198,6 +11102,13 @@
             </a:outerShdw>
           </a:effectLst>
         </p:spPr>
+        <p:txBody>
+          <a:bodyPr/>
+          <a:lstStyle/>
+          <a:p>
+            <a:endParaRPr lang="en-US"/>
+          </a:p>
+        </p:txBody>
       </p:sp>
       <p:pic>
         <p:nvPicPr>
@@ -13448,6 +11359,13 @@
             </a:outerShdw>
           </a:effectLst>
         </p:spPr>
+        <p:txBody>
+          <a:bodyPr/>
+          <a:lstStyle/>
+          <a:p>
+            <a:endParaRPr lang="en-US"/>
+          </a:p>
+        </p:txBody>
       </p:sp>
       <p:sp>
         <p:nvSpPr>
@@ -13473,6 +11391,13 @@
             <a:prstDash val="solid"/>
           </a:ln>
         </p:spPr>
+        <p:txBody>
+          <a:bodyPr/>
+          <a:lstStyle/>
+          <a:p>
+            <a:endParaRPr lang="en-US"/>
+          </a:p>
+        </p:txBody>
       </p:sp>
       <p:sp>
         <p:nvSpPr>
@@ -13687,6 +11612,13 @@
             </a:outerShdw>
           </a:effectLst>
         </p:spPr>
+        <p:txBody>
+          <a:bodyPr/>
+          <a:lstStyle/>
+          <a:p>
+            <a:endParaRPr lang="en-US"/>
+          </a:p>
+        </p:txBody>
       </p:sp>
       <p:sp>
         <p:nvSpPr>
@@ -13712,6 +11644,13 @@
             <a:prstDash val="solid"/>
           </a:ln>
         </p:spPr>
+        <p:txBody>
+          <a:bodyPr/>
+          <a:lstStyle/>
+          <a:p>
+            <a:endParaRPr lang="en-US"/>
+          </a:p>
+        </p:txBody>
       </p:sp>
       <p:sp>
         <p:nvSpPr>
@@ -13926,6 +11865,13 @@
             </a:outerShdw>
           </a:effectLst>
         </p:spPr>
+        <p:txBody>
+          <a:bodyPr/>
+          <a:lstStyle/>
+          <a:p>
+            <a:endParaRPr lang="en-US"/>
+          </a:p>
+        </p:txBody>
       </p:sp>
       <p:sp>
         <p:nvSpPr>
